--- a/slides/presentasi.pptx
+++ b/slides/presentasi.pptx
@@ -3143,7 +3143,7 @@
             <a:avLst/>
           </a:prstGeom>
           <a:solidFill>
-            <a:srgbClr val="00ADD8"/>
+            <a:srgbClr val="008CB0"/>
           </a:solidFill>
           <a:ln>
             <a:noFill/>
@@ -3195,9 +3195,9 @@
           <a:lstStyle/>
           <a:p>
             <a:r>
-              <a:rPr sz="4200" b="1">
-                <a:solidFill>
-                  <a:srgbClr val="1B2533"/>
+              <a:rPr sz="4600" b="1">
+                <a:solidFill>
+                  <a:srgbClr val="111A24"/>
                 </a:solidFill>
                 <a:latin typeface="Arial"/>
               </a:rPr>
@@ -3229,18 +3229,18 @@
           <a:lstStyle/>
           <a:p>
             <a:r>
-              <a:rPr sz="1700" b="1">
-                <a:solidFill>
-                  <a:srgbClr val="374451"/>
+              <a:rPr sz="2000" b="1">
+                <a:solidFill>
+                  <a:srgbClr val="212C38"/>
                 </a:solidFill>
                 <a:latin typeface="Arial"/>
               </a:rPr>
               <a:t>Falahudin Halim Shariski</a:t>
             </a:r>
             <a:r>
-              <a:rPr sz="1700" b="0">
-                <a:solidFill>
-                  <a:srgbClr val="374451"/>
+              <a:rPr sz="2000" b="0">
+                <a:solidFill>
+                  <a:srgbClr val="212C38"/>
                 </a:solidFill>
                 <a:latin typeface="Arial"/>
               </a:rPr>
@@ -3272,9 +3272,9 @@
           <a:lstStyle/>
           <a:p>
             <a:r>
-              <a:rPr sz="1700" b="0">
-                <a:solidFill>
-                  <a:srgbClr val="374451"/>
+              <a:rPr sz="2000" b="0">
+                <a:solidFill>
+                  <a:srgbClr val="212C38"/>
                 </a:solidFill>
                 <a:latin typeface="Arial"/>
               </a:rPr>
@@ -3332,9 +3332,9 @@
           <a:lstStyle/>
           <a:p>
             <a:r>
-              <a:rPr sz="2900" b="1">
-                <a:solidFill>
-                  <a:srgbClr val="1B2533"/>
+              <a:rPr sz="3300" b="1">
+                <a:solidFill>
+                  <a:srgbClr val="111A24"/>
                 </a:solidFill>
                 <a:latin typeface="Arial"/>
               </a:rPr>
@@ -3358,7 +3358,7 @@
             <a:avLst/>
           </a:prstGeom>
           <a:solidFill>
-            <a:srgbClr val="00ADD8"/>
+            <a:srgbClr val="008CB0"/>
           </a:solidFill>
           <a:ln>
             <a:noFill/>
@@ -3395,8 +3395,8 @@
         </p:nvSpPr>
         <p:spPr>
           <a:xfrm>
-            <a:off x="777240" y="1572768"/>
-            <a:ext cx="10637215" cy="1779524"/>
+            <a:off x="777240" y="1536192"/>
+            <a:ext cx="10637215" cy="2248916"/>
           </a:xfrm>
           <a:prstGeom prst="roundRect">
             <a:avLst>
@@ -3404,11 +3404,11 @@
             </a:avLst>
           </a:prstGeom>
           <a:solidFill>
-            <a:srgbClr val="F3F6F8"/>
+            <a:srgbClr val="ECF2F6"/>
           </a:solidFill>
           <a:ln w="9525">
             <a:solidFill>
-              <a:srgbClr val="DDE3E8"/>
+              <a:srgbClr val="C9D4DC"/>
             </a:solidFill>
           </a:ln>
           <a:effectLst/>
@@ -3437,11 +3437,11 @@
               </a:lnSpc>
             </a:pPr>
             <a:r>
-              <a:rPr sz="1300">
-                <a:solidFill>
-                  <a:srgbClr val="1B2733"/>
-                </a:solidFill>
-                <a:latin typeface="Courier New"/>
+              <a:rPr sz="1700">
+                <a:solidFill>
+                  <a:srgbClr val="0E1A26"/>
+                </a:solidFill>
+                <a:latin typeface="JetBrains Mono"/>
               </a:rPr>
               <a:t>// Sebelum</a:t>
             </a:r>
@@ -3453,11 +3453,11 @@
               </a:lnSpc>
             </a:pPr>
             <a:r>
-              <a:rPr sz="1300">
-                <a:solidFill>
-                  <a:srgbClr val="1B2733"/>
-                </a:solidFill>
-                <a:latin typeface="Courier New"/>
+              <a:rPr sz="1700">
+                <a:solidFill>
+                  <a:srgbClr val="0E1A26"/>
+                </a:solidFill>
+                <a:latin typeface="JetBrains Mono"/>
               </a:rPr>
               <a:t>type User struct {</a:t>
             </a:r>
@@ -3469,11 +3469,11 @@
               </a:lnSpc>
             </a:pPr>
             <a:r>
-              <a:rPr sz="1300">
-                <a:solidFill>
-                  <a:srgbClr val="1B2733"/>
-                </a:solidFill>
-                <a:latin typeface="Courier New"/>
+              <a:rPr sz="1700">
+                <a:solidFill>
+                  <a:srgbClr val="0E1A26"/>
+                </a:solidFill>
+                <a:latin typeface="JetBrains Mono"/>
               </a:rPr>
               <a:t>    ID    uint</a:t>
             </a:r>
@@ -3485,11 +3485,11 @@
               </a:lnSpc>
             </a:pPr>
             <a:r>
-              <a:rPr sz="1300">
-                <a:solidFill>
-                  <a:srgbClr val="1B2733"/>
-                </a:solidFill>
-                <a:latin typeface="Courier New"/>
+              <a:rPr sz="1700">
+                <a:solidFill>
+                  <a:srgbClr val="0E1A26"/>
+                </a:solidFill>
+                <a:latin typeface="JetBrains Mono"/>
               </a:rPr>
               <a:t>    Name  string</a:t>
             </a:r>
@@ -3501,11 +3501,11 @@
               </a:lnSpc>
             </a:pPr>
             <a:r>
-              <a:rPr sz="1300">
-                <a:solidFill>
-                  <a:srgbClr val="1B2733"/>
-                </a:solidFill>
-                <a:latin typeface="Courier New"/>
+              <a:rPr sz="1700">
+                <a:solidFill>
+                  <a:srgbClr val="0E1A26"/>
+                </a:solidFill>
+                <a:latin typeface="JetBrains Mono"/>
               </a:rPr>
               <a:t>    Email string</a:t>
             </a:r>
@@ -3517,11 +3517,11 @@
               </a:lnSpc>
             </a:pPr>
             <a:r>
-              <a:rPr sz="1300">
-                <a:solidFill>
-                  <a:srgbClr val="1B2733"/>
-                </a:solidFill>
-                <a:latin typeface="Courier New"/>
+              <a:rPr sz="1700">
+                <a:solidFill>
+                  <a:srgbClr val="0E1A26"/>
+                </a:solidFill>
+                <a:latin typeface="JetBrains Mono"/>
               </a:rPr>
               <a:t>    Phone string</a:t>
             </a:r>
@@ -3533,11 +3533,11 @@
               </a:lnSpc>
             </a:pPr>
             <a:r>
-              <a:rPr sz="1300">
-                <a:solidFill>
-                  <a:srgbClr val="1B2733"/>
-                </a:solidFill>
-                <a:latin typeface="Courier New"/>
+              <a:rPr sz="1700">
+                <a:solidFill>
+                  <a:srgbClr val="0E1A26"/>
+                </a:solidFill>
+                <a:latin typeface="JetBrains Mono"/>
               </a:rPr>
               <a:t>}</a:t>
             </a:r>
@@ -3552,8 +3552,8 @@
         </p:nvSpPr>
         <p:spPr>
           <a:xfrm>
-            <a:off x="777240" y="3571748"/>
-            <a:ext cx="10637215" cy="1779524"/>
+            <a:off x="777240" y="4004564"/>
+            <a:ext cx="10637215" cy="2248916"/>
           </a:xfrm>
           <a:prstGeom prst="roundRect">
             <a:avLst>
@@ -3561,11 +3561,11 @@
             </a:avLst>
           </a:prstGeom>
           <a:solidFill>
-            <a:srgbClr val="F3F6F8"/>
+            <a:srgbClr val="ECF2F6"/>
           </a:solidFill>
           <a:ln w="9525">
             <a:solidFill>
-              <a:srgbClr val="DDE3E8"/>
+              <a:srgbClr val="C9D4DC"/>
             </a:solidFill>
           </a:ln>
           <a:effectLst/>
@@ -3594,11 +3594,11 @@
               </a:lnSpc>
             </a:pPr>
             <a:r>
-              <a:rPr sz="1300">
-                <a:solidFill>
-                  <a:srgbClr val="1B2733"/>
-                </a:solidFill>
-                <a:latin typeface="Courier New"/>
+              <a:rPr sz="1700">
+                <a:solidFill>
+                  <a:srgbClr val="0E1A26"/>
+                </a:solidFill>
+                <a:latin typeface="JetBrains Mono"/>
               </a:rPr>
               <a:t>// Sesudah — Phone dihapus, Name diganti FullName, Age ditambah</a:t>
             </a:r>
@@ -3610,11 +3610,11 @@
               </a:lnSpc>
             </a:pPr>
             <a:r>
-              <a:rPr sz="1300">
-                <a:solidFill>
-                  <a:srgbClr val="1B2733"/>
-                </a:solidFill>
-                <a:latin typeface="Courier New"/>
+              <a:rPr sz="1700">
+                <a:solidFill>
+                  <a:srgbClr val="0E1A26"/>
+                </a:solidFill>
+                <a:latin typeface="JetBrains Mono"/>
               </a:rPr>
               <a:t>type User struct {</a:t>
             </a:r>
@@ -3626,11 +3626,11 @@
               </a:lnSpc>
             </a:pPr>
             <a:r>
-              <a:rPr sz="1300">
-                <a:solidFill>
-                  <a:srgbClr val="1B2733"/>
-                </a:solidFill>
-                <a:latin typeface="Courier New"/>
+              <a:rPr sz="1700">
+                <a:solidFill>
+                  <a:srgbClr val="0E1A26"/>
+                </a:solidFill>
+                <a:latin typeface="JetBrains Mono"/>
               </a:rPr>
               <a:t>    ID       uint</a:t>
             </a:r>
@@ -3642,11 +3642,11 @@
               </a:lnSpc>
             </a:pPr>
             <a:r>
-              <a:rPr sz="1300">
-                <a:solidFill>
-                  <a:srgbClr val="1B2733"/>
-                </a:solidFill>
-                <a:latin typeface="Courier New"/>
+              <a:rPr sz="1700">
+                <a:solidFill>
+                  <a:srgbClr val="0E1A26"/>
+                </a:solidFill>
+                <a:latin typeface="JetBrains Mono"/>
               </a:rPr>
               <a:t>    FullName string</a:t>
             </a:r>
@@ -3658,11 +3658,11 @@
               </a:lnSpc>
             </a:pPr>
             <a:r>
-              <a:rPr sz="1300">
-                <a:solidFill>
-                  <a:srgbClr val="1B2733"/>
-                </a:solidFill>
-                <a:latin typeface="Courier New"/>
+              <a:rPr sz="1700">
+                <a:solidFill>
+                  <a:srgbClr val="0E1A26"/>
+                </a:solidFill>
+                <a:latin typeface="JetBrains Mono"/>
               </a:rPr>
               <a:t>    Email    string</a:t>
             </a:r>
@@ -3674,11 +3674,11 @@
               </a:lnSpc>
             </a:pPr>
             <a:r>
-              <a:rPr sz="1300">
-                <a:solidFill>
-                  <a:srgbClr val="1B2733"/>
-                </a:solidFill>
-                <a:latin typeface="Courier New"/>
+              <a:rPr sz="1700">
+                <a:solidFill>
+                  <a:srgbClr val="0E1A26"/>
+                </a:solidFill>
+                <a:latin typeface="JetBrains Mono"/>
               </a:rPr>
               <a:t>    Age      int</a:t>
             </a:r>
@@ -3690,11 +3690,11 @@
               </a:lnSpc>
             </a:pPr>
             <a:r>
-              <a:rPr sz="1300">
-                <a:solidFill>
-                  <a:srgbClr val="1B2733"/>
-                </a:solidFill>
-                <a:latin typeface="Courier New"/>
+              <a:rPr sz="1700">
+                <a:solidFill>
+                  <a:srgbClr val="0E1A26"/>
+                </a:solidFill>
+                <a:latin typeface="JetBrains Mono"/>
               </a:rPr>
               <a:t>}</a:t>
             </a:r>
@@ -3725,9 +3725,9 @@
           <a:p>
             <a:pPr algn="r"/>
             <a:r>
-              <a:rPr sz="1100">
-                <a:solidFill>
-                  <a:srgbClr val="6B7784"/>
+              <a:rPr sz="1200">
+                <a:solidFill>
+                  <a:srgbClr val="626E7B"/>
                 </a:solidFill>
                 <a:latin typeface="Arial"/>
               </a:rPr>
@@ -3785,9 +3785,9 @@
           <a:lstStyle/>
           <a:p>
             <a:r>
-              <a:rPr sz="2900" b="1">
-                <a:solidFill>
-                  <a:srgbClr val="1B2533"/>
+              <a:rPr sz="3300" b="1">
+                <a:solidFill>
+                  <a:srgbClr val="111A24"/>
                 </a:solidFill>
                 <a:latin typeface="Arial"/>
               </a:rPr>
@@ -3811,7 +3811,7 @@
             <a:avLst/>
           </a:prstGeom>
           <a:solidFill>
-            <a:srgbClr val="00ADD8"/>
+            <a:srgbClr val="008CB0"/>
           </a:solidFill>
           <a:ln>
             <a:noFill/>
@@ -3848,8 +3848,8 @@
         </p:nvSpPr>
         <p:spPr>
           <a:xfrm>
-            <a:off x="777240" y="1572768"/>
-            <a:ext cx="10637215" cy="689864"/>
+            <a:off x="777240" y="1536192"/>
+            <a:ext cx="10637215" cy="823976"/>
           </a:xfrm>
           <a:prstGeom prst="roundRect">
             <a:avLst>
@@ -3857,11 +3857,11 @@
             </a:avLst>
           </a:prstGeom>
           <a:solidFill>
-            <a:srgbClr val="F3F6F8"/>
+            <a:srgbClr val="ECF2F6"/>
           </a:solidFill>
           <a:ln w="9525">
             <a:solidFill>
-              <a:srgbClr val="DDE3E8"/>
+              <a:srgbClr val="C9D4DC"/>
             </a:solidFill>
           </a:ln>
           <a:effectLst/>
@@ -3890,11 +3890,11 @@
               </a:lnSpc>
             </a:pPr>
             <a:r>
-              <a:rPr sz="1300">
-                <a:solidFill>
-                  <a:srgbClr val="1B2733"/>
-                </a:solidFill>
-                <a:latin typeface="Courier New"/>
+              <a:rPr sz="1700">
+                <a:solidFill>
+                  <a:srgbClr val="0E1A26"/>
+                </a:solidFill>
+                <a:latin typeface="JetBrains Mono"/>
               </a:rPr>
               <a:t>ALTER TABLE "users" ADD "full_name" text</a:t>
             </a:r>
@@ -3906,11 +3906,11 @@
               </a:lnSpc>
             </a:pPr>
             <a:r>
-              <a:rPr sz="1300">
-                <a:solidFill>
-                  <a:srgbClr val="1B2733"/>
-                </a:solidFill>
-                <a:latin typeface="Courier New"/>
+              <a:rPr sz="1700">
+                <a:solidFill>
+                  <a:srgbClr val="0E1A26"/>
+                </a:solidFill>
+                <a:latin typeface="JetBrains Mono"/>
               </a:rPr>
               <a:t>ALTER TABLE "users" ADD "age" bigint</a:t>
             </a:r>
@@ -3925,8 +3925,8 @@
         </p:nvSpPr>
         <p:spPr>
           <a:xfrm>
-            <a:off x="777240" y="2482088"/>
-            <a:ext cx="10637215" cy="280670"/>
+            <a:off x="777240" y="2579623"/>
+            <a:ext cx="10637215" cy="346710"/>
           </a:xfrm>
           <a:prstGeom prst="rect">
             <a:avLst/>
@@ -3945,9 +3945,9 @@
               </a:lnSpc>
             </a:pPr>
             <a:r>
-              <a:rPr sz="1700" b="0">
-                <a:solidFill>
-                  <a:srgbClr val="374451"/>
+              <a:rPr sz="2100" b="0">
+                <a:solidFill>
+                  <a:srgbClr val="212C38"/>
                 </a:solidFill>
                 <a:latin typeface="Arial"/>
               </a:rPr>
@@ -3980,9 +3980,9 @@
           <a:p>
             <a:pPr algn="r"/>
             <a:r>
-              <a:rPr sz="1100">
-                <a:solidFill>
-                  <a:srgbClr val="6B7784"/>
+              <a:rPr sz="1200">
+                <a:solidFill>
+                  <a:srgbClr val="626E7B"/>
                 </a:solidFill>
                 <a:latin typeface="Arial"/>
               </a:rPr>
@@ -4040,9 +4040,9 @@
           <a:lstStyle/>
           <a:p>
             <a:r>
-              <a:rPr sz="2900" b="1">
-                <a:solidFill>
-                  <a:srgbClr val="1B2533"/>
+              <a:rPr sz="3300" b="1">
+                <a:solidFill>
+                  <a:srgbClr val="111A24"/>
                 </a:solidFill>
                 <a:latin typeface="Arial"/>
               </a:rPr>
@@ -4066,7 +4066,7 @@
             <a:avLst/>
           </a:prstGeom>
           <a:solidFill>
-            <a:srgbClr val="00ADD8"/>
+            <a:srgbClr val="008CB0"/>
           </a:solidFill>
           <a:ln>
             <a:noFill/>
@@ -4103,8 +4103,8 @@
         </p:nvSpPr>
         <p:spPr>
           <a:xfrm>
-            <a:off x="777240" y="1572768"/>
-            <a:ext cx="10637215" cy="1997456"/>
+            <a:off x="777240" y="1536192"/>
+            <a:ext cx="10637215" cy="2533904"/>
           </a:xfrm>
           <a:prstGeom prst="roundRect">
             <a:avLst>
@@ -4112,11 +4112,11 @@
             </a:avLst>
           </a:prstGeom>
           <a:solidFill>
-            <a:srgbClr val="F3F6F8"/>
+            <a:srgbClr val="ECF2F6"/>
           </a:solidFill>
           <a:ln w="9525">
             <a:solidFill>
-              <a:srgbClr val="DDE3E8"/>
+              <a:srgbClr val="C9D4DC"/>
             </a:solidFill>
           </a:ln>
           <a:effectLst/>
@@ -4145,11 +4145,11 @@
               </a:lnSpc>
             </a:pPr>
             <a:r>
-              <a:rPr sz="1300">
-                <a:solidFill>
-                  <a:srgbClr val="1B2733"/>
-                </a:solidFill>
-                <a:latin typeface="Courier New"/>
+              <a:rPr sz="1700">
+                <a:solidFill>
+                  <a:srgbClr val="0E1A26"/>
+                </a:solidFill>
+                <a:latin typeface="JetBrains Mono"/>
               </a:rPr>
               <a:t>   Column   |  Type</a:t>
             </a:r>
@@ -4161,11 +4161,11 @@
               </a:lnSpc>
             </a:pPr>
             <a:r>
-              <a:rPr sz="1300">
-                <a:solidFill>
-                  <a:srgbClr val="1B2733"/>
-                </a:solidFill>
-                <a:latin typeface="Courier New"/>
+              <a:rPr sz="1700">
+                <a:solidFill>
+                  <a:srgbClr val="0E1A26"/>
+                </a:solidFill>
+                <a:latin typeface="JetBrains Mono"/>
               </a:rPr>
               <a:t>------------+--------</a:t>
             </a:r>
@@ -4177,11 +4177,11 @@
               </a:lnSpc>
             </a:pPr>
             <a:r>
-              <a:rPr sz="1300">
-                <a:solidFill>
-                  <a:srgbClr val="1B2733"/>
-                </a:solidFill>
-                <a:latin typeface="Courier New"/>
+              <a:rPr sz="1700">
+                <a:solidFill>
+                  <a:srgbClr val="0E1A26"/>
+                </a:solidFill>
+                <a:latin typeface="JetBrains Mono"/>
               </a:rPr>
               <a:t> id         | bigint</a:t>
             </a:r>
@@ -4193,11 +4193,11 @@
               </a:lnSpc>
             </a:pPr>
             <a:r>
-              <a:rPr sz="1300">
-                <a:solidFill>
-                  <a:srgbClr val="1B2733"/>
-                </a:solidFill>
-                <a:latin typeface="Courier New"/>
+              <a:rPr sz="1700">
+                <a:solidFill>
+                  <a:srgbClr val="0E1A26"/>
+                </a:solidFill>
+                <a:latin typeface="JetBrains Mono"/>
               </a:rPr>
               <a:t> name       | text     &lt;- masih ada</a:t>
             </a:r>
@@ -4209,11 +4209,11 @@
               </a:lnSpc>
             </a:pPr>
             <a:r>
-              <a:rPr sz="1300">
-                <a:solidFill>
-                  <a:srgbClr val="1B2733"/>
-                </a:solidFill>
-                <a:latin typeface="Courier New"/>
+              <a:rPr sz="1700">
+                <a:solidFill>
+                  <a:srgbClr val="0E1A26"/>
+                </a:solidFill>
+                <a:latin typeface="JetBrains Mono"/>
               </a:rPr>
               <a:t> email      | text</a:t>
             </a:r>
@@ -4225,11 +4225,11 @@
               </a:lnSpc>
             </a:pPr>
             <a:r>
-              <a:rPr sz="1300">
-                <a:solidFill>
-                  <a:srgbClr val="1B2733"/>
-                </a:solidFill>
-                <a:latin typeface="Courier New"/>
+              <a:rPr sz="1700">
+                <a:solidFill>
+                  <a:srgbClr val="0E1A26"/>
+                </a:solidFill>
+                <a:latin typeface="JetBrains Mono"/>
               </a:rPr>
               <a:t> phone      | text     &lt;- masih ada, padahal sudah dihapus dari struct</a:t>
             </a:r>
@@ -4241,11 +4241,11 @@
               </a:lnSpc>
             </a:pPr>
             <a:r>
-              <a:rPr sz="1300">
-                <a:solidFill>
-                  <a:srgbClr val="1B2733"/>
-                </a:solidFill>
-                <a:latin typeface="Courier New"/>
+              <a:rPr sz="1700">
+                <a:solidFill>
+                  <a:srgbClr val="0E1A26"/>
+                </a:solidFill>
+                <a:latin typeface="JetBrains Mono"/>
               </a:rPr>
               <a:t> full_name  | text     &lt;- kolom baru, kosong</a:t>
             </a:r>
@@ -4257,11 +4257,11 @@
               </a:lnSpc>
             </a:pPr>
             <a:r>
-              <a:rPr sz="1300">
-                <a:solidFill>
-                  <a:srgbClr val="1B2733"/>
-                </a:solidFill>
-                <a:latin typeface="Courier New"/>
+              <a:rPr sz="1700">
+                <a:solidFill>
+                  <a:srgbClr val="0E1A26"/>
+                </a:solidFill>
+                <a:latin typeface="JetBrains Mono"/>
               </a:rPr>
               <a:t> age        | bigint</a:t>
             </a:r>
@@ -4276,8 +4276,8 @@
         </p:nvSpPr>
         <p:spPr>
           <a:xfrm>
-            <a:off x="777240" y="3789680"/>
-            <a:ext cx="10637215" cy="1125728"/>
+            <a:off x="777240" y="4289552"/>
+            <a:ext cx="10637215" cy="1393952"/>
           </a:xfrm>
           <a:prstGeom prst="roundRect">
             <a:avLst>
@@ -4285,11 +4285,11 @@
             </a:avLst>
           </a:prstGeom>
           <a:solidFill>
-            <a:srgbClr val="F3F6F8"/>
+            <a:srgbClr val="ECF2F6"/>
           </a:solidFill>
           <a:ln w="9525">
             <a:solidFill>
-              <a:srgbClr val="DDE3E8"/>
+              <a:srgbClr val="C9D4DC"/>
             </a:solidFill>
           </a:ln>
           <a:effectLst/>
@@ -4318,11 +4318,11 @@
               </a:lnSpc>
             </a:pPr>
             <a:r>
-              <a:rPr sz="1300">
-                <a:solidFill>
-                  <a:srgbClr val="1B2733"/>
-                </a:solidFill>
-                <a:latin typeface="Courier New"/>
+              <a:rPr sz="1700">
+                <a:solidFill>
+                  <a:srgbClr val="0E1A26"/>
+                </a:solidFill>
+                <a:latin typeface="JetBrains Mono"/>
               </a:rPr>
               <a:t> id |     name     | full_name |   phone</a:t>
             </a:r>
@@ -4334,11 +4334,11 @@
               </a:lnSpc>
             </a:pPr>
             <a:r>
-              <a:rPr sz="1300">
-                <a:solidFill>
-                  <a:srgbClr val="1B2733"/>
-                </a:solidFill>
-                <a:latin typeface="Courier New"/>
+              <a:rPr sz="1700">
+                <a:solidFill>
+                  <a:srgbClr val="0E1A26"/>
+                </a:solidFill>
+                <a:latin typeface="JetBrains Mono"/>
               </a:rPr>
               <a:t>----+--------------+-----------+-----------</a:t>
             </a:r>
@@ -4350,11 +4350,11 @@
               </a:lnSpc>
             </a:pPr>
             <a:r>
-              <a:rPr sz="1300">
-                <a:solidFill>
-                  <a:srgbClr val="1B2733"/>
-                </a:solidFill>
-                <a:latin typeface="Courier New"/>
+              <a:rPr sz="1700">
+                <a:solidFill>
+                  <a:srgbClr val="0E1A26"/>
+                </a:solidFill>
+                <a:latin typeface="JetBrains Mono"/>
               </a:rPr>
               <a:t>  1 | Budi Santoso |           | 0812-1111</a:t>
             </a:r>
@@ -4366,11 +4366,11 @@
               </a:lnSpc>
             </a:pPr>
             <a:r>
-              <a:rPr sz="1300">
-                <a:solidFill>
-                  <a:srgbClr val="1B2733"/>
-                </a:solidFill>
-                <a:latin typeface="Courier New"/>
+              <a:rPr sz="1700">
+                <a:solidFill>
+                  <a:srgbClr val="0E1A26"/>
+                </a:solidFill>
+                <a:latin typeface="JetBrains Mono"/>
               </a:rPr>
               <a:t>  2 | Siti Rahayu  |           | 0813-2222</a:t>
             </a:r>
@@ -4385,8 +4385,8 @@
         </p:nvSpPr>
         <p:spPr>
           <a:xfrm>
-            <a:off x="777240" y="5134864"/>
-            <a:ext cx="10637215" cy="280670"/>
+            <a:off x="777240" y="5902960"/>
+            <a:ext cx="10637215" cy="346710"/>
           </a:xfrm>
           <a:prstGeom prst="rect">
             <a:avLst/>
@@ -4405,27 +4405,27 @@
               </a:lnSpc>
             </a:pPr>
             <a:r>
-              <a:rPr sz="1700" b="0">
-                <a:solidFill>
-                  <a:srgbClr val="374451"/>
+              <a:rPr sz="2100" b="0">
+                <a:solidFill>
+                  <a:srgbClr val="212C38"/>
                 </a:solidFill>
                 <a:latin typeface="Arial"/>
               </a:rPr>
               <a:t>Data lama tetap di kolom </a:t>
             </a:r>
             <a:r>
-              <a:rPr sz="1530" b="0">
-                <a:solidFill>
-                  <a:srgbClr val="374451"/>
-                </a:solidFill>
-                <a:latin typeface="Courier New"/>
+              <a:rPr sz="1890" b="0">
+                <a:solidFill>
+                  <a:srgbClr val="212C38"/>
+                </a:solidFill>
+                <a:latin typeface="JetBrains Mono"/>
               </a:rPr>
               <a:t>name</a:t>
             </a:r>
             <a:r>
-              <a:rPr sz="1700" b="0">
-                <a:solidFill>
-                  <a:srgbClr val="374451"/>
+              <a:rPr sz="2100" b="0">
+                <a:solidFill>
+                  <a:srgbClr val="212C38"/>
                 </a:solidFill>
                 <a:latin typeface="Arial"/>
               </a:rPr>
@@ -4458,9 +4458,9 @@
           <a:p>
             <a:pPr algn="r"/>
             <a:r>
-              <a:rPr sz="1100">
-                <a:solidFill>
-                  <a:srgbClr val="6B7784"/>
+              <a:rPr sz="1200">
+                <a:solidFill>
+                  <a:srgbClr val="626E7B"/>
                 </a:solidFill>
                 <a:latin typeface="Arial"/>
               </a:rPr>
@@ -4518,9 +4518,9 @@
           <a:lstStyle/>
           <a:p>
             <a:r>
-              <a:rPr sz="2900" b="1">
-                <a:solidFill>
-                  <a:srgbClr val="1B2533"/>
+              <a:rPr sz="3300" b="1">
+                <a:solidFill>
+                  <a:srgbClr val="111A24"/>
                 </a:solidFill>
                 <a:latin typeface="Arial"/>
               </a:rPr>
@@ -4544,7 +4544,7 @@
             <a:avLst/>
           </a:prstGeom>
           <a:solidFill>
-            <a:srgbClr val="00ADD8"/>
+            <a:srgbClr val="008CB0"/>
           </a:solidFill>
           <a:ln>
             <a:noFill/>
@@ -4582,8 +4582,8 @@
           <p:nvPr/>
         </p:nvGraphicFramePr>
         <p:xfrm>
-          <a:off x="777240" y="1682495"/>
-          <a:ext cx="10637215" cy="2915912"/>
+          <a:off x="777240" y="1645919"/>
+          <a:ext cx="10637215" cy="3749032"/>
         </p:xfrm>
         <a:graphic>
           <a:graphicData uri="http://schemas.openxmlformats.org/drawingml/2006/table">
@@ -4595,16 +4595,16 @@
                 <a:gridCol w="5318607"/>
                 <a:gridCol w="5318608"/>
               </a:tblGrid>
-              <a:tr h="364489">
+              <a:tr h="468629">
                 <a:tc>
                   <a:txBody>
                     <a:bodyPr wrap="square"/>
                     <a:lstStyle/>
                     <a:p>
                       <a:r>
-                        <a:rPr sz="1400" b="1">
+                        <a:rPr sz="1800" b="1">
                           <a:solidFill>
-                            <a:srgbClr val="1B2533"/>
+                            <a:srgbClr val="111A24"/>
                           </a:solidFill>
                           <a:latin typeface="Arial"/>
                         </a:rPr>
@@ -4614,7 +4614,7 @@
                   </a:txBody>
                   <a:tcPr marL="118872" marR="118872" marT="36576" marB="36576" anchor="ctr">
                     <a:solidFill>
-                      <a:srgbClr val="E8F6FA"/>
+                      <a:srgbClr val="DDEFF6"/>
                     </a:solidFill>
                   </a:tcPr>
                 </a:tc>
@@ -4624,9 +4624,9 @@
                     <a:lstStyle/>
                     <a:p>
                       <a:r>
-                        <a:rPr sz="1400" b="1">
+                        <a:rPr sz="1800" b="1">
                           <a:solidFill>
-                            <a:srgbClr val="1B2533"/>
+                            <a:srgbClr val="111A24"/>
                           </a:solidFill>
                           <a:latin typeface="Arial"/>
                         </a:rPr>
@@ -4636,21 +4636,21 @@
                   </a:txBody>
                   <a:tcPr marL="118872" marR="118872" marT="36576" marB="36576" anchor="ctr">
                     <a:solidFill>
-                      <a:srgbClr val="E8F6FA"/>
+                      <a:srgbClr val="DDEFF6"/>
                     </a:solidFill>
                   </a:tcPr>
                 </a:tc>
               </a:tr>
-              <a:tr h="364489">
+              <a:tr h="468629">
                 <a:tc>
                   <a:txBody>
                     <a:bodyPr wrap="square"/>
                     <a:lstStyle/>
                     <a:p>
                       <a:r>
-                        <a:rPr sz="1400" b="0">
+                        <a:rPr sz="1800" b="0">
                           <a:solidFill>
-                            <a:srgbClr val="374451"/>
+                            <a:srgbClr val="212C38"/>
                           </a:solidFill>
                           <a:latin typeface="Arial"/>
                         </a:rPr>
@@ -4670,9 +4670,9 @@
                     <a:lstStyle/>
                     <a:p>
                       <a:r>
-                        <a:rPr sz="1400" b="0">
+                        <a:rPr sz="1800" b="0">
                           <a:solidFill>
-                            <a:srgbClr val="374451"/>
+                            <a:srgbClr val="212C38"/>
                           </a:solidFill>
                           <a:latin typeface="Arial"/>
                         </a:rPr>
@@ -4687,16 +4687,16 @@
                   </a:tcPr>
                 </a:tc>
               </a:tr>
-              <a:tr h="364489">
+              <a:tr h="468629">
                 <a:tc>
                   <a:txBody>
                     <a:bodyPr wrap="square"/>
                     <a:lstStyle/>
                     <a:p>
                       <a:r>
-                        <a:rPr sz="1400" b="0">
+                        <a:rPr sz="1800" b="0">
                           <a:solidFill>
-                            <a:srgbClr val="374451"/>
+                            <a:srgbClr val="212C38"/>
                           </a:solidFill>
                           <a:latin typeface="Arial"/>
                         </a:rPr>
@@ -4716,9 +4716,9 @@
                     <a:lstStyle/>
                     <a:p>
                       <a:r>
-                        <a:rPr sz="1400" b="0">
+                        <a:rPr sz="1800" b="0">
                           <a:solidFill>
-                            <a:srgbClr val="374451"/>
+                            <a:srgbClr val="212C38"/>
                           </a:solidFill>
                           <a:latin typeface="Arial"/>
                         </a:rPr>
@@ -4733,16 +4733,16 @@
                   </a:tcPr>
                 </a:tc>
               </a:tr>
-              <a:tr h="364489">
+              <a:tr h="468629">
                 <a:tc>
                   <a:txBody>
                     <a:bodyPr wrap="square"/>
                     <a:lstStyle/>
                     <a:p>
                       <a:r>
-                        <a:rPr sz="1400" b="0">
+                        <a:rPr sz="1800" b="0">
                           <a:solidFill>
-                            <a:srgbClr val="374451"/>
+                            <a:srgbClr val="212C38"/>
                           </a:solidFill>
                           <a:latin typeface="Arial"/>
                         </a:rPr>
@@ -4762,9 +4762,9 @@
                     <a:lstStyle/>
                     <a:p>
                       <a:r>
-                        <a:rPr sz="1400" b="0">
+                        <a:rPr sz="1800" b="0">
                           <a:solidFill>
-                            <a:srgbClr val="374451"/>
+                            <a:srgbClr val="212C38"/>
                           </a:solidFill>
                           <a:latin typeface="Arial"/>
                         </a:rPr>
@@ -4779,16 +4779,16 @@
                   </a:tcPr>
                 </a:tc>
               </a:tr>
-              <a:tr h="364489">
+              <a:tr h="468629">
                 <a:tc>
                   <a:txBody>
                     <a:bodyPr wrap="square"/>
                     <a:lstStyle/>
                     <a:p>
                       <a:r>
-                        <a:rPr sz="1400" b="0">
+                        <a:rPr sz="1800" b="0">
                           <a:solidFill>
-                            <a:srgbClr val="374451"/>
+                            <a:srgbClr val="212C38"/>
                           </a:solidFill>
                           <a:latin typeface="Arial"/>
                         </a:rPr>
@@ -4808,9 +4808,9 @@
                     <a:lstStyle/>
                     <a:p>
                       <a:r>
-                        <a:rPr sz="1400" b="0">
+                        <a:rPr sz="1800" b="0">
                           <a:solidFill>
-                            <a:srgbClr val="374451"/>
+                            <a:srgbClr val="212C38"/>
                           </a:solidFill>
                           <a:latin typeface="Arial"/>
                         </a:rPr>
@@ -4825,16 +4825,16 @@
                   </a:tcPr>
                 </a:tc>
               </a:tr>
-              <a:tr h="364489">
+              <a:tr h="468629">
                 <a:tc>
                   <a:txBody>
                     <a:bodyPr wrap="square"/>
                     <a:lstStyle/>
                     <a:p>
                       <a:r>
-                        <a:rPr sz="1400" b="0">
+                        <a:rPr sz="1800" b="0">
                           <a:solidFill>
-                            <a:srgbClr val="374451"/>
+                            <a:srgbClr val="212C38"/>
                           </a:solidFill>
                           <a:latin typeface="Arial"/>
                         </a:rPr>
@@ -4854,9 +4854,9 @@
                     <a:lstStyle/>
                     <a:p>
                       <a:r>
-                        <a:rPr sz="1400" b="0">
+                        <a:rPr sz="1800" b="0">
                           <a:solidFill>
-                            <a:srgbClr val="374451"/>
+                            <a:srgbClr val="212C38"/>
                           </a:solidFill>
                           <a:latin typeface="Arial"/>
                         </a:rPr>
@@ -4871,16 +4871,16 @@
                   </a:tcPr>
                 </a:tc>
               </a:tr>
-              <a:tr h="364489">
+              <a:tr h="468629">
                 <a:tc>
                   <a:txBody>
                     <a:bodyPr wrap="square"/>
                     <a:lstStyle/>
                     <a:p>
                       <a:r>
-                        <a:rPr sz="1400" b="0">
+                        <a:rPr sz="1800" b="0">
                           <a:solidFill>
-                            <a:srgbClr val="374451"/>
+                            <a:srgbClr val="212C38"/>
                           </a:solidFill>
                           <a:latin typeface="Arial"/>
                         </a:rPr>
@@ -4900,9 +4900,9 @@
                     <a:lstStyle/>
                     <a:p>
                       <a:r>
-                        <a:rPr sz="1400" b="0">
+                        <a:rPr sz="1800" b="0">
                           <a:solidFill>
-                            <a:srgbClr val="374451"/>
+                            <a:srgbClr val="212C38"/>
                           </a:solidFill>
                           <a:latin typeface="Arial"/>
                         </a:rPr>
@@ -4917,16 +4917,16 @@
                   </a:tcPr>
                 </a:tc>
               </a:tr>
-              <a:tr h="364489">
+              <a:tr h="468629">
                 <a:tc>
                   <a:txBody>
                     <a:bodyPr wrap="square"/>
                     <a:lstStyle/>
                     <a:p>
                       <a:r>
-                        <a:rPr sz="1400" b="0">
+                        <a:rPr sz="1800" b="0">
                           <a:solidFill>
-                            <a:srgbClr val="374451"/>
+                            <a:srgbClr val="212C38"/>
                           </a:solidFill>
                           <a:latin typeface="Arial"/>
                         </a:rPr>
@@ -4946,9 +4946,9 @@
                     <a:lstStyle/>
                     <a:p>
                       <a:r>
-                        <a:rPr sz="1400" b="0">
+                        <a:rPr sz="1800" b="0">
                           <a:solidFill>
-                            <a:srgbClr val="374451"/>
+                            <a:srgbClr val="212C38"/>
                           </a:solidFill>
                           <a:latin typeface="Arial"/>
                         </a:rPr>
@@ -4991,9 +4991,9 @@
           <a:p>
             <a:pPr algn="r"/>
             <a:r>
-              <a:rPr sz="1100">
-                <a:solidFill>
-                  <a:srgbClr val="6B7784"/>
+              <a:rPr sz="1200">
+                <a:solidFill>
+                  <a:srgbClr val="626E7B"/>
                 </a:solidFill>
                 <a:latin typeface="Arial"/>
               </a:rPr>
@@ -5051,9 +5051,9 @@
           <a:lstStyle/>
           <a:p>
             <a:r>
-              <a:rPr sz="2900" b="1">
-                <a:solidFill>
-                  <a:srgbClr val="1B2533"/>
+              <a:rPr sz="3300" b="1">
+                <a:solidFill>
+                  <a:srgbClr val="111A24"/>
                 </a:solidFill>
                 <a:latin typeface="Arial"/>
               </a:rPr>
@@ -5077,7 +5077,7 @@
             <a:avLst/>
           </a:prstGeom>
           <a:solidFill>
-            <a:srgbClr val="00ADD8"/>
+            <a:srgbClr val="008CB0"/>
           </a:solidFill>
           <a:ln>
             <a:noFill/>
@@ -5114,8 +5114,8 @@
         </p:nvSpPr>
         <p:spPr>
           <a:xfrm>
-            <a:off x="777240" y="1572768"/>
-            <a:ext cx="10637215" cy="280670"/>
+            <a:off x="777240" y="1536192"/>
+            <a:ext cx="10637215" cy="346710"/>
           </a:xfrm>
           <a:prstGeom prst="rect">
             <a:avLst/>
@@ -5134,9 +5134,9 @@
               </a:lnSpc>
             </a:pPr>
             <a:r>
-              <a:rPr sz="1700" b="0">
-                <a:solidFill>
-                  <a:srgbClr val="374451"/>
+              <a:rPr sz="2100" b="0">
+                <a:solidFill>
+                  <a:srgbClr val="212C38"/>
                 </a:solidFill>
                 <a:latin typeface="Arial"/>
               </a:rPr>
@@ -5153,8 +5153,8 @@
         </p:nvSpPr>
         <p:spPr>
           <a:xfrm>
-            <a:off x="777240" y="2008885"/>
-            <a:ext cx="10637215" cy="561340"/>
+            <a:off x="777240" y="2038349"/>
+            <a:ext cx="10637215" cy="693420"/>
           </a:xfrm>
           <a:prstGeom prst="rect">
             <a:avLst/>
@@ -5173,27 +5173,27 @@
               </a:lnSpc>
             </a:pPr>
             <a:r>
-              <a:rPr sz="1700" b="0">
-                <a:solidFill>
-                  <a:srgbClr val="374451"/>
+              <a:rPr sz="2100" b="0">
+                <a:solidFill>
+                  <a:srgbClr val="212C38"/>
                 </a:solidFill>
                 <a:latin typeface="Arial"/>
               </a:rPr>
               <a:t>Pertanyaan </a:t>
             </a:r>
             <a:r>
-              <a:rPr sz="1700" b="0" i="1">
-                <a:solidFill>
-                  <a:srgbClr val="374451"/>
+              <a:rPr sz="2100" b="0" i="1">
+                <a:solidFill>
+                  <a:srgbClr val="212C38"/>
                 </a:solidFill>
                 <a:latin typeface="Arial"/>
               </a:rPr>
               <a:t>"production sekarang di schema versi berapa?"</a:t>
             </a:r>
             <a:r>
-              <a:rPr sz="1700" b="0">
-                <a:solidFill>
-                  <a:srgbClr val="374451"/>
+              <a:rPr sz="2100" b="0">
+                <a:solidFill>
+                  <a:srgbClr val="212C38"/>
                 </a:solidFill>
                 <a:latin typeface="Arial"/>
               </a:rPr>
@@ -5226,9 +5226,9 @@
           <a:p>
             <a:pPr algn="r"/>
             <a:r>
-              <a:rPr sz="1100">
-                <a:solidFill>
-                  <a:srgbClr val="6B7784"/>
+              <a:rPr sz="1200">
+                <a:solidFill>
+                  <a:srgbClr val="626E7B"/>
                 </a:solidFill>
                 <a:latin typeface="Arial"/>
               </a:rPr>
@@ -5286,9 +5286,9 @@
           <a:lstStyle/>
           <a:p>
             <a:r>
-              <a:rPr sz="2900" b="1">
-                <a:solidFill>
-                  <a:srgbClr val="1B2533"/>
+              <a:rPr sz="3300" b="1">
+                <a:solidFill>
+                  <a:srgbClr val="111A24"/>
                 </a:solidFill>
                 <a:latin typeface="Arial"/>
               </a:rPr>
@@ -5312,7 +5312,7 @@
             <a:avLst/>
           </a:prstGeom>
           <a:solidFill>
-            <a:srgbClr val="00ADD8"/>
+            <a:srgbClr val="008CB0"/>
           </a:solidFill>
           <a:ln>
             <a:noFill/>
@@ -5349,8 +5349,8 @@
         </p:nvSpPr>
         <p:spPr>
           <a:xfrm>
-            <a:off x="777240" y="1572768"/>
-            <a:ext cx="10637215" cy="280670"/>
+            <a:off x="777240" y="1536192"/>
+            <a:ext cx="10637215" cy="346710"/>
           </a:xfrm>
           <a:prstGeom prst="rect">
             <a:avLst/>
@@ -5369,9 +5369,9 @@
               </a:lnSpc>
             </a:pPr>
             <a:r>
-              <a:rPr sz="1700" b="0">
-                <a:solidFill>
-                  <a:srgbClr val="374451"/>
+              <a:rPr sz="2100" b="0">
+                <a:solidFill>
+                  <a:srgbClr val="212C38"/>
                 </a:solidFill>
                 <a:latin typeface="Arial"/>
               </a:rPr>
@@ -5388,8 +5388,8 @@
         </p:nvSpPr>
         <p:spPr>
           <a:xfrm>
-            <a:off x="777240" y="2008885"/>
-            <a:ext cx="10637215" cy="280670"/>
+            <a:off x="777240" y="2038349"/>
+            <a:ext cx="10637215" cy="693420"/>
           </a:xfrm>
           <a:prstGeom prst="rect">
             <a:avLst/>
@@ -5408,9 +5408,9 @@
               </a:lnSpc>
             </a:pPr>
             <a:r>
-              <a:rPr sz="1700" b="0">
-                <a:solidFill>
-                  <a:srgbClr val="374451"/>
+              <a:rPr sz="2100" b="0">
+                <a:solidFill>
+                  <a:srgbClr val="212C38"/>
                 </a:solidFill>
                 <a:latin typeface="Arial"/>
               </a:rPr>
@@ -5427,8 +5427,8 @@
         </p:nvSpPr>
         <p:spPr>
           <a:xfrm>
-            <a:off x="777240" y="2445003"/>
-            <a:ext cx="10637215" cy="280670"/>
+            <a:off x="777240" y="2887218"/>
+            <a:ext cx="10637215" cy="346710"/>
           </a:xfrm>
           <a:prstGeom prst="rect">
             <a:avLst/>
@@ -5447,9 +5447,9 @@
               </a:lnSpc>
             </a:pPr>
             <a:r>
-              <a:rPr sz="1700" b="0">
-                <a:solidFill>
-                  <a:srgbClr val="374451"/>
+              <a:rPr sz="2100" b="0">
+                <a:solidFill>
+                  <a:srgbClr val="212C38"/>
                 </a:solidFill>
                 <a:latin typeface="Arial"/>
               </a:rPr>
@@ -5482,9 +5482,9 @@
           <a:p>
             <a:pPr algn="r"/>
             <a:r>
-              <a:rPr sz="1100">
-                <a:solidFill>
-                  <a:srgbClr val="6B7784"/>
+              <a:rPr sz="1200">
+                <a:solidFill>
+                  <a:srgbClr val="626E7B"/>
                 </a:solidFill>
                 <a:latin typeface="Arial"/>
               </a:rPr>
@@ -5542,9 +5542,9 @@
           <a:lstStyle/>
           <a:p>
             <a:r>
-              <a:rPr sz="2900" b="1">
-                <a:solidFill>
-                  <a:srgbClr val="1B2533"/>
+              <a:rPr sz="3300" b="1">
+                <a:solidFill>
+                  <a:srgbClr val="111A24"/>
                 </a:solidFill>
                 <a:latin typeface="Arial"/>
               </a:rPr>
@@ -5568,7 +5568,7 @@
             <a:avLst/>
           </a:prstGeom>
           <a:solidFill>
-            <a:srgbClr val="00ADD8"/>
+            <a:srgbClr val="008CB0"/>
           </a:solidFill>
           <a:ln>
             <a:noFill/>
@@ -5605,8 +5605,8 @@
         </p:nvSpPr>
         <p:spPr>
           <a:xfrm>
-            <a:off x="777240" y="1572768"/>
-            <a:ext cx="10637215" cy="280670"/>
+            <a:off x="777240" y="1536192"/>
+            <a:ext cx="10637215" cy="346710"/>
           </a:xfrm>
           <a:prstGeom prst="rect">
             <a:avLst/>
@@ -5625,9 +5625,9 @@
               </a:lnSpc>
             </a:pPr>
             <a:r>
-              <a:rPr sz="1700" b="0">
-                <a:solidFill>
-                  <a:srgbClr val="374451"/>
+              <a:rPr sz="2100" b="0">
+                <a:solidFill>
+                  <a:srgbClr val="212C38"/>
                 </a:solidFill>
                 <a:latin typeface="Arial"/>
               </a:rPr>
@@ -5644,8 +5644,8 @@
         </p:nvSpPr>
         <p:spPr>
           <a:xfrm>
-            <a:off x="777240" y="2008885"/>
-            <a:ext cx="10637215" cy="1779524"/>
+            <a:off x="777240" y="2038349"/>
+            <a:ext cx="10637215" cy="2248916"/>
           </a:xfrm>
           <a:prstGeom prst="roundRect">
             <a:avLst>
@@ -5653,11 +5653,11 @@
             </a:avLst>
           </a:prstGeom>
           <a:solidFill>
-            <a:srgbClr val="F3F6F8"/>
+            <a:srgbClr val="ECF2F6"/>
           </a:solidFill>
           <a:ln w="9525">
             <a:solidFill>
-              <a:srgbClr val="DDE3E8"/>
+              <a:srgbClr val="C9D4DC"/>
             </a:solidFill>
           </a:ln>
           <a:effectLst/>
@@ -5686,11 +5686,11 @@
               </a:lnSpc>
             </a:pPr>
             <a:r>
-              <a:rPr sz="1300">
-                <a:solidFill>
-                  <a:srgbClr val="1B2733"/>
-                </a:solidFill>
-                <a:latin typeface="Courier New"/>
+              <a:rPr sz="1700">
+                <a:solidFill>
+                  <a:srgbClr val="0E1A26"/>
+                </a:solidFill>
+                <a:latin typeface="JetBrains Mono"/>
               </a:rPr>
               <a:t>migrations/</a:t>
             </a:r>
@@ -5702,11 +5702,11 @@
               </a:lnSpc>
             </a:pPr>
             <a:r>
-              <a:rPr sz="1300">
-                <a:solidFill>
-                  <a:srgbClr val="1B2733"/>
-                </a:solidFill>
-                <a:latin typeface="Courier New"/>
+              <a:rPr sz="1700">
+                <a:solidFill>
+                  <a:srgbClr val="0E1A26"/>
+                </a:solidFill>
+                <a:latin typeface="JetBrains Mono"/>
               </a:rPr>
               <a:t>  000001_create_users.up.sql</a:t>
             </a:r>
@@ -5718,11 +5718,11 @@
               </a:lnSpc>
             </a:pPr>
             <a:r>
-              <a:rPr sz="1300">
-                <a:solidFill>
-                  <a:srgbClr val="1B2733"/>
-                </a:solidFill>
-                <a:latin typeface="Courier New"/>
+              <a:rPr sz="1700">
+                <a:solidFill>
+                  <a:srgbClr val="0E1A26"/>
+                </a:solidFill>
+                <a:latin typeface="JetBrains Mono"/>
               </a:rPr>
               <a:t>  000001_create_users.down.sql</a:t>
             </a:r>
@@ -5734,11 +5734,11 @@
               </a:lnSpc>
             </a:pPr>
             <a:r>
-              <a:rPr sz="1300">
-                <a:solidFill>
-                  <a:srgbClr val="1B2733"/>
-                </a:solidFill>
-                <a:latin typeface="Courier New"/>
+              <a:rPr sz="1700">
+                <a:solidFill>
+                  <a:srgbClr val="0E1A26"/>
+                </a:solidFill>
+                <a:latin typeface="JetBrains Mono"/>
               </a:rPr>
               <a:t>  000002_add_phone_to_users.up.sql</a:t>
             </a:r>
@@ -5750,11 +5750,11 @@
               </a:lnSpc>
             </a:pPr>
             <a:r>
-              <a:rPr sz="1300">
-                <a:solidFill>
-                  <a:srgbClr val="1B2733"/>
-                </a:solidFill>
-                <a:latin typeface="Courier New"/>
+              <a:rPr sz="1700">
+                <a:solidFill>
+                  <a:srgbClr val="0E1A26"/>
+                </a:solidFill>
+                <a:latin typeface="JetBrains Mono"/>
               </a:rPr>
               <a:t>  000002_add_phone_to_users.down.sql</a:t>
             </a:r>
@@ -5766,11 +5766,11 @@
               </a:lnSpc>
             </a:pPr>
             <a:r>
-              <a:rPr sz="1300">
-                <a:solidFill>
-                  <a:srgbClr val="1B2733"/>
-                </a:solidFill>
-                <a:latin typeface="Courier New"/>
+              <a:rPr sz="1700">
+                <a:solidFill>
+                  <a:srgbClr val="0E1A26"/>
+                </a:solidFill>
+                <a:latin typeface="JetBrains Mono"/>
               </a:rPr>
               <a:t>  000003_split_user_name.up.sql</a:t>
             </a:r>
@@ -5782,11 +5782,11 @@
               </a:lnSpc>
             </a:pPr>
             <a:r>
-              <a:rPr sz="1300">
-                <a:solidFill>
-                  <a:srgbClr val="1B2733"/>
-                </a:solidFill>
-                <a:latin typeface="Courier New"/>
+              <a:rPr sz="1700">
+                <a:solidFill>
+                  <a:srgbClr val="0E1A26"/>
+                </a:solidFill>
+                <a:latin typeface="JetBrains Mono"/>
               </a:rPr>
               <a:t>  000003_split_user_name.down.sql</a:t>
             </a:r>
@@ -5801,8 +5801,8 @@
         </p:nvSpPr>
         <p:spPr>
           <a:xfrm>
-            <a:off x="777240" y="4007866"/>
-            <a:ext cx="10637215" cy="280670"/>
+            <a:off x="777240" y="4506722"/>
+            <a:ext cx="10637215" cy="346710"/>
           </a:xfrm>
           <a:prstGeom prst="rect">
             <a:avLst/>
@@ -5821,9 +5821,9 @@
               </a:lnSpc>
             </a:pPr>
             <a:r>
-              <a:rPr sz="1700" b="0">
-                <a:solidFill>
-                  <a:srgbClr val="374451"/>
+              <a:rPr sz="2100" b="0">
+                <a:solidFill>
+                  <a:srgbClr val="212C38"/>
                 </a:solidFill>
                 <a:latin typeface="Arial"/>
               </a:rPr>
@@ -5856,9 +5856,9 @@
           <a:p>
             <a:pPr algn="r"/>
             <a:r>
-              <a:rPr sz="1100">
-                <a:solidFill>
-                  <a:srgbClr val="6B7784"/>
+              <a:rPr sz="1200">
+                <a:solidFill>
+                  <a:srgbClr val="626E7B"/>
                 </a:solidFill>
                 <a:latin typeface="Arial"/>
               </a:rPr>
@@ -5916,9 +5916,9 @@
           <a:lstStyle/>
           <a:p>
             <a:r>
-              <a:rPr sz="2900" b="1">
-                <a:solidFill>
-                  <a:srgbClr val="1B2533"/>
+              <a:rPr sz="3300" b="1">
+                <a:solidFill>
+                  <a:srgbClr val="111A24"/>
                 </a:solidFill>
                 <a:latin typeface="Arial"/>
               </a:rPr>
@@ -5942,7 +5942,7 @@
             <a:avLst/>
           </a:prstGeom>
           <a:solidFill>
-            <a:srgbClr val="00ADD8"/>
+            <a:srgbClr val="008CB0"/>
           </a:solidFill>
           <a:ln>
             <a:noFill/>
@@ -5979,8 +5979,8 @@
         </p:nvSpPr>
         <p:spPr>
           <a:xfrm>
-            <a:off x="777240" y="1572768"/>
-            <a:ext cx="10637215" cy="1125728"/>
+            <a:off x="777240" y="1536192"/>
+            <a:ext cx="10637215" cy="1393952"/>
           </a:xfrm>
           <a:prstGeom prst="roundRect">
             <a:avLst>
@@ -5988,11 +5988,11 @@
             </a:avLst>
           </a:prstGeom>
           <a:solidFill>
-            <a:srgbClr val="F3F6F8"/>
+            <a:srgbClr val="ECF2F6"/>
           </a:solidFill>
           <a:ln w="9525">
             <a:solidFill>
-              <a:srgbClr val="DDE3E8"/>
+              <a:srgbClr val="C9D4DC"/>
             </a:solidFill>
           </a:ln>
           <a:effectLst/>
@@ -6021,11 +6021,11 @@
               </a:lnSpc>
             </a:pPr>
             <a:r>
-              <a:rPr sz="1300">
-                <a:solidFill>
-                  <a:srgbClr val="1B2733"/>
-                </a:solidFill>
-                <a:latin typeface="Courier New"/>
+              <a:rPr sz="1700">
+                <a:solidFill>
+                  <a:srgbClr val="0E1A26"/>
+                </a:solidFill>
+                <a:latin typeface="JetBrains Mono"/>
               </a:rPr>
               <a:t>migrate up              # jalankan semua yang belum</a:t>
             </a:r>
@@ -6037,11 +6037,11 @@
               </a:lnSpc>
             </a:pPr>
             <a:r>
-              <a:rPr sz="1300">
-                <a:solidFill>
-                  <a:srgbClr val="1B2733"/>
-                </a:solidFill>
-                <a:latin typeface="Courier New"/>
+              <a:rPr sz="1700">
+                <a:solidFill>
+                  <a:srgbClr val="0E1A26"/>
+                </a:solidFill>
+                <a:latin typeface="JetBrains Mono"/>
               </a:rPr>
               <a:t>migrate down 1          # mundur satu langkah</a:t>
             </a:r>
@@ -6053,11 +6053,11 @@
               </a:lnSpc>
             </a:pPr>
             <a:r>
-              <a:rPr sz="1300">
-                <a:solidFill>
-                  <a:srgbClr val="1B2733"/>
-                </a:solidFill>
-                <a:latin typeface="Courier New"/>
+              <a:rPr sz="1700">
+                <a:solidFill>
+                  <a:srgbClr val="0E1A26"/>
+                </a:solidFill>
+                <a:latin typeface="JetBrains Mono"/>
               </a:rPr>
               <a:t>migrate version         # cek versi sekarang</a:t>
             </a:r>
@@ -6069,11 +6069,11 @@
               </a:lnSpc>
             </a:pPr>
             <a:r>
-              <a:rPr sz="1300">
-                <a:solidFill>
-                  <a:srgbClr val="1B2733"/>
-                </a:solidFill>
-                <a:latin typeface="Courier New"/>
+              <a:rPr sz="1700">
+                <a:solidFill>
+                  <a:srgbClr val="0E1A26"/>
+                </a:solidFill>
+                <a:latin typeface="JetBrains Mono"/>
               </a:rPr>
               <a:t>migrate force 3         # set versi secara manual</a:t>
             </a:r>
@@ -6104,9 +6104,9 @@
           <a:p>
             <a:pPr algn="r"/>
             <a:r>
-              <a:rPr sz="1100">
-                <a:solidFill>
-                  <a:srgbClr val="6B7784"/>
+              <a:rPr sz="1200">
+                <a:solidFill>
+                  <a:srgbClr val="626E7B"/>
                 </a:solidFill>
                 <a:latin typeface="Arial"/>
               </a:rPr>
@@ -6164,9 +6164,9 @@
           <a:lstStyle/>
           <a:p>
             <a:r>
-              <a:rPr sz="2900" b="1">
-                <a:solidFill>
-                  <a:srgbClr val="1B2533"/>
+              <a:rPr sz="3300" b="1">
+                <a:solidFill>
+                  <a:srgbClr val="111A24"/>
                 </a:solidFill>
                 <a:latin typeface="Arial"/>
               </a:rPr>
@@ -6190,7 +6190,7 @@
             <a:avLst/>
           </a:prstGeom>
           <a:solidFill>
-            <a:srgbClr val="00ADD8"/>
+            <a:srgbClr val="008CB0"/>
           </a:solidFill>
           <a:ln>
             <a:noFill/>
@@ -6227,8 +6227,8 @@
         </p:nvSpPr>
         <p:spPr>
           <a:xfrm>
-            <a:off x="777240" y="1572768"/>
-            <a:ext cx="10637215" cy="471931"/>
+            <a:off x="777240" y="1536192"/>
+            <a:ext cx="10637215" cy="538988"/>
           </a:xfrm>
           <a:prstGeom prst="roundRect">
             <a:avLst>
@@ -6236,11 +6236,11 @@
             </a:avLst>
           </a:prstGeom>
           <a:solidFill>
-            <a:srgbClr val="F3F6F8"/>
+            <a:srgbClr val="ECF2F6"/>
           </a:solidFill>
           <a:ln w="9525">
             <a:solidFill>
-              <a:srgbClr val="DDE3E8"/>
+              <a:srgbClr val="C9D4DC"/>
             </a:solidFill>
           </a:ln>
           <a:effectLst/>
@@ -6269,11 +6269,11 @@
               </a:lnSpc>
             </a:pPr>
             <a:r>
-              <a:rPr sz="1300">
-                <a:solidFill>
-                  <a:srgbClr val="1B2733"/>
-                </a:solidFill>
-                <a:latin typeface="Courier New"/>
+              <a:rPr sz="1700">
+                <a:solidFill>
+                  <a:srgbClr val="0E1A26"/>
+                </a:solidFill>
+                <a:latin typeface="JetBrains Mono"/>
               </a:rPr>
               <a:t>SELECT * FROM schema_migrations;</a:t>
             </a:r>
@@ -6288,8 +6288,8 @@
         </p:nvSpPr>
         <p:spPr>
           <a:xfrm>
-            <a:off x="777240" y="2264156"/>
-            <a:ext cx="10637215" cy="907796"/>
+            <a:off x="777240" y="2294635"/>
+            <a:ext cx="10637215" cy="1108964"/>
           </a:xfrm>
           <a:prstGeom prst="roundRect">
             <a:avLst>
@@ -6297,11 +6297,11 @@
             </a:avLst>
           </a:prstGeom>
           <a:solidFill>
-            <a:srgbClr val="F3F6F8"/>
+            <a:srgbClr val="ECF2F6"/>
           </a:solidFill>
           <a:ln w="9525">
             <a:solidFill>
-              <a:srgbClr val="DDE3E8"/>
+              <a:srgbClr val="C9D4DC"/>
             </a:solidFill>
           </a:ln>
           <a:effectLst/>
@@ -6330,11 +6330,11 @@
               </a:lnSpc>
             </a:pPr>
             <a:r>
-              <a:rPr sz="1300">
-                <a:solidFill>
-                  <a:srgbClr val="1B2733"/>
-                </a:solidFill>
-                <a:latin typeface="Courier New"/>
+              <a:rPr sz="1700">
+                <a:solidFill>
+                  <a:srgbClr val="0E1A26"/>
+                </a:solidFill>
+                <a:latin typeface="JetBrains Mono"/>
               </a:rPr>
               <a:t> version | dirty</a:t>
             </a:r>
@@ -6346,11 +6346,11 @@
               </a:lnSpc>
             </a:pPr>
             <a:r>
-              <a:rPr sz="1300">
-                <a:solidFill>
-                  <a:srgbClr val="1B2733"/>
-                </a:solidFill>
-                <a:latin typeface="Courier New"/>
+              <a:rPr sz="1700">
+                <a:solidFill>
+                  <a:srgbClr val="0E1A26"/>
+                </a:solidFill>
+                <a:latin typeface="JetBrains Mono"/>
               </a:rPr>
               <a:t>---------+-------</a:t>
             </a:r>
@@ -6362,11 +6362,11 @@
               </a:lnSpc>
             </a:pPr>
             <a:r>
-              <a:rPr sz="1300">
-                <a:solidFill>
-                  <a:srgbClr val="1B2733"/>
-                </a:solidFill>
-                <a:latin typeface="Courier New"/>
+              <a:rPr sz="1700">
+                <a:solidFill>
+                  <a:srgbClr val="0E1A26"/>
+                </a:solidFill>
+                <a:latin typeface="JetBrains Mono"/>
               </a:rPr>
               <a:t>       4 | f</a:t>
             </a:r>
@@ -6381,8 +6381,8 @@
         </p:nvSpPr>
         <p:spPr>
           <a:xfrm>
-            <a:off x="777240" y="3391408"/>
-            <a:ext cx="10637215" cy="561340"/>
+            <a:off x="777240" y="3623056"/>
+            <a:ext cx="10637215" cy="693420"/>
           </a:xfrm>
           <a:prstGeom prst="rect">
             <a:avLst/>
@@ -6401,45 +6401,45 @@
               </a:lnSpc>
             </a:pPr>
             <a:r>
-              <a:rPr sz="1700" b="0">
-                <a:solidFill>
-                  <a:srgbClr val="374451"/>
+              <a:rPr sz="2100" b="0">
+                <a:solidFill>
+                  <a:srgbClr val="212C38"/>
                 </a:solidFill>
                 <a:latin typeface="Arial"/>
               </a:rPr>
               <a:t>Dua kolom. </a:t>
             </a:r>
             <a:r>
-              <a:rPr sz="1530" b="0">
-                <a:solidFill>
-                  <a:srgbClr val="374451"/>
-                </a:solidFill>
-                <a:latin typeface="Courier New"/>
+              <a:rPr sz="1890" b="0">
+                <a:solidFill>
+                  <a:srgbClr val="212C38"/>
+                </a:solidFill>
+                <a:latin typeface="JetBrains Mono"/>
               </a:rPr>
               <a:t>version</a:t>
             </a:r>
             <a:r>
-              <a:rPr sz="1700" b="0">
-                <a:solidFill>
-                  <a:srgbClr val="374451"/>
+              <a:rPr sz="2100" b="0">
+                <a:solidFill>
+                  <a:srgbClr val="212C38"/>
                 </a:solidFill>
                 <a:latin typeface="Arial"/>
               </a:rPr>
               <a:t> adalah migration terakhir yang berhasil, </a:t>
             </a:r>
             <a:r>
-              <a:rPr sz="1530" b="0">
-                <a:solidFill>
-                  <a:srgbClr val="374451"/>
-                </a:solidFill>
-                <a:latin typeface="Courier New"/>
+              <a:rPr sz="1890" b="0">
+                <a:solidFill>
+                  <a:srgbClr val="212C38"/>
+                </a:solidFill>
+                <a:latin typeface="JetBrains Mono"/>
               </a:rPr>
               <a:t>dirty</a:t>
             </a:r>
             <a:r>
-              <a:rPr sz="1700" b="0">
-                <a:solidFill>
-                  <a:srgbClr val="374451"/>
+              <a:rPr sz="2100" b="0">
+                <a:solidFill>
+                  <a:srgbClr val="212C38"/>
                 </a:solidFill>
                 <a:latin typeface="Arial"/>
               </a:rPr>
@@ -6456,8 +6456,8 @@
         </p:nvSpPr>
         <p:spPr>
           <a:xfrm>
-            <a:off x="777240" y="4108196"/>
-            <a:ext cx="10637215" cy="280670"/>
+            <a:off x="777240" y="4471924"/>
+            <a:ext cx="10637215" cy="346710"/>
           </a:xfrm>
           <a:prstGeom prst="rect">
             <a:avLst/>
@@ -6476,9 +6476,9 @@
               </a:lnSpc>
             </a:pPr>
             <a:r>
-              <a:rPr sz="1700" b="0">
-                <a:solidFill>
-                  <a:srgbClr val="374451"/>
+              <a:rPr sz="2100" b="0">
+                <a:solidFill>
+                  <a:srgbClr val="212C38"/>
                 </a:solidFill>
                 <a:latin typeface="Arial"/>
               </a:rPr>
@@ -6511,9 +6511,9 @@
           <a:p>
             <a:pPr algn="r"/>
             <a:r>
-              <a:rPr sz="1100">
-                <a:solidFill>
-                  <a:srgbClr val="6B7784"/>
+              <a:rPr sz="1200">
+                <a:solidFill>
+                  <a:srgbClr val="626E7B"/>
                 </a:solidFill>
                 <a:latin typeface="Arial"/>
               </a:rPr>
@@ -6571,9 +6571,9 @@
           <a:lstStyle/>
           <a:p>
             <a:r>
-              <a:rPr sz="2900" b="1">
-                <a:solidFill>
-                  <a:srgbClr val="1B2533"/>
+              <a:rPr sz="3300" b="1">
+                <a:solidFill>
+                  <a:srgbClr val="111A24"/>
                 </a:solidFill>
                 <a:latin typeface="Arial"/>
               </a:rPr>
@@ -6597,7 +6597,7 @@
             <a:avLst/>
           </a:prstGeom>
           <a:solidFill>
-            <a:srgbClr val="00ADD8"/>
+            <a:srgbClr val="008CB0"/>
           </a:solidFill>
           <a:ln>
             <a:noFill/>
@@ -6634,8 +6634,8 @@
         </p:nvSpPr>
         <p:spPr>
           <a:xfrm>
-            <a:off x="777240" y="1572768"/>
-            <a:ext cx="10637215" cy="280670"/>
+            <a:off x="777240" y="1536192"/>
+            <a:ext cx="10637215" cy="346710"/>
           </a:xfrm>
           <a:prstGeom prst="rect">
             <a:avLst/>
@@ -6654,9 +6654,9 @@
               </a:lnSpc>
             </a:pPr>
             <a:r>
-              <a:rPr sz="1700" b="0">
-                <a:solidFill>
-                  <a:srgbClr val="374451"/>
+              <a:rPr sz="2100" b="0">
+                <a:solidFill>
+                  <a:srgbClr val="212C38"/>
                 </a:solidFill>
                 <a:latin typeface="Arial"/>
               </a:rPr>
@@ -6673,8 +6673,8 @@
         </p:nvSpPr>
         <p:spPr>
           <a:xfrm>
-            <a:off x="777240" y="2008885"/>
-            <a:ext cx="10637215" cy="1062228"/>
+            <a:off x="777240" y="2038349"/>
+            <a:ext cx="10637215" cy="1312164"/>
           </a:xfrm>
           <a:prstGeom prst="rect">
             <a:avLst/>
@@ -6692,51 +6692,51 @@
                 <a:spcPct val="128000"/>
               </a:lnSpc>
               <a:spcAft>
-                <a:spcPts val="578"/>
+                <a:spcPts val="714"/>
               </a:spcAft>
             </a:pPr>
             <a:r>
-              <a:rPr sz="1700" b="1">
-                <a:solidFill>
-                  <a:srgbClr val="00ADD8"/>
+              <a:rPr sz="2100" b="1">
+                <a:solidFill>
+                  <a:srgbClr val="008CB0"/>
                 </a:solidFill>
                 <a:latin typeface="Arial"/>
               </a:rPr>
               <a:t>1.  </a:t>
             </a:r>
             <a:r>
-              <a:rPr sz="1700" b="0">
-                <a:solidFill>
-                  <a:srgbClr val="374451"/>
+              <a:rPr sz="2100" b="0">
+                <a:solidFill>
+                  <a:srgbClr val="212C38"/>
                 </a:solidFill>
                 <a:latin typeface="Arial"/>
               </a:rPr>
               <a:t>Tulis </a:t>
             </a:r>
             <a:r>
-              <a:rPr sz="1530" b="0">
-                <a:solidFill>
-                  <a:srgbClr val="374451"/>
-                </a:solidFill>
-                <a:latin typeface="Courier New"/>
+              <a:rPr sz="1890" b="0">
+                <a:solidFill>
+                  <a:srgbClr val="212C38"/>
+                </a:solidFill>
+                <a:latin typeface="JetBrains Mono"/>
               </a:rPr>
               <a:t>version = N</a:t>
             </a:r>
             <a:r>
-              <a:rPr sz="1700" b="0">
-                <a:solidFill>
-                  <a:srgbClr val="374451"/>
+              <a:rPr sz="2100" b="0">
+                <a:solidFill>
+                  <a:srgbClr val="212C38"/>
                 </a:solidFill>
                 <a:latin typeface="Arial"/>
               </a:rPr>
               <a:t>, </a:t>
             </a:r>
             <a:r>
-              <a:rPr sz="1530" b="0">
-                <a:solidFill>
-                  <a:srgbClr val="374451"/>
-                </a:solidFill>
-                <a:latin typeface="Courier New"/>
+              <a:rPr sz="1890" b="0">
+                <a:solidFill>
+                  <a:srgbClr val="212C38"/>
+                </a:solidFill>
+                <a:latin typeface="JetBrains Mono"/>
               </a:rPr>
               <a:t>dirty = true</a:t>
             </a:r>
@@ -6747,22 +6747,22 @@
                 <a:spcPct val="128000"/>
               </a:lnSpc>
               <a:spcAft>
-                <a:spcPts val="578"/>
+                <a:spcPts val="714"/>
               </a:spcAft>
             </a:pPr>
             <a:r>
-              <a:rPr sz="1700" b="1">
-                <a:solidFill>
-                  <a:srgbClr val="00ADD8"/>
+              <a:rPr sz="2100" b="1">
+                <a:solidFill>
+                  <a:srgbClr val="008CB0"/>
                 </a:solidFill>
                 <a:latin typeface="Arial"/>
               </a:rPr>
               <a:t>2.  </a:t>
             </a:r>
             <a:r>
-              <a:rPr sz="1700" b="0">
-                <a:solidFill>
-                  <a:srgbClr val="374451"/>
+              <a:rPr sz="2100" b="0">
+                <a:solidFill>
+                  <a:srgbClr val="212C38"/>
                 </a:solidFill>
                 <a:latin typeface="Arial"/>
               </a:rPr>
@@ -6775,33 +6775,33 @@
                 <a:spcPct val="128000"/>
               </a:lnSpc>
               <a:spcAft>
-                <a:spcPts val="578"/>
+                <a:spcPts val="714"/>
               </a:spcAft>
             </a:pPr>
             <a:r>
-              <a:rPr sz="1700" b="1">
-                <a:solidFill>
-                  <a:srgbClr val="00ADD8"/>
+              <a:rPr sz="2100" b="1">
+                <a:solidFill>
+                  <a:srgbClr val="008CB0"/>
                 </a:solidFill>
                 <a:latin typeface="Arial"/>
               </a:rPr>
               <a:t>3.  </a:t>
             </a:r>
             <a:r>
-              <a:rPr sz="1700" b="0">
-                <a:solidFill>
-                  <a:srgbClr val="374451"/>
+              <a:rPr sz="2100" b="0">
+                <a:solidFill>
+                  <a:srgbClr val="212C38"/>
                 </a:solidFill>
                 <a:latin typeface="Arial"/>
               </a:rPr>
               <a:t>Kalau berhasil, set </a:t>
             </a:r>
             <a:r>
-              <a:rPr sz="1530" b="0">
-                <a:solidFill>
-                  <a:srgbClr val="374451"/>
-                </a:solidFill>
-                <a:latin typeface="Courier New"/>
+              <a:rPr sz="1890" b="0">
+                <a:solidFill>
+                  <a:srgbClr val="212C38"/>
+                </a:solidFill>
+                <a:latin typeface="JetBrains Mono"/>
               </a:rPr>
               <a:t>dirty = false</a:t>
             </a:r>
@@ -6816,8 +6816,8 @@
         </p:nvSpPr>
         <p:spPr>
           <a:xfrm>
-            <a:off x="777240" y="3253994"/>
-            <a:ext cx="10637215" cy="280670"/>
+            <a:off x="777240" y="3533394"/>
+            <a:ext cx="10637215" cy="346710"/>
           </a:xfrm>
           <a:prstGeom prst="rect">
             <a:avLst/>
@@ -6836,45 +6836,45 @@
               </a:lnSpc>
             </a:pPr>
             <a:r>
-              <a:rPr sz="1700" b="0">
-                <a:solidFill>
-                  <a:srgbClr val="374451"/>
+              <a:rPr sz="2100" b="0">
+                <a:solidFill>
+                  <a:srgbClr val="212C38"/>
                 </a:solidFill>
                 <a:latin typeface="Arial"/>
               </a:rPr>
               <a:t>Kalau langkah 2 gagal, </a:t>
             </a:r>
             <a:r>
-              <a:rPr sz="1530" b="0">
-                <a:solidFill>
-                  <a:srgbClr val="374451"/>
-                </a:solidFill>
-                <a:latin typeface="Courier New"/>
+              <a:rPr sz="1890" b="0">
+                <a:solidFill>
+                  <a:srgbClr val="212C38"/>
+                </a:solidFill>
+                <a:latin typeface="JetBrains Mono"/>
               </a:rPr>
               <a:t>dirty</a:t>
             </a:r>
             <a:r>
-              <a:rPr sz="1700" b="0">
-                <a:solidFill>
-                  <a:srgbClr val="374451"/>
+              <a:rPr sz="2100" b="0">
+                <a:solidFill>
+                  <a:srgbClr val="212C38"/>
                 </a:solidFill>
                 <a:latin typeface="Arial"/>
               </a:rPr>
               <a:t> tetap </a:t>
             </a:r>
             <a:r>
-              <a:rPr sz="1530" b="0">
-                <a:solidFill>
-                  <a:srgbClr val="374451"/>
-                </a:solidFill>
-                <a:latin typeface="Courier New"/>
+              <a:rPr sz="1890" b="0">
+                <a:solidFill>
+                  <a:srgbClr val="212C38"/>
+                </a:solidFill>
+                <a:latin typeface="JetBrains Mono"/>
               </a:rPr>
               <a:t>true</a:t>
             </a:r>
             <a:r>
-              <a:rPr sz="1700" b="0">
-                <a:solidFill>
-                  <a:srgbClr val="374451"/>
+              <a:rPr sz="2100" b="0">
+                <a:solidFill>
+                  <a:srgbClr val="212C38"/>
                 </a:solidFill>
                 <a:latin typeface="Arial"/>
               </a:rPr>
@@ -6891,8 +6891,8 @@
         </p:nvSpPr>
         <p:spPr>
           <a:xfrm>
-            <a:off x="777240" y="3690112"/>
-            <a:ext cx="10637215" cy="471931"/>
+            <a:off x="777240" y="4035552"/>
+            <a:ext cx="10637215" cy="538988"/>
           </a:xfrm>
           <a:prstGeom prst="roundRect">
             <a:avLst>
@@ -6900,11 +6900,11 @@
             </a:avLst>
           </a:prstGeom>
           <a:solidFill>
-            <a:srgbClr val="F3F6F8"/>
+            <a:srgbClr val="ECF2F6"/>
           </a:solidFill>
           <a:ln w="9525">
             <a:solidFill>
-              <a:srgbClr val="DDE3E8"/>
+              <a:srgbClr val="C9D4DC"/>
             </a:solidFill>
           </a:ln>
           <a:effectLst/>
@@ -6933,11 +6933,11 @@
               </a:lnSpc>
             </a:pPr>
             <a:r>
-              <a:rPr sz="1300">
-                <a:solidFill>
-                  <a:srgbClr val="1B2733"/>
-                </a:solidFill>
-                <a:latin typeface="Courier New"/>
+              <a:rPr sz="1700">
+                <a:solidFill>
+                  <a:srgbClr val="0E1A26"/>
+                </a:solidFill>
+                <a:latin typeface="JetBrains Mono"/>
               </a:rPr>
               <a:t>MIGRATION GAGAL: Dirty database version 2. Fix and force version.</a:t>
             </a:r>
@@ -6952,8 +6952,8 @@
         </p:nvSpPr>
         <p:spPr>
           <a:xfrm>
-            <a:off x="777240" y="4381500"/>
-            <a:ext cx="10637215" cy="280670"/>
+            <a:off x="777240" y="4793996"/>
+            <a:ext cx="10637215" cy="346710"/>
           </a:xfrm>
           <a:prstGeom prst="rect">
             <a:avLst/>
@@ -6972,9 +6972,9 @@
               </a:lnSpc>
             </a:pPr>
             <a:r>
-              <a:rPr sz="1700" b="0">
-                <a:solidFill>
-                  <a:srgbClr val="374451"/>
+              <a:rPr sz="2100" b="0">
+                <a:solidFill>
+                  <a:srgbClr val="212C38"/>
                 </a:solidFill>
                 <a:latin typeface="Arial"/>
               </a:rPr>
@@ -7007,9 +7007,9 @@
           <a:p>
             <a:pPr algn="r"/>
             <a:r>
-              <a:rPr sz="1100">
-                <a:solidFill>
-                  <a:srgbClr val="6B7784"/>
+              <a:rPr sz="1200">
+                <a:solidFill>
+                  <a:srgbClr val="626E7B"/>
                 </a:solidFill>
                 <a:latin typeface="Arial"/>
               </a:rPr>
@@ -7067,9 +7067,9 @@
           <a:lstStyle/>
           <a:p>
             <a:r>
-              <a:rPr sz="2900" b="1">
-                <a:solidFill>
-                  <a:srgbClr val="1B2533"/>
+              <a:rPr sz="3300" b="1">
+                <a:solidFill>
+                  <a:srgbClr val="111A24"/>
                 </a:solidFill>
                 <a:latin typeface="Arial"/>
               </a:rPr>
@@ -7093,7 +7093,7 @@
             <a:avLst/>
           </a:prstGeom>
           <a:solidFill>
-            <a:srgbClr val="00ADD8"/>
+            <a:srgbClr val="008CB0"/>
           </a:solidFill>
           <a:ln>
             <a:noFill/>
@@ -7130,8 +7130,8 @@
         </p:nvSpPr>
         <p:spPr>
           <a:xfrm>
-            <a:off x="777240" y="1572768"/>
-            <a:ext cx="10637215" cy="280670"/>
+            <a:off x="777240" y="1536192"/>
+            <a:ext cx="10637215" cy="346710"/>
           </a:xfrm>
           <a:prstGeom prst="rect">
             <a:avLst/>
@@ -7150,9 +7150,9 @@
               </a:lnSpc>
             </a:pPr>
             <a:r>
-              <a:rPr sz="1700" b="0">
-                <a:solidFill>
-                  <a:srgbClr val="374451"/>
+              <a:rPr sz="2100" b="0">
+                <a:solidFill>
+                  <a:srgbClr val="212C38"/>
                 </a:solidFill>
                 <a:latin typeface="Arial"/>
               </a:rPr>
@@ -7169,8 +7169,8 @@
         </p:nvSpPr>
         <p:spPr>
           <a:xfrm>
-            <a:off x="777240" y="2008885"/>
-            <a:ext cx="10637215" cy="394335"/>
+            <a:off x="777240" y="2038349"/>
+            <a:ext cx="10637215" cy="462915"/>
           </a:xfrm>
           <a:prstGeom prst="rect">
             <a:avLst/>
@@ -7184,11 +7184,11 @@
           <a:lstStyle/>
           <a:p>
             <a:r>
-              <a:rPr sz="2070" b="1">
-                <a:solidFill>
-                  <a:srgbClr val="00ADD8"/>
-                </a:solidFill>
-                <a:latin typeface="Courier New"/>
+              <a:rPr sz="2430" b="1">
+                <a:solidFill>
+                  <a:srgbClr val="008CB0"/>
+                </a:solidFill>
+                <a:latin typeface="JetBrains Mono"/>
               </a:rPr>
               <a:t>github.com/shariski/go-migration</a:t>
             </a:r>
@@ -7203,8 +7203,8 @@
         </p:nvSpPr>
         <p:spPr>
           <a:xfrm>
-            <a:off x="777240" y="2558668"/>
-            <a:ext cx="10637215" cy="689864"/>
+            <a:off x="777240" y="2656713"/>
+            <a:ext cx="10637215" cy="823976"/>
           </a:xfrm>
           <a:prstGeom prst="roundRect">
             <a:avLst>
@@ -7212,11 +7212,11 @@
             </a:avLst>
           </a:prstGeom>
           <a:solidFill>
-            <a:srgbClr val="F3F6F8"/>
+            <a:srgbClr val="ECF2F6"/>
           </a:solidFill>
           <a:ln w="9525">
             <a:solidFill>
-              <a:srgbClr val="DDE3E8"/>
+              <a:srgbClr val="C9D4DC"/>
             </a:solidFill>
           </a:ln>
           <a:effectLst/>
@@ -7245,11 +7245,11 @@
               </a:lnSpc>
             </a:pPr>
             <a:r>
-              <a:rPr sz="1300">
-                <a:solidFill>
-                  <a:srgbClr val="1B2733"/>
-                </a:solidFill>
-                <a:latin typeface="Courier New"/>
+              <a:rPr sz="1700">
+                <a:solidFill>
+                  <a:srgbClr val="0E1A26"/>
+                </a:solidFill>
+                <a:latin typeface="JetBrains Mono"/>
               </a:rPr>
               <a:t>make up</a:t>
             </a:r>
@@ -7261,11 +7261,11 @@
               </a:lnSpc>
             </a:pPr>
             <a:r>
-              <a:rPr sz="1300">
-                <a:solidFill>
-                  <a:srgbClr val="1B2733"/>
-                </a:solidFill>
-                <a:latin typeface="Courier New"/>
+              <a:rPr sz="1700">
+                <a:solidFill>
+                  <a:srgbClr val="0E1A26"/>
+                </a:solidFill>
+                <a:latin typeface="JetBrains Mono"/>
               </a:rPr>
               <a:t>make demo-gorm</a:t>
             </a:r>
@@ -7296,9 +7296,9 @@
           <a:p>
             <a:pPr algn="r"/>
             <a:r>
-              <a:rPr sz="1100">
-                <a:solidFill>
-                  <a:srgbClr val="6B7784"/>
+              <a:rPr sz="1200">
+                <a:solidFill>
+                  <a:srgbClr val="626E7B"/>
                 </a:solidFill>
                 <a:latin typeface="Arial"/>
               </a:rPr>
@@ -7356,9 +7356,9 @@
           <a:lstStyle/>
           <a:p>
             <a:r>
-              <a:rPr sz="2900" b="1">
-                <a:solidFill>
-                  <a:srgbClr val="1B2533"/>
+              <a:rPr sz="3300" b="1">
+                <a:solidFill>
+                  <a:srgbClr val="111A24"/>
                 </a:solidFill>
                 <a:latin typeface="Arial"/>
               </a:rPr>
@@ -7382,7 +7382,7 @@
             <a:avLst/>
           </a:prstGeom>
           <a:solidFill>
-            <a:srgbClr val="00ADD8"/>
+            <a:srgbClr val="008CB0"/>
           </a:solidFill>
           <a:ln>
             <a:noFill/>
@@ -7419,8 +7419,8 @@
         </p:nvSpPr>
         <p:spPr>
           <a:xfrm>
-            <a:off x="777240" y="1572768"/>
-            <a:ext cx="10637215" cy="471931"/>
+            <a:off x="777240" y="1536192"/>
+            <a:ext cx="10637215" cy="538988"/>
           </a:xfrm>
           <a:prstGeom prst="roundRect">
             <a:avLst>
@@ -7428,11 +7428,11 @@
             </a:avLst>
           </a:prstGeom>
           <a:solidFill>
-            <a:srgbClr val="F3F6F8"/>
+            <a:srgbClr val="ECF2F6"/>
           </a:solidFill>
           <a:ln w="9525">
             <a:solidFill>
-              <a:srgbClr val="DDE3E8"/>
+              <a:srgbClr val="C9D4DC"/>
             </a:solidFill>
           </a:ln>
           <a:effectLst/>
@@ -7461,11 +7461,11 @@
               </a:lnSpc>
             </a:pPr>
             <a:r>
-              <a:rPr sz="1300">
-                <a:solidFill>
-                  <a:srgbClr val="1B2733"/>
-                </a:solidFill>
-                <a:latin typeface="Courier New"/>
+              <a:rPr sz="1700">
+                <a:solidFill>
+                  <a:srgbClr val="0E1A26"/>
+                </a:solidFill>
+                <a:latin typeface="JetBrains Mono"/>
               </a:rPr>
               <a:t>ALTER TABLE orders ADD COLUMN status TEXT NOT NULL;</a:t>
             </a:r>
@@ -7480,8 +7480,8 @@
         </p:nvSpPr>
         <p:spPr>
           <a:xfrm>
-            <a:off x="777240" y="2264156"/>
-            <a:ext cx="10637215" cy="561340"/>
+            <a:off x="777240" y="2294635"/>
+            <a:ext cx="10637215" cy="693420"/>
           </a:xfrm>
           <a:prstGeom prst="rect">
             <a:avLst/>
@@ -7500,81 +7500,81 @@
               </a:lnSpc>
             </a:pPr>
             <a:r>
-              <a:rPr sz="1700" b="0">
-                <a:solidFill>
-                  <a:srgbClr val="374451"/>
+              <a:rPr sz="2100" b="0">
+                <a:solidFill>
+                  <a:srgbClr val="212C38"/>
                 </a:solidFill>
                 <a:latin typeface="Arial"/>
               </a:rPr>
               <a:t>Postgres harus mengisi nilai untuk semua baris yang sudah ada. Tanpa </a:t>
             </a:r>
             <a:r>
-              <a:rPr sz="1530" b="0">
-                <a:solidFill>
-                  <a:srgbClr val="374451"/>
-                </a:solidFill>
-                <a:latin typeface="Courier New"/>
+              <a:rPr sz="1890" b="0">
+                <a:solidFill>
+                  <a:srgbClr val="212C38"/>
+                </a:solidFill>
+                <a:latin typeface="JetBrains Mono"/>
               </a:rPr>
               <a:t>DEFAULT</a:t>
             </a:r>
             <a:r>
-              <a:rPr sz="1700" b="0">
-                <a:solidFill>
-                  <a:srgbClr val="374451"/>
+              <a:rPr sz="2100" b="0">
+                <a:solidFill>
+                  <a:srgbClr val="212C38"/>
                 </a:solidFill>
                 <a:latin typeface="Arial"/>
               </a:rPr>
               <a:t>, yang bisa diisi cuma </a:t>
             </a:r>
             <a:r>
-              <a:rPr sz="1530" b="0">
-                <a:solidFill>
-                  <a:srgbClr val="374451"/>
-                </a:solidFill>
-                <a:latin typeface="Courier New"/>
+              <a:rPr sz="1890" b="0">
+                <a:solidFill>
+                  <a:srgbClr val="212C38"/>
+                </a:solidFill>
+                <a:latin typeface="JetBrains Mono"/>
               </a:rPr>
               <a:t>NULL</a:t>
             </a:r>
             <a:r>
-              <a:rPr sz="1700" b="0">
-                <a:solidFill>
-                  <a:srgbClr val="374451"/>
+              <a:rPr sz="2100" b="0">
+                <a:solidFill>
+                  <a:srgbClr val="212C38"/>
                 </a:solidFill>
                 <a:latin typeface="Arial"/>
               </a:rPr>
               <a:t>, padahal </a:t>
             </a:r>
             <a:r>
-              <a:rPr sz="1530" b="0">
-                <a:solidFill>
-                  <a:srgbClr val="374451"/>
-                </a:solidFill>
-                <a:latin typeface="Courier New"/>
+              <a:rPr sz="1890" b="0">
+                <a:solidFill>
+                  <a:srgbClr val="212C38"/>
+                </a:solidFill>
+                <a:latin typeface="JetBrains Mono"/>
               </a:rPr>
               <a:t>NOT NULL</a:t>
             </a:r>
             <a:r>
-              <a:rPr sz="1700" b="0">
-                <a:solidFill>
-                  <a:srgbClr val="374451"/>
+              <a:rPr sz="2100" b="0">
+                <a:solidFill>
+                  <a:srgbClr val="212C38"/>
                 </a:solidFill>
                 <a:latin typeface="Arial"/>
               </a:rPr>
               <a:t> melarang </a:t>
             </a:r>
             <a:r>
-              <a:rPr sz="1530" b="0">
-                <a:solidFill>
-                  <a:srgbClr val="374451"/>
-                </a:solidFill>
-                <a:latin typeface="Courier New"/>
+              <a:rPr sz="1890" b="0">
+                <a:solidFill>
+                  <a:srgbClr val="212C38"/>
+                </a:solidFill>
+                <a:latin typeface="JetBrains Mono"/>
               </a:rPr>
               <a:t>NULL</a:t>
             </a:r>
             <a:r>
-              <a:rPr sz="1700" b="0">
-                <a:solidFill>
-                  <a:srgbClr val="374451"/>
+              <a:rPr sz="2100" b="0">
+                <a:solidFill>
+                  <a:srgbClr val="212C38"/>
                 </a:solidFill>
                 <a:latin typeface="Arial"/>
               </a:rPr>
@@ -7592,8 +7592,8 @@
           <p:nvPr/>
         </p:nvGraphicFramePr>
         <p:xfrm>
-          <a:off x="777240" y="3090672"/>
-          <a:ext cx="10637215" cy="1093467"/>
+          <a:off x="777240" y="3253231"/>
+          <a:ext cx="10637215" cy="1405887"/>
         </p:xfrm>
         <a:graphic>
           <a:graphicData uri="http://schemas.openxmlformats.org/drawingml/2006/table">
@@ -7605,16 +7605,16 @@
                 <a:gridCol w="5318607"/>
                 <a:gridCol w="5318608"/>
               </a:tblGrid>
-              <a:tr h="364489">
+              <a:tr h="468629">
                 <a:tc>
                   <a:txBody>
                     <a:bodyPr wrap="square"/>
                     <a:lstStyle/>
                     <a:p>
                       <a:r>
-                        <a:rPr sz="1400" b="1">
+                        <a:rPr sz="1800" b="1">
                           <a:solidFill>
-                            <a:srgbClr val="1B2533"/>
+                            <a:srgbClr val="111A24"/>
                           </a:solidFill>
                           <a:latin typeface="Arial"/>
                         </a:rPr>
@@ -7624,7 +7624,7 @@
                   </a:txBody>
                   <a:tcPr marL="118872" marR="118872" marT="36576" marB="36576" anchor="ctr">
                     <a:solidFill>
-                      <a:srgbClr val="E8F6FA"/>
+                      <a:srgbClr val="DDEFF6"/>
                     </a:solidFill>
                   </a:tcPr>
                 </a:tc>
@@ -7634,9 +7634,9 @@
                     <a:lstStyle/>
                     <a:p>
                       <a:r>
-                        <a:rPr sz="1400" b="1">
+                        <a:rPr sz="1800" b="1">
                           <a:solidFill>
-                            <a:srgbClr val="1B2533"/>
+                            <a:srgbClr val="111A24"/>
                           </a:solidFill>
                           <a:latin typeface="Arial"/>
                         </a:rPr>
@@ -7646,21 +7646,21 @@
                   </a:txBody>
                   <a:tcPr marL="118872" marR="118872" marT="36576" marB="36576" anchor="ctr">
                     <a:solidFill>
-                      <a:srgbClr val="E8F6FA"/>
+                      <a:srgbClr val="DDEFF6"/>
                     </a:solidFill>
                   </a:tcPr>
                 </a:tc>
               </a:tr>
-              <a:tr h="364489">
+              <a:tr h="468629">
                 <a:tc>
                   <a:txBody>
                     <a:bodyPr wrap="square"/>
                     <a:lstStyle/>
                     <a:p>
                       <a:r>
-                        <a:rPr sz="1400" b="0">
+                        <a:rPr sz="1800" b="0">
                           <a:solidFill>
-                            <a:srgbClr val="374451"/>
+                            <a:srgbClr val="212C38"/>
                           </a:solidFill>
                           <a:latin typeface="Arial"/>
                         </a:rPr>
@@ -7680,9 +7680,9 @@
                     <a:lstStyle/>
                     <a:p>
                       <a:r>
-                        <a:rPr sz="1400" b="0">
+                        <a:rPr sz="1800" b="0">
                           <a:solidFill>
-                            <a:srgbClr val="374451"/>
+                            <a:srgbClr val="212C38"/>
                           </a:solidFill>
                           <a:latin typeface="Arial"/>
                         </a:rPr>
@@ -7697,16 +7697,16 @@
                   </a:tcPr>
                 </a:tc>
               </a:tr>
-              <a:tr h="364489">
+              <a:tr h="468629">
                 <a:tc>
                   <a:txBody>
                     <a:bodyPr wrap="square"/>
                     <a:lstStyle/>
                     <a:p>
                       <a:r>
-                        <a:rPr sz="1400" b="0">
+                        <a:rPr sz="1800" b="0">
                           <a:solidFill>
-                            <a:srgbClr val="374451"/>
+                            <a:srgbClr val="212C38"/>
                           </a:solidFill>
                           <a:latin typeface="Arial"/>
                         </a:rPr>
@@ -7726,9 +7726,9 @@
                     <a:lstStyle/>
                     <a:p>
                       <a:r>
-                        <a:rPr sz="1400" b="0">
+                        <a:rPr sz="1800" b="0">
                           <a:solidFill>
-                            <a:srgbClr val="374451"/>
+                            <a:srgbClr val="212C38"/>
                           </a:solidFill>
                           <a:latin typeface="Arial"/>
                         </a:rPr>
@@ -7755,8 +7755,8 @@
         </p:nvSpPr>
         <p:spPr>
           <a:xfrm>
-            <a:off x="777240" y="4403598"/>
-            <a:ext cx="10637215" cy="561340"/>
+            <a:off x="777240" y="4878578"/>
+            <a:ext cx="10637215" cy="693420"/>
           </a:xfrm>
           <a:prstGeom prst="rect">
             <a:avLst/>
@@ -7775,9 +7775,9 @@
               </a:lnSpc>
             </a:pPr>
             <a:r>
-              <a:rPr sz="1700" b="0">
-                <a:solidFill>
-                  <a:srgbClr val="374451"/>
+              <a:rPr sz="2100" b="0">
+                <a:solidFill>
+                  <a:srgbClr val="212C38"/>
                 </a:solidFill>
                 <a:latin typeface="Arial"/>
               </a:rPr>
@@ -7794,8 +7794,8 @@
         </p:nvSpPr>
         <p:spPr>
           <a:xfrm>
-            <a:off x="777240" y="5120386"/>
-            <a:ext cx="10637215" cy="280670"/>
+            <a:off x="777240" y="5727445"/>
+            <a:ext cx="10637215" cy="346710"/>
           </a:xfrm>
           <a:prstGeom prst="rect">
             <a:avLst/>
@@ -7814,20 +7814,20 @@
               </a:lnSpc>
             </a:pPr>
             <a:r>
-              <a:rPr sz="1700" b="0">
-                <a:solidFill>
-                  <a:srgbClr val="374451"/>
+              <a:rPr sz="2100" b="0">
+                <a:solidFill>
+                  <a:srgbClr val="212C38"/>
                 </a:solidFill>
                 <a:latin typeface="Arial"/>
               </a:rPr>
               <a:t>Perbaikannya: </a:t>
             </a:r>
             <a:r>
-              <a:rPr sz="1530" b="0">
-                <a:solidFill>
-                  <a:srgbClr val="374451"/>
-                </a:solidFill>
-                <a:latin typeface="Courier New"/>
+              <a:rPr sz="1890" b="0">
+                <a:solidFill>
+                  <a:srgbClr val="212C38"/>
+                </a:solidFill>
+                <a:latin typeface="JetBrains Mono"/>
               </a:rPr>
               <a:t>... NOT NULL DEFAULT 'pending'</a:t>
             </a:r>
@@ -7858,9 +7858,9 @@
           <a:p>
             <a:pPr algn="r"/>
             <a:r>
-              <a:rPr sz="1100">
-                <a:solidFill>
-                  <a:srgbClr val="6B7784"/>
+              <a:rPr sz="1200">
+                <a:solidFill>
+                  <a:srgbClr val="626E7B"/>
                 </a:solidFill>
                 <a:latin typeface="Arial"/>
               </a:rPr>
@@ -7918,9 +7918,9 @@
           <a:lstStyle/>
           <a:p>
             <a:r>
-              <a:rPr sz="2900" b="1">
-                <a:solidFill>
-                  <a:srgbClr val="1B2533"/>
+              <a:rPr sz="3300" b="1">
+                <a:solidFill>
+                  <a:srgbClr val="111A24"/>
                 </a:solidFill>
                 <a:latin typeface="Arial"/>
               </a:rPr>
@@ -7944,7 +7944,7 @@
             <a:avLst/>
           </a:prstGeom>
           <a:solidFill>
-            <a:srgbClr val="00ADD8"/>
+            <a:srgbClr val="008CB0"/>
           </a:solidFill>
           <a:ln>
             <a:noFill/>
@@ -7981,8 +7981,8 @@
         </p:nvSpPr>
         <p:spPr>
           <a:xfrm>
-            <a:off x="777240" y="1572768"/>
-            <a:ext cx="10637215" cy="280670"/>
+            <a:off x="777240" y="1536192"/>
+            <a:ext cx="10637215" cy="693420"/>
           </a:xfrm>
           <a:prstGeom prst="rect">
             <a:avLst/>
@@ -8001,9 +8001,9 @@
               </a:lnSpc>
             </a:pPr>
             <a:r>
-              <a:rPr sz="1700" b="0">
-                <a:solidFill>
-                  <a:srgbClr val="374451"/>
+              <a:rPr sz="2100" b="0">
+                <a:solidFill>
+                  <a:srgbClr val="212C38"/>
                 </a:solidFill>
                 <a:latin typeface="Arial"/>
               </a:rPr>
@@ -8020,8 +8020,8 @@
         </p:nvSpPr>
         <p:spPr>
           <a:xfrm>
-            <a:off x="777240" y="2008885"/>
-            <a:ext cx="10637215" cy="561340"/>
+            <a:off x="777240" y="2385060"/>
+            <a:ext cx="10637215" cy="693420"/>
           </a:xfrm>
           <a:prstGeom prst="rect">
             <a:avLst/>
@@ -8040,9 +8040,9 @@
               </a:lnSpc>
             </a:pPr>
             <a:r>
-              <a:rPr sz="1700" b="0">
-                <a:solidFill>
-                  <a:srgbClr val="374451"/>
+              <a:rPr sz="2100" b="0">
+                <a:solidFill>
+                  <a:srgbClr val="212C38"/>
                 </a:solidFill>
                 <a:latin typeface="Arial"/>
               </a:rPr>
@@ -8075,9 +8075,9 @@
           <a:p>
             <a:pPr algn="r"/>
             <a:r>
-              <a:rPr sz="1100">
-                <a:solidFill>
-                  <a:srgbClr val="6B7784"/>
+              <a:rPr sz="1200">
+                <a:solidFill>
+                  <a:srgbClr val="626E7B"/>
                 </a:solidFill>
                 <a:latin typeface="Arial"/>
               </a:rPr>
@@ -8135,9 +8135,9 @@
           <a:lstStyle/>
           <a:p>
             <a:r>
-              <a:rPr sz="2900" b="1">
-                <a:solidFill>
-                  <a:srgbClr val="1B2533"/>
+              <a:rPr sz="3300" b="1">
+                <a:solidFill>
+                  <a:srgbClr val="111A24"/>
                 </a:solidFill>
                 <a:latin typeface="Arial"/>
               </a:rPr>
@@ -8161,7 +8161,7 @@
             <a:avLst/>
           </a:prstGeom>
           <a:solidFill>
-            <a:srgbClr val="00ADD8"/>
+            <a:srgbClr val="008CB0"/>
           </a:solidFill>
           <a:ln>
             <a:noFill/>
@@ -8198,8 +8198,8 @@
         </p:nvSpPr>
         <p:spPr>
           <a:xfrm>
-            <a:off x="777240" y="1572768"/>
-            <a:ext cx="10637215" cy="689864"/>
+            <a:off x="777240" y="1536192"/>
+            <a:ext cx="10637215" cy="823976"/>
           </a:xfrm>
           <a:prstGeom prst="roundRect">
             <a:avLst>
@@ -8207,11 +8207,11 @@
             </a:avLst>
           </a:prstGeom>
           <a:solidFill>
-            <a:srgbClr val="F3F6F8"/>
+            <a:srgbClr val="ECF2F6"/>
           </a:solidFill>
           <a:ln w="9525">
             <a:solidFill>
-              <a:srgbClr val="DDE3E8"/>
+              <a:srgbClr val="C9D4DC"/>
             </a:solidFill>
           </a:ln>
           <a:effectLst/>
@@ -8240,11 +8240,11 @@
               </a:lnSpc>
             </a:pPr>
             <a:r>
-              <a:rPr sz="1300">
-                <a:solidFill>
-                  <a:srgbClr val="1B2733"/>
-                </a:solidFill>
-                <a:latin typeface="Courier New"/>
+              <a:rPr sz="1700">
+                <a:solidFill>
+                  <a:srgbClr val="0E1A26"/>
+                </a:solidFill>
+                <a:latin typeface="JetBrains Mono"/>
               </a:rPr>
               <a:t>//go:embed migrations/*.sql</a:t>
             </a:r>
@@ -8256,11 +8256,11 @@
               </a:lnSpc>
             </a:pPr>
             <a:r>
-              <a:rPr sz="1300">
-                <a:solidFill>
-                  <a:srgbClr val="1B2733"/>
-                </a:solidFill>
-                <a:latin typeface="Courier New"/>
+              <a:rPr sz="1700">
+                <a:solidFill>
+                  <a:srgbClr val="0E1A26"/>
+                </a:solidFill>
+                <a:latin typeface="JetBrains Mono"/>
               </a:rPr>
               <a:t>var migrationFiles embed.FS</a:t>
             </a:r>
@@ -8275,8 +8275,8 @@
         </p:nvSpPr>
         <p:spPr>
           <a:xfrm>
-            <a:off x="777240" y="2482088"/>
-            <a:ext cx="10637215" cy="561340"/>
+            <a:off x="777240" y="2579623"/>
+            <a:ext cx="10637215" cy="693420"/>
           </a:xfrm>
           <a:prstGeom prst="rect">
             <a:avLst/>
@@ -8295,27 +8295,27 @@
               </a:lnSpc>
             </a:pPr>
             <a:r>
-              <a:rPr sz="1700" b="0">
-                <a:solidFill>
-                  <a:srgbClr val="374451"/>
+              <a:rPr sz="2100" b="0">
+                <a:solidFill>
+                  <a:srgbClr val="212C38"/>
                 </a:solidFill>
                 <a:latin typeface="Arial"/>
               </a:rPr>
               <a:t>Migration ikut masuk ke dalam binary, jadi deploy cukup mengirim satu file dan nggak perlu memastikan folder </a:t>
             </a:r>
             <a:r>
-              <a:rPr sz="1530" b="0">
-                <a:solidFill>
-                  <a:srgbClr val="374451"/>
-                </a:solidFill>
-                <a:latin typeface="Courier New"/>
+              <a:rPr sz="1890" b="0">
+                <a:solidFill>
+                  <a:srgbClr val="212C38"/>
+                </a:solidFill>
+                <a:latin typeface="JetBrains Mono"/>
               </a:rPr>
               <a:t>migrations/</a:t>
             </a:r>
             <a:r>
-              <a:rPr sz="1700" b="0">
-                <a:solidFill>
-                  <a:srgbClr val="374451"/>
+              <a:rPr sz="2100" b="0">
+                <a:solidFill>
+                  <a:srgbClr val="212C38"/>
                 </a:solidFill>
                 <a:latin typeface="Arial"/>
               </a:rPr>
@@ -8348,9 +8348,9 @@
           <a:p>
             <a:pPr algn="r"/>
             <a:r>
-              <a:rPr sz="1100">
-                <a:solidFill>
-                  <a:srgbClr val="6B7784"/>
+              <a:rPr sz="1200">
+                <a:solidFill>
+                  <a:srgbClr val="626E7B"/>
                 </a:solidFill>
                 <a:latin typeface="Arial"/>
               </a:rPr>
@@ -8408,9 +8408,9 @@
           <a:lstStyle/>
           <a:p>
             <a:r>
-              <a:rPr sz="2900" b="1">
-                <a:solidFill>
-                  <a:srgbClr val="1B2533"/>
+              <a:rPr sz="3300" b="1">
+                <a:solidFill>
+                  <a:srgbClr val="111A24"/>
                 </a:solidFill>
                 <a:latin typeface="Arial"/>
               </a:rPr>
@@ -8434,7 +8434,7 @@
             <a:avLst/>
           </a:prstGeom>
           <a:solidFill>
-            <a:srgbClr val="00ADD8"/>
+            <a:srgbClr val="008CB0"/>
           </a:solidFill>
           <a:ln>
             <a:noFill/>
@@ -8471,8 +8471,8 @@
         </p:nvSpPr>
         <p:spPr>
           <a:xfrm>
-            <a:off x="777240" y="1572768"/>
-            <a:ext cx="10637215" cy="561340"/>
+            <a:off x="777240" y="1536192"/>
+            <a:ext cx="10637215" cy="1040130"/>
           </a:xfrm>
           <a:prstGeom prst="rect">
             <a:avLst/>
@@ -8491,84 +8491,27 @@
               </a:lnSpc>
             </a:pPr>
             <a:r>
-              <a:rPr sz="1700" b="0">
-                <a:solidFill>
-                  <a:srgbClr val="374451"/>
-                </a:solidFill>
-                <a:latin typeface="Arial"/>
-              </a:rPr>
-              <a:t>Down migration nggak membatalkan apa pun. Dia cuma menjalankan SQL yang kita tulis sendiri di file </a:t>
-            </a:r>
-            <a:r>
-              <a:rPr sz="1530" b="0">
-                <a:solidFill>
-                  <a:srgbClr val="374451"/>
-                </a:solidFill>
-                <a:latin typeface="Courier New"/>
-              </a:rPr>
-              <a:t>.down.sql</a:t>
-            </a:r>
-            <a:r>
-              <a:rPr sz="1700" b="0">
-                <a:solidFill>
-                  <a:srgbClr val="374451"/>
-                </a:solidFill>
-                <a:latin typeface="Arial"/>
-              </a:rPr>
-              <a:t>.</a:t>
-            </a:r>
-          </a:p>
-        </p:txBody>
-      </p:sp>
-      <p:sp>
-        <p:nvSpPr>
-          <p:cNvPr id="5" name="TextBox 4"/>
-          <p:cNvSpPr txBox="1"/>
-          <p:nvPr/>
-        </p:nvSpPr>
-        <p:spPr>
-          <a:xfrm>
-            <a:off x="777240" y="2289555"/>
-            <a:ext cx="10637215" cy="280670"/>
-          </a:xfrm>
-          <a:prstGeom prst="rect">
-            <a:avLst/>
-          </a:prstGeom>
-          <a:noFill/>
-        </p:spPr>
-        <p:txBody>
-          <a:bodyPr wrap="square" lIns="0" rIns="0" tIns="0" bIns="0">
-            <a:spAutoFit/>
-          </a:bodyPr>
-          <a:lstStyle/>
-          <a:p>
-            <a:pPr>
-              <a:lnSpc>
-                <a:spcPct val="130000"/>
-              </a:lnSpc>
-            </a:pPr>
-            <a:r>
-              <a:rPr sz="1700" b="0">
-                <a:solidFill>
-                  <a:srgbClr val="374451"/>
-                </a:solidFill>
-                <a:latin typeface="Arial"/>
-              </a:rPr>
-              <a:t>Jadi dia cuma bisa mengembalikan informasi yang masih tersimpan di tempat lain di database.</a:t>
-            </a:r>
-          </a:p>
-        </p:txBody>
-      </p:sp>
-      <p:sp>
-        <p:nvSpPr>
-          <p:cNvPr id="6" name="Rounded Rectangle 5"/>
+              <a:rPr sz="2100" b="0">
+                <a:solidFill>
+                  <a:srgbClr val="212C38"/>
+                </a:solidFill>
+                <a:latin typeface="Arial"/>
+              </a:rPr>
+              <a:t>Down migration nggak membatalkan apa pun. Dia cuma menjalankan SQL yang kita tulis sendiri, jadi cuma bisa mengembalikan informasi yang masih tersimpan di tempat lain.</a:t>
+            </a:r>
+          </a:p>
+        </p:txBody>
+      </p:sp>
+      <p:sp>
+        <p:nvSpPr>
+          <p:cNvPr id="5" name="Rounded Rectangle 4"/>
           <p:cNvSpPr/>
           <p:nvPr/>
         </p:nvSpPr>
         <p:spPr>
           <a:xfrm>
-            <a:off x="777240" y="2725673"/>
-            <a:ext cx="10637215" cy="1343660"/>
+            <a:off x="777240" y="2731770"/>
+            <a:ext cx="10637215" cy="1678940"/>
           </a:xfrm>
           <a:prstGeom prst="roundRect">
             <a:avLst>
@@ -8576,11 +8519,11 @@
             </a:avLst>
           </a:prstGeom>
           <a:solidFill>
-            <a:srgbClr val="F3F6F8"/>
+            <a:srgbClr val="ECF2F6"/>
           </a:solidFill>
           <a:ln w="9525">
             <a:solidFill>
-              <a:srgbClr val="DDE3E8"/>
+              <a:srgbClr val="C9D4DC"/>
             </a:solidFill>
           </a:ln>
           <a:effectLst/>
@@ -8609,11 +8552,11 @@
               </a:lnSpc>
             </a:pPr>
             <a:r>
-              <a:rPr sz="1300">
-                <a:solidFill>
-                  <a:srgbClr val="1B2733"/>
-                </a:solidFill>
-                <a:latin typeface="Courier New"/>
+              <a:rPr sz="1700">
+                <a:solidFill>
+                  <a:srgbClr val="0E1A26"/>
+                </a:solidFill>
+                <a:latin typeface="JetBrains Mono"/>
               </a:rPr>
               <a:t>-- 000002_add_phone_to_users.up.sql</a:t>
             </a:r>
@@ -8625,11 +8568,11 @@
               </a:lnSpc>
             </a:pPr>
             <a:r>
-              <a:rPr sz="1300">
-                <a:solidFill>
-                  <a:srgbClr val="1B2733"/>
-                </a:solidFill>
-                <a:latin typeface="Courier New"/>
+              <a:rPr sz="1700">
+                <a:solidFill>
+                  <a:srgbClr val="0E1A26"/>
+                </a:solidFill>
+                <a:latin typeface="JetBrains Mono"/>
               </a:rPr>
               <a:t>ALTER TABLE users ADD COLUMN phone TEXT;</a:t>
             </a:r>
@@ -8641,11 +8584,11 @@
               </a:lnSpc>
             </a:pPr>
             <a:r>
-              <a:rPr sz="1300">
-                <a:solidFill>
-                  <a:srgbClr val="1B2733"/>
-                </a:solidFill>
-                <a:latin typeface="Courier New"/>
+              <a:rPr sz="1700">
+                <a:solidFill>
+                  <a:srgbClr val="0E1A26"/>
+                </a:solidFill>
+                <a:latin typeface="JetBrains Mono"/>
               </a:rPr>
               <a:t> </a:t>
             </a:r>
@@ -8657,11 +8600,11 @@
               </a:lnSpc>
             </a:pPr>
             <a:r>
-              <a:rPr sz="1300">
-                <a:solidFill>
-                  <a:srgbClr val="1B2733"/>
-                </a:solidFill>
-                <a:latin typeface="Courier New"/>
+              <a:rPr sz="1700">
+                <a:solidFill>
+                  <a:srgbClr val="0E1A26"/>
+                </a:solidFill>
+                <a:latin typeface="JetBrains Mono"/>
               </a:rPr>
               <a:t>-- 000002_add_phone_to_users.down.sql</a:t>
             </a:r>
@@ -8673,11 +8616,11 @@
               </a:lnSpc>
             </a:pPr>
             <a:r>
-              <a:rPr sz="1300">
-                <a:solidFill>
-                  <a:srgbClr val="1B2733"/>
-                </a:solidFill>
-                <a:latin typeface="Courier New"/>
+              <a:rPr sz="1700">
+                <a:solidFill>
+                  <a:srgbClr val="0E1A26"/>
+                </a:solidFill>
+                <a:latin typeface="JetBrains Mono"/>
               </a:rPr>
               <a:t>ALTER TABLE users DROP COLUMN phone;</a:t>
             </a:r>
@@ -8686,14 +8629,14 @@
       </p:sp>
       <p:sp>
         <p:nvSpPr>
-          <p:cNvPr id="7" name="TextBox 6"/>
+          <p:cNvPr id="6" name="TextBox 5"/>
           <p:cNvSpPr txBox="1"/>
           <p:nvPr/>
         </p:nvSpPr>
         <p:spPr>
           <a:xfrm>
-            <a:off x="777240" y="4288790"/>
-            <a:ext cx="10637215" cy="561340"/>
+            <a:off x="777240" y="4630166"/>
+            <a:ext cx="10637215" cy="693420"/>
           </a:xfrm>
           <a:prstGeom prst="rect">
             <a:avLst/>
@@ -8712,45 +8655,45 @@
               </a:lnSpc>
             </a:pPr>
             <a:r>
-              <a:rPr sz="1700" b="0">
-                <a:solidFill>
-                  <a:srgbClr val="374451"/>
-                </a:solidFill>
-                <a:latin typeface="Arial"/>
-              </a:rPr>
-              <a:t>Nggak ada kolom lain yang menyimpan nomor HP. Rollback ke versi ini menghapus datanya permanen — </a:t>
-            </a:r>
-            <a:r>
-              <a:rPr sz="1530" b="0">
-                <a:solidFill>
-                  <a:srgbClr val="374451"/>
-                </a:solidFill>
-                <a:latin typeface="Courier New"/>
+              <a:rPr sz="2100" b="0">
+                <a:solidFill>
+                  <a:srgbClr val="212C38"/>
+                </a:solidFill>
+                <a:latin typeface="Arial"/>
+              </a:rPr>
+              <a:t>Nggak ada kolom lain yang menyimpan nomor HP. Rollback menghapus datanya permanen, dan </a:t>
+            </a:r>
+            <a:r>
+              <a:rPr sz="1890" b="0">
+                <a:solidFill>
+                  <a:srgbClr val="212C38"/>
+                </a:solidFill>
+                <a:latin typeface="JetBrains Mono"/>
               </a:rPr>
               <a:t>up</a:t>
             </a:r>
             <a:r>
-              <a:rPr sz="1700" b="0">
-                <a:solidFill>
-                  <a:srgbClr val="374451"/>
-                </a:solidFill>
-                <a:latin typeface="Arial"/>
-              </a:rPr>
-              <a:t> lagi, kolomnya kembali dalam keadaan kosong.</a:t>
-            </a:r>
-          </a:p>
-        </p:txBody>
-      </p:sp>
-      <p:sp>
-        <p:nvSpPr>
-          <p:cNvPr id="8" name="TextBox 7"/>
+              <a:rPr sz="2100" b="0">
+                <a:solidFill>
+                  <a:srgbClr val="212C38"/>
+                </a:solidFill>
+                <a:latin typeface="Arial"/>
+              </a:rPr>
+              <a:t> lagi cuma mengembalikan kolomnya dalam keadaan kosong.</a:t>
+            </a:r>
+          </a:p>
+        </p:txBody>
+      </p:sp>
+      <p:sp>
+        <p:nvSpPr>
+          <p:cNvPr id="7" name="TextBox 6"/>
           <p:cNvSpPr txBox="1"/>
           <p:nvPr/>
         </p:nvSpPr>
         <p:spPr>
           <a:xfrm>
-            <a:off x="777240" y="5005578"/>
-            <a:ext cx="10637215" cy="280670"/>
+            <a:off x="10500055" y="6291072"/>
+            <a:ext cx="914400" cy="274320"/>
           </a:xfrm>
           <a:prstGeom prst="rect">
             <a:avLst/>
@@ -8763,50 +8706,11 @@
           </a:bodyPr>
           <a:lstStyle/>
           <a:p>
-            <a:pPr>
-              <a:lnSpc>
-                <a:spcPct val="130000"/>
-              </a:lnSpc>
-            </a:pPr>
-            <a:r>
-              <a:rPr sz="1530" b="0">
-                <a:solidFill>
-                  <a:srgbClr val="374451"/>
-                </a:solidFill>
-                <a:latin typeface="Courier New"/>
-              </a:rPr>
-              <a:t>make demo-rollback</a:t>
-            </a:r>
-          </a:p>
-        </p:txBody>
-      </p:sp>
-      <p:sp>
-        <p:nvSpPr>
-          <p:cNvPr id="9" name="TextBox 8"/>
-          <p:cNvSpPr txBox="1"/>
-          <p:nvPr/>
-        </p:nvSpPr>
-        <p:spPr>
-          <a:xfrm>
-            <a:off x="10500055" y="6291072"/>
-            <a:ext cx="914400" cy="274320"/>
-          </a:xfrm>
-          <a:prstGeom prst="rect">
-            <a:avLst/>
-          </a:prstGeom>
-          <a:noFill/>
-        </p:spPr>
-        <p:txBody>
-          <a:bodyPr wrap="square" lIns="0" rIns="0" tIns="0" bIns="0">
-            <a:spAutoFit/>
-          </a:bodyPr>
-          <a:lstStyle/>
-          <a:p>
             <a:pPr algn="r"/>
             <a:r>
-              <a:rPr sz="1100">
-                <a:solidFill>
-                  <a:srgbClr val="6B7784"/>
+              <a:rPr sz="1200">
+                <a:solidFill>
+                  <a:srgbClr val="626E7B"/>
                 </a:solidFill>
                 <a:latin typeface="Arial"/>
               </a:rPr>
@@ -8864,9 +8768,9 @@
           <a:lstStyle/>
           <a:p>
             <a:r>
-              <a:rPr sz="2900" b="1">
-                <a:solidFill>
-                  <a:srgbClr val="1B2533"/>
+              <a:rPr sz="3300" b="1">
+                <a:solidFill>
+                  <a:srgbClr val="111A24"/>
                 </a:solidFill>
                 <a:latin typeface="Arial"/>
               </a:rPr>
@@ -8890,7 +8794,7 @@
             <a:avLst/>
           </a:prstGeom>
           <a:solidFill>
-            <a:srgbClr val="00ADD8"/>
+            <a:srgbClr val="008CB0"/>
           </a:solidFill>
           <a:ln>
             <a:noFill/>
@@ -8927,8 +8831,8 @@
         </p:nvSpPr>
         <p:spPr>
           <a:xfrm>
-            <a:off x="777240" y="1572768"/>
-            <a:ext cx="10637215" cy="280670"/>
+            <a:off x="777240" y="1536192"/>
+            <a:ext cx="10637215" cy="693420"/>
           </a:xfrm>
           <a:prstGeom prst="rect">
             <a:avLst/>
@@ -8947,63 +8851,63 @@
               </a:lnSpc>
             </a:pPr>
             <a:r>
-              <a:rPr sz="1700" b="0">
-                <a:solidFill>
-                  <a:srgbClr val="374451"/>
+              <a:rPr sz="2100" b="0">
+                <a:solidFill>
+                  <a:srgbClr val="212C38"/>
                 </a:solidFill>
                 <a:latin typeface="Arial"/>
               </a:rPr>
               <a:t>Di </a:t>
             </a:r>
             <a:r>
-              <a:rPr sz="1530" b="0">
-                <a:solidFill>
-                  <a:srgbClr val="374451"/>
-                </a:solidFill>
-                <a:latin typeface="Courier New"/>
+              <a:rPr sz="1890" b="0">
+                <a:solidFill>
+                  <a:srgbClr val="212C38"/>
+                </a:solidFill>
+                <a:latin typeface="JetBrains Mono"/>
               </a:rPr>
               <a:t>000004</a:t>
             </a:r>
             <a:r>
-              <a:rPr sz="1700" b="0">
-                <a:solidFill>
-                  <a:srgbClr val="374451"/>
+              <a:rPr sz="2100" b="0">
+                <a:solidFill>
+                  <a:srgbClr val="212C38"/>
                 </a:solidFill>
                 <a:latin typeface="Arial"/>
               </a:rPr>
               <a:t> kolom </a:t>
             </a:r>
             <a:r>
-              <a:rPr sz="1530" b="0">
-                <a:solidFill>
-                  <a:srgbClr val="374451"/>
-                </a:solidFill>
-                <a:latin typeface="Courier New"/>
+              <a:rPr sz="1890" b="0">
+                <a:solidFill>
+                  <a:srgbClr val="212C38"/>
+                </a:solidFill>
+                <a:latin typeface="JetBrains Mono"/>
               </a:rPr>
               <a:t>name</a:t>
             </a:r>
             <a:r>
-              <a:rPr sz="1700" b="0">
-                <a:solidFill>
-                  <a:srgbClr val="374451"/>
+              <a:rPr sz="2100" b="0">
+                <a:solidFill>
+                  <a:srgbClr val="212C38"/>
                 </a:solidFill>
                 <a:latin typeface="Arial"/>
               </a:rPr>
               <a:t> dihapus, dan file </a:t>
             </a:r>
             <a:r>
-              <a:rPr sz="1530" b="0">
-                <a:solidFill>
-                  <a:srgbClr val="374451"/>
-                </a:solidFill>
-                <a:latin typeface="Courier New"/>
+              <a:rPr sz="1890" b="0">
+                <a:solidFill>
+                  <a:srgbClr val="212C38"/>
+                </a:solidFill>
+                <a:latin typeface="JetBrains Mono"/>
               </a:rPr>
               <a:t>.down.sql</a:t>
             </a:r>
             <a:r>
-              <a:rPr sz="1700" b="0">
-                <a:solidFill>
-                  <a:srgbClr val="374451"/>
+              <a:rPr sz="2100" b="0">
+                <a:solidFill>
+                  <a:srgbClr val="212C38"/>
                 </a:solidFill>
                 <a:latin typeface="Arial"/>
               </a:rPr>
@@ -9020,8 +8924,8 @@
         </p:nvSpPr>
         <p:spPr>
           <a:xfrm>
-            <a:off x="777240" y="2008885"/>
-            <a:ext cx="10637215" cy="689864"/>
+            <a:off x="777240" y="2385060"/>
+            <a:ext cx="10637215" cy="823976"/>
           </a:xfrm>
           <a:prstGeom prst="roundRect">
             <a:avLst>
@@ -9029,11 +8933,11 @@
             </a:avLst>
           </a:prstGeom>
           <a:solidFill>
-            <a:srgbClr val="F3F6F8"/>
+            <a:srgbClr val="ECF2F6"/>
           </a:solidFill>
           <a:ln w="9525">
             <a:solidFill>
-              <a:srgbClr val="DDE3E8"/>
+              <a:srgbClr val="C9D4DC"/>
             </a:solidFill>
           </a:ln>
           <a:effectLst/>
@@ -9062,11 +8966,11 @@
               </a:lnSpc>
             </a:pPr>
             <a:r>
-              <a:rPr sz="1300">
-                <a:solidFill>
-                  <a:srgbClr val="1B2733"/>
-                </a:solidFill>
-                <a:latin typeface="Courier New"/>
+              <a:rPr sz="1700">
+                <a:solidFill>
+                  <a:srgbClr val="0E1A26"/>
+                </a:solidFill>
+                <a:latin typeface="JetBrains Mono"/>
               </a:rPr>
               <a:t>ALTER TABLE users ADD COLUMN name TEXT;</a:t>
             </a:r>
@@ -9078,11 +8982,11 @@
               </a:lnSpc>
             </a:pPr>
             <a:r>
-              <a:rPr sz="1300">
-                <a:solidFill>
-                  <a:srgbClr val="1B2733"/>
-                </a:solidFill>
-                <a:latin typeface="Courier New"/>
+              <a:rPr sz="1700">
+                <a:solidFill>
+                  <a:srgbClr val="0E1A26"/>
+                </a:solidFill>
+                <a:latin typeface="JetBrains Mono"/>
               </a:rPr>
               <a:t>UPDATE users SET name = concat_ws(' ', first_name, last_name);</a:t>
             </a:r>
@@ -9097,8 +9001,8 @@
         </p:nvSpPr>
         <p:spPr>
           <a:xfrm>
-            <a:off x="777240" y="2918205"/>
-            <a:ext cx="10637215" cy="561340"/>
+            <a:off x="777240" y="3428492"/>
+            <a:ext cx="10637215" cy="1040130"/>
           </a:xfrm>
           <a:prstGeom prst="rect">
             <a:avLst/>
@@ -9117,63 +9021,63 @@
               </a:lnSpc>
             </a:pPr>
             <a:r>
-              <a:rPr sz="1700" b="0">
-                <a:solidFill>
-                  <a:srgbClr val="374451"/>
+              <a:rPr sz="2100" b="0">
+                <a:solidFill>
+                  <a:srgbClr val="212C38"/>
                 </a:solidFill>
                 <a:latin typeface="Arial"/>
               </a:rPr>
               <a:t>Ini memang berhasil. Tapi bukan karena down migration bisa mengembalikan data — melainkan karena </a:t>
             </a:r>
             <a:r>
-              <a:rPr sz="1530" b="0">
-                <a:solidFill>
-                  <a:srgbClr val="374451"/>
-                </a:solidFill>
-                <a:latin typeface="Courier New"/>
+              <a:rPr sz="1890" b="0">
+                <a:solidFill>
+                  <a:srgbClr val="212C38"/>
+                </a:solidFill>
+                <a:latin typeface="JetBrains Mono"/>
               </a:rPr>
               <a:t>000003</a:t>
             </a:r>
             <a:r>
-              <a:rPr sz="1700" b="0">
-                <a:solidFill>
-                  <a:srgbClr val="374451"/>
+              <a:rPr sz="2100" b="0">
+                <a:solidFill>
+                  <a:srgbClr val="212C38"/>
                 </a:solidFill>
                 <a:latin typeface="Arial"/>
               </a:rPr>
               <a:t> sengaja menyimpan informasi yang sama di </a:t>
             </a:r>
             <a:r>
-              <a:rPr sz="1530" b="0">
-                <a:solidFill>
-                  <a:srgbClr val="374451"/>
-                </a:solidFill>
-                <a:latin typeface="Courier New"/>
+              <a:rPr sz="1890" b="0">
+                <a:solidFill>
+                  <a:srgbClr val="212C38"/>
+                </a:solidFill>
+                <a:latin typeface="JetBrains Mono"/>
               </a:rPr>
               <a:t>first_name</a:t>
             </a:r>
             <a:r>
-              <a:rPr sz="1700" b="0">
-                <a:solidFill>
-                  <a:srgbClr val="374451"/>
+              <a:rPr sz="2100" b="0">
+                <a:solidFill>
+                  <a:srgbClr val="212C38"/>
                 </a:solidFill>
                 <a:latin typeface="Arial"/>
               </a:rPr>
               <a:t> dan </a:t>
             </a:r>
             <a:r>
-              <a:rPr sz="1530" b="0">
-                <a:solidFill>
-                  <a:srgbClr val="374451"/>
-                </a:solidFill>
-                <a:latin typeface="Courier New"/>
+              <a:rPr sz="1890" b="0">
+                <a:solidFill>
+                  <a:srgbClr val="212C38"/>
+                </a:solidFill>
+                <a:latin typeface="JetBrains Mono"/>
               </a:rPr>
               <a:t>last_name</a:t>
             </a:r>
             <a:r>
-              <a:rPr sz="1700" b="0">
-                <a:solidFill>
-                  <a:srgbClr val="374451"/>
+              <a:rPr sz="2100" b="0">
+                <a:solidFill>
+                  <a:srgbClr val="212C38"/>
                 </a:solidFill>
                 <a:latin typeface="Arial"/>
               </a:rPr>
@@ -9190,8 +9094,8 @@
         </p:nvSpPr>
         <p:spPr>
           <a:xfrm>
-            <a:off x="777240" y="3634993"/>
-            <a:ext cx="10637215" cy="561340"/>
+            <a:off x="777240" y="4624070"/>
+            <a:ext cx="10637215" cy="693420"/>
           </a:xfrm>
           <a:prstGeom prst="rect">
             <a:avLst/>
@@ -9210,27 +9114,27 @@
               </a:lnSpc>
             </a:pPr>
             <a:r>
-              <a:rPr sz="1700" b="0">
-                <a:solidFill>
-                  <a:srgbClr val="374451"/>
+              <a:rPr sz="2100" b="0">
+                <a:solidFill>
+                  <a:srgbClr val="212C38"/>
                 </a:solidFill>
                 <a:latin typeface="Arial"/>
               </a:rPr>
               <a:t>Kalau </a:t>
             </a:r>
             <a:r>
-              <a:rPr sz="1530" b="0">
-                <a:solidFill>
-                  <a:srgbClr val="374451"/>
-                </a:solidFill>
-                <a:latin typeface="Courier New"/>
+              <a:rPr sz="1890" b="0">
+                <a:solidFill>
+                  <a:srgbClr val="212C38"/>
+                </a:solidFill>
+                <a:latin typeface="JetBrains Mono"/>
               </a:rPr>
               <a:t>first_name</a:t>
             </a:r>
             <a:r>
-              <a:rPr sz="1700" b="0">
-                <a:solidFill>
-                  <a:srgbClr val="374451"/>
+              <a:rPr sz="2100" b="0">
+                <a:solidFill>
+                  <a:srgbClr val="212C38"/>
                 </a:solidFill>
                 <a:latin typeface="Arial"/>
               </a:rPr>
@@ -9263,9 +9167,9 @@
           <a:p>
             <a:pPr algn="r"/>
             <a:r>
-              <a:rPr sz="1100">
-                <a:solidFill>
-                  <a:srgbClr val="6B7784"/>
+              <a:rPr sz="1200">
+                <a:solidFill>
+                  <a:srgbClr val="626E7B"/>
                 </a:solidFill>
                 <a:latin typeface="Arial"/>
               </a:rPr>
@@ -9323,9 +9227,9 @@
           <a:lstStyle/>
           <a:p>
             <a:r>
-              <a:rPr sz="2900" b="1">
-                <a:solidFill>
-                  <a:srgbClr val="1B2533"/>
+              <a:rPr sz="3300" b="1">
+                <a:solidFill>
+                  <a:srgbClr val="111A24"/>
                 </a:solidFill>
                 <a:latin typeface="Arial"/>
               </a:rPr>
@@ -9349,7 +9253,7 @@
             <a:avLst/>
           </a:prstGeom>
           <a:solidFill>
-            <a:srgbClr val="00ADD8"/>
+            <a:srgbClr val="008CB0"/>
           </a:solidFill>
           <a:ln>
             <a:noFill/>
@@ -9386,8 +9290,8 @@
         </p:nvSpPr>
         <p:spPr>
           <a:xfrm>
-            <a:off x="777240" y="1572768"/>
-            <a:ext cx="10637215" cy="561340"/>
+            <a:off x="777240" y="1536192"/>
+            <a:ext cx="10637215" cy="346710"/>
           </a:xfrm>
           <a:prstGeom prst="rect">
             <a:avLst/>
@@ -9406,13 +9310,13 @@
               </a:lnSpc>
             </a:pPr>
             <a:r>
-              <a:rPr sz="1700" b="0">
-                <a:solidFill>
-                  <a:srgbClr val="374451"/>
-                </a:solidFill>
-                <a:latin typeface="Arial"/>
-              </a:rPr>
-              <a:t>Down migration cuma bisa mengembalikan informasi yang masih tersimpan di tempat lain di database. Dia menghitung ulang, bukan mengembalikan.</a:t>
+              <a:rPr sz="2100" b="0">
+                <a:solidFill>
+                  <a:srgbClr val="212C38"/>
+                </a:solidFill>
+                <a:latin typeface="Arial"/>
+              </a:rPr>
+              <a:t>Intinya: down migration itu menghitung ulang, bukan mengembalikan.</a:t>
             </a:r>
           </a:p>
         </p:txBody>
@@ -9425,8 +9329,8 @@
         </p:nvSpPr>
         <p:spPr>
           <a:xfrm>
-            <a:off x="777240" y="2289555"/>
-            <a:ext cx="10637215" cy="280670"/>
+            <a:off x="777240" y="2038349"/>
+            <a:ext cx="10637215" cy="346710"/>
           </a:xfrm>
           <a:prstGeom prst="rect">
             <a:avLst/>
@@ -9445,18 +9349,18 @@
               </a:lnSpc>
             </a:pPr>
             <a:r>
-              <a:rPr sz="1700" b="1">
-                <a:solidFill>
-                  <a:srgbClr val="374451"/>
+              <a:rPr sz="2100" b="1">
+                <a:solidFill>
+                  <a:srgbClr val="212C38"/>
                 </a:solidFill>
                 <a:latin typeface="Arial"/>
               </a:rPr>
               <a:t>Di lokal</a:t>
             </a:r>
             <a:r>
-              <a:rPr sz="1700" b="0">
-                <a:solidFill>
-                  <a:srgbClr val="374451"/>
+              <a:rPr sz="2100" b="0">
+                <a:solidFill>
+                  <a:srgbClr val="212C38"/>
                 </a:solidFill>
                 <a:latin typeface="Arial"/>
               </a:rPr>
@@ -9473,8 +9377,8 @@
         </p:nvSpPr>
         <p:spPr>
           <a:xfrm>
-            <a:off x="777240" y="2725673"/>
-            <a:ext cx="10637215" cy="280670"/>
+            <a:off x="777240" y="2540508"/>
+            <a:ext cx="10637215" cy="346710"/>
           </a:xfrm>
           <a:prstGeom prst="rect">
             <a:avLst/>
@@ -9493,18 +9397,18 @@
               </a:lnSpc>
             </a:pPr>
             <a:r>
-              <a:rPr sz="1700" b="1">
-                <a:solidFill>
-                  <a:srgbClr val="374451"/>
+              <a:rPr sz="2100" b="1">
+                <a:solidFill>
+                  <a:srgbClr val="212C38"/>
                 </a:solidFill>
                 <a:latin typeface="Arial"/>
               </a:rPr>
               <a:t>Di production</a:t>
             </a:r>
             <a:r>
-              <a:rPr sz="1700" b="0">
-                <a:solidFill>
-                  <a:srgbClr val="374451"/>
+              <a:rPr sz="2100" b="0">
+                <a:solidFill>
+                  <a:srgbClr val="212C38"/>
                 </a:solidFill>
                 <a:latin typeface="Arial"/>
               </a:rPr>
@@ -9521,8 +9425,8 @@
         </p:nvSpPr>
         <p:spPr>
           <a:xfrm>
-            <a:off x="777240" y="3161791"/>
-            <a:ext cx="10637215" cy="280670"/>
+            <a:off x="777240" y="3042665"/>
+            <a:ext cx="10637215" cy="346710"/>
           </a:xfrm>
           <a:prstGeom prst="rect">
             <a:avLst/>
@@ -9541,27 +9445,27 @@
               </a:lnSpc>
             </a:pPr>
             <a:r>
-              <a:rPr sz="1700" b="0">
-                <a:solidFill>
-                  <a:srgbClr val="374451"/>
+              <a:rPr sz="2100" b="0">
+                <a:solidFill>
+                  <a:srgbClr val="212C38"/>
                 </a:solidFill>
                 <a:latin typeface="Arial"/>
               </a:rPr>
               <a:t>Yang mengembalikan data saat darurat adalah backup, bukan file </a:t>
             </a:r>
             <a:r>
-              <a:rPr sz="1530" b="0">
-                <a:solidFill>
-                  <a:srgbClr val="374451"/>
-                </a:solidFill>
-                <a:latin typeface="Courier New"/>
+              <a:rPr sz="1890" b="0">
+                <a:solidFill>
+                  <a:srgbClr val="212C38"/>
+                </a:solidFill>
+                <a:latin typeface="JetBrains Mono"/>
               </a:rPr>
               <a:t>.down.sql</a:t>
             </a:r>
             <a:r>
-              <a:rPr sz="1700" b="0">
-                <a:solidFill>
-                  <a:srgbClr val="374451"/>
+              <a:rPr sz="2100" b="0">
+                <a:solidFill>
+                  <a:srgbClr val="212C38"/>
                 </a:solidFill>
                 <a:latin typeface="Arial"/>
               </a:rPr>
@@ -9594,9 +9498,9 @@
           <a:p>
             <a:pPr algn="r"/>
             <a:r>
-              <a:rPr sz="1100">
-                <a:solidFill>
-                  <a:srgbClr val="6B7784"/>
+              <a:rPr sz="1200">
+                <a:solidFill>
+                  <a:srgbClr val="626E7B"/>
                 </a:solidFill>
                 <a:latin typeface="Arial"/>
               </a:rPr>
@@ -9654,9 +9558,9 @@
           <a:lstStyle/>
           <a:p>
             <a:r>
-              <a:rPr sz="2900" b="1">
-                <a:solidFill>
-                  <a:srgbClr val="1B2533"/>
+              <a:rPr sz="3300" b="1">
+                <a:solidFill>
+                  <a:srgbClr val="111A24"/>
                 </a:solidFill>
                 <a:latin typeface="Arial"/>
               </a:rPr>
@@ -9680,7 +9584,7 @@
             <a:avLst/>
           </a:prstGeom>
           <a:solidFill>
-            <a:srgbClr val="00ADD8"/>
+            <a:srgbClr val="008CB0"/>
           </a:solidFill>
           <a:ln>
             <a:noFill/>
@@ -9717,8 +9621,8 @@
         </p:nvSpPr>
         <p:spPr>
           <a:xfrm>
-            <a:off x="777240" y="1572768"/>
-            <a:ext cx="10637215" cy="280670"/>
+            <a:off x="777240" y="1536192"/>
+            <a:ext cx="10637215" cy="346710"/>
           </a:xfrm>
           <a:prstGeom prst="rect">
             <a:avLst/>
@@ -9737,9 +9641,9 @@
               </a:lnSpc>
             </a:pPr>
             <a:r>
-              <a:rPr sz="1700" b="0">
-                <a:solidFill>
-                  <a:srgbClr val="374451"/>
+              <a:rPr sz="2100" b="0">
+                <a:solidFill>
+                  <a:srgbClr val="212C38"/>
                 </a:solidFill>
                 <a:latin typeface="Arial"/>
               </a:rPr>
@@ -9756,8 +9660,8 @@
         </p:nvSpPr>
         <p:spPr>
           <a:xfrm>
-            <a:off x="777240" y="2008885"/>
-            <a:ext cx="10637215" cy="1062228"/>
+            <a:off x="777240" y="2038349"/>
+            <a:ext cx="10637215" cy="1312164"/>
           </a:xfrm>
           <a:prstGeom prst="rect">
             <a:avLst/>
@@ -9775,31 +9679,31 @@
                 <a:spcPct val="128000"/>
               </a:lnSpc>
               <a:spcAft>
-                <a:spcPts val="578"/>
+                <a:spcPts val="714"/>
               </a:spcAft>
             </a:pPr>
             <a:r>
-              <a:rPr sz="1700" b="1">
-                <a:solidFill>
-                  <a:srgbClr val="00ADD8"/>
+              <a:rPr sz="2100" b="1">
+                <a:solidFill>
+                  <a:srgbClr val="008CB0"/>
                 </a:solidFill>
                 <a:latin typeface="Arial"/>
               </a:rPr>
               <a:t>1.  </a:t>
             </a:r>
             <a:r>
-              <a:rPr sz="1700" b="1">
-                <a:solidFill>
-                  <a:srgbClr val="374451"/>
+              <a:rPr sz="2100" b="1">
+                <a:solidFill>
+                  <a:srgbClr val="212C38"/>
                 </a:solidFill>
                 <a:latin typeface="Arial"/>
               </a:rPr>
               <a:t>Expand</a:t>
             </a:r>
             <a:r>
-              <a:rPr sz="1700" b="0">
-                <a:solidFill>
-                  <a:srgbClr val="374451"/>
+              <a:rPr sz="2100" b="0">
+                <a:solidFill>
+                  <a:srgbClr val="212C38"/>
                 </a:solidFill>
                 <a:latin typeface="Arial"/>
               </a:rPr>
@@ -9812,31 +9716,31 @@
                 <a:spcPct val="128000"/>
               </a:lnSpc>
               <a:spcAft>
-                <a:spcPts val="578"/>
+                <a:spcPts val="714"/>
               </a:spcAft>
             </a:pPr>
             <a:r>
-              <a:rPr sz="1700" b="1">
-                <a:solidFill>
-                  <a:srgbClr val="00ADD8"/>
+              <a:rPr sz="2100" b="1">
+                <a:solidFill>
+                  <a:srgbClr val="008CB0"/>
                 </a:solidFill>
                 <a:latin typeface="Arial"/>
               </a:rPr>
               <a:t>2.  </a:t>
             </a:r>
             <a:r>
-              <a:rPr sz="1700" b="1">
-                <a:solidFill>
-                  <a:srgbClr val="374451"/>
+              <a:rPr sz="2100" b="1">
+                <a:solidFill>
+                  <a:srgbClr val="212C38"/>
                 </a:solidFill>
                 <a:latin typeface="Arial"/>
               </a:rPr>
               <a:t>Migrate</a:t>
             </a:r>
             <a:r>
-              <a:rPr sz="1700" b="0">
-                <a:solidFill>
-                  <a:srgbClr val="374451"/>
+              <a:rPr sz="2100" b="0">
+                <a:solidFill>
+                  <a:srgbClr val="212C38"/>
                 </a:solidFill>
                 <a:latin typeface="Arial"/>
               </a:rPr>
@@ -9849,31 +9753,31 @@
                 <a:spcPct val="128000"/>
               </a:lnSpc>
               <a:spcAft>
-                <a:spcPts val="578"/>
+                <a:spcPts val="714"/>
               </a:spcAft>
             </a:pPr>
             <a:r>
-              <a:rPr sz="1700" b="1">
-                <a:solidFill>
-                  <a:srgbClr val="00ADD8"/>
+              <a:rPr sz="2100" b="1">
+                <a:solidFill>
+                  <a:srgbClr val="008CB0"/>
                 </a:solidFill>
                 <a:latin typeface="Arial"/>
               </a:rPr>
               <a:t>3.  </a:t>
             </a:r>
             <a:r>
-              <a:rPr sz="1700" b="1">
-                <a:solidFill>
-                  <a:srgbClr val="374451"/>
+              <a:rPr sz="2100" b="1">
+                <a:solidFill>
+                  <a:srgbClr val="212C38"/>
                 </a:solidFill>
                 <a:latin typeface="Arial"/>
               </a:rPr>
               <a:t>Contract</a:t>
             </a:r>
             <a:r>
-              <a:rPr sz="1700" b="0">
-                <a:solidFill>
-                  <a:srgbClr val="374451"/>
+              <a:rPr sz="2100" b="0">
+                <a:solidFill>
+                  <a:srgbClr val="212C38"/>
                 </a:solidFill>
                 <a:latin typeface="Arial"/>
               </a:rPr>
@@ -9890,8 +9794,8 @@
         </p:nvSpPr>
         <p:spPr>
           <a:xfrm>
-            <a:off x="777240" y="3253994"/>
-            <a:ext cx="10637215" cy="561340"/>
+            <a:off x="777240" y="3533394"/>
+            <a:ext cx="10637215" cy="693420"/>
           </a:xfrm>
           <a:prstGeom prst="rect">
             <a:avLst/>
@@ -9910,9 +9814,9 @@
               </a:lnSpc>
             </a:pPr>
             <a:r>
-              <a:rPr sz="1700" b="0">
-                <a:solidFill>
-                  <a:srgbClr val="374451"/>
+              <a:rPr sz="2100" b="0">
+                <a:solidFill>
+                  <a:srgbClr val="212C38"/>
                 </a:solidFill>
                 <a:latin typeface="Arial"/>
               </a:rPr>
@@ -9929,8 +9833,8 @@
         </p:nvSpPr>
         <p:spPr>
           <a:xfrm>
-            <a:off x="777240" y="3970781"/>
-            <a:ext cx="10637215" cy="280670"/>
+            <a:off x="777240" y="4382262"/>
+            <a:ext cx="10637215" cy="346710"/>
           </a:xfrm>
           <a:prstGeom prst="rect">
             <a:avLst/>
@@ -9949,45 +9853,45 @@
               </a:lnSpc>
             </a:pPr>
             <a:r>
-              <a:rPr sz="1700" b="0">
-                <a:solidFill>
-                  <a:srgbClr val="374451"/>
+              <a:rPr sz="2100" b="0">
+                <a:solidFill>
+                  <a:srgbClr val="212C38"/>
                 </a:solidFill>
                 <a:latin typeface="Arial"/>
               </a:rPr>
               <a:t>Contohnya ada di repo, migration </a:t>
             </a:r>
             <a:r>
-              <a:rPr sz="1530" b="0">
-                <a:solidFill>
-                  <a:srgbClr val="374451"/>
-                </a:solidFill>
-                <a:latin typeface="Courier New"/>
+              <a:rPr sz="1890" b="0">
+                <a:solidFill>
+                  <a:srgbClr val="212C38"/>
+                </a:solidFill>
+                <a:latin typeface="JetBrains Mono"/>
               </a:rPr>
               <a:t>000003</a:t>
             </a:r>
             <a:r>
-              <a:rPr sz="1700" b="0">
-                <a:solidFill>
-                  <a:srgbClr val="374451"/>
+              <a:rPr sz="2100" b="0">
+                <a:solidFill>
+                  <a:srgbClr val="212C38"/>
                 </a:solidFill>
                 <a:latin typeface="Arial"/>
               </a:rPr>
               <a:t> dan </a:t>
             </a:r>
             <a:r>
-              <a:rPr sz="1530" b="0">
-                <a:solidFill>
-                  <a:srgbClr val="374451"/>
-                </a:solidFill>
-                <a:latin typeface="Courier New"/>
+              <a:rPr sz="1890" b="0">
+                <a:solidFill>
+                  <a:srgbClr val="212C38"/>
+                </a:solidFill>
+                <a:latin typeface="JetBrains Mono"/>
               </a:rPr>
               <a:t>000004</a:t>
             </a:r>
             <a:r>
-              <a:rPr sz="1700" b="0">
-                <a:solidFill>
-                  <a:srgbClr val="374451"/>
+              <a:rPr sz="2100" b="0">
+                <a:solidFill>
+                  <a:srgbClr val="212C38"/>
                 </a:solidFill>
                 <a:latin typeface="Arial"/>
               </a:rPr>
@@ -10020,9 +9924,9 @@
           <a:p>
             <a:pPr algn="r"/>
             <a:r>
-              <a:rPr sz="1100">
-                <a:solidFill>
-                  <a:srgbClr val="6B7784"/>
+              <a:rPr sz="1200">
+                <a:solidFill>
+                  <a:srgbClr val="626E7B"/>
                 </a:solidFill>
                 <a:latin typeface="Arial"/>
               </a:rPr>
@@ -10080,9 +9984,9 @@
           <a:lstStyle/>
           <a:p>
             <a:r>
-              <a:rPr sz="2900" b="1">
-                <a:solidFill>
-                  <a:srgbClr val="1B2533"/>
+              <a:rPr sz="3300" b="1">
+                <a:solidFill>
+                  <a:srgbClr val="111A24"/>
                 </a:solidFill>
                 <a:latin typeface="Arial"/>
               </a:rPr>
@@ -10106,7 +10010,7 @@
             <a:avLst/>
           </a:prstGeom>
           <a:solidFill>
-            <a:srgbClr val="00ADD8"/>
+            <a:srgbClr val="008CB0"/>
           </a:solidFill>
           <a:ln>
             <a:noFill/>
@@ -10143,8 +10047,8 @@
         </p:nvSpPr>
         <p:spPr>
           <a:xfrm>
-            <a:off x="777240" y="1572768"/>
-            <a:ext cx="10637215" cy="1416304"/>
+            <a:off x="777240" y="1536192"/>
+            <a:ext cx="10637215" cy="1749551"/>
           </a:xfrm>
           <a:prstGeom prst="rect">
             <a:avLst/>
@@ -10162,22 +10066,22 @@
                 <a:spcPct val="128000"/>
               </a:lnSpc>
               <a:spcAft>
-                <a:spcPts val="578"/>
+                <a:spcPts val="714"/>
               </a:spcAft>
             </a:pPr>
             <a:r>
-              <a:rPr sz="1700" b="1">
-                <a:solidFill>
-                  <a:srgbClr val="00ADD8"/>
+              <a:rPr sz="2100" b="1">
+                <a:solidFill>
+                  <a:srgbClr val="008CB0"/>
                 </a:solidFill>
                 <a:latin typeface="Arial"/>
               </a:rPr>
               <a:t>1.  </a:t>
             </a:r>
             <a:r>
-              <a:rPr sz="1700" b="0">
-                <a:solidFill>
-                  <a:srgbClr val="374451"/>
+              <a:rPr sz="2100" b="0">
+                <a:solidFill>
+                  <a:srgbClr val="212C38"/>
                 </a:solidFill>
                 <a:latin typeface="Arial"/>
               </a:rPr>
@@ -10190,22 +10094,22 @@
                 <a:spcPct val="128000"/>
               </a:lnSpc>
               <a:spcAft>
-                <a:spcPts val="578"/>
+                <a:spcPts val="714"/>
               </a:spcAft>
             </a:pPr>
             <a:r>
-              <a:rPr sz="1700" b="1">
-                <a:solidFill>
-                  <a:srgbClr val="00ADD8"/>
+              <a:rPr sz="2100" b="1">
+                <a:solidFill>
+                  <a:srgbClr val="008CB0"/>
                 </a:solidFill>
                 <a:latin typeface="Arial"/>
               </a:rPr>
               <a:t>2.  </a:t>
             </a:r>
             <a:r>
-              <a:rPr sz="1700" b="0">
-                <a:solidFill>
-                  <a:srgbClr val="374451"/>
+              <a:rPr sz="2100" b="0">
+                <a:solidFill>
+                  <a:srgbClr val="212C38"/>
                 </a:solidFill>
                 <a:latin typeface="Arial"/>
               </a:rPr>
@@ -10218,22 +10122,22 @@
                 <a:spcPct val="128000"/>
               </a:lnSpc>
               <a:spcAft>
-                <a:spcPts val="578"/>
+                <a:spcPts val="714"/>
               </a:spcAft>
             </a:pPr>
             <a:r>
-              <a:rPr sz="1700" b="1">
-                <a:solidFill>
-                  <a:srgbClr val="00ADD8"/>
+              <a:rPr sz="2100" b="1">
+                <a:solidFill>
+                  <a:srgbClr val="008CB0"/>
                 </a:solidFill>
                 <a:latin typeface="Arial"/>
               </a:rPr>
               <a:t>3.  </a:t>
             </a:r>
             <a:r>
-              <a:rPr sz="1700" b="0">
-                <a:solidFill>
-                  <a:srgbClr val="374451"/>
+              <a:rPr sz="2100" b="0">
+                <a:solidFill>
+                  <a:srgbClr val="212C38"/>
                 </a:solidFill>
                 <a:latin typeface="Arial"/>
               </a:rPr>
@@ -10246,22 +10150,22 @@
                 <a:spcPct val="128000"/>
               </a:lnSpc>
               <a:spcAft>
-                <a:spcPts val="578"/>
+                <a:spcPts val="714"/>
               </a:spcAft>
             </a:pPr>
             <a:r>
-              <a:rPr sz="1700" b="1">
-                <a:solidFill>
-                  <a:srgbClr val="00ADD8"/>
+              <a:rPr sz="2100" b="1">
+                <a:solidFill>
+                  <a:srgbClr val="008CB0"/>
                 </a:solidFill>
                 <a:latin typeface="Arial"/>
               </a:rPr>
               <a:t>4.  </a:t>
             </a:r>
             <a:r>
-              <a:rPr sz="1700" b="0">
-                <a:solidFill>
-                  <a:srgbClr val="374451"/>
+              <a:rPr sz="2100" b="0">
+                <a:solidFill>
+                  <a:srgbClr val="212C38"/>
                 </a:solidFill>
                 <a:latin typeface="Arial"/>
               </a:rPr>
@@ -10278,8 +10182,8 @@
         </p:nvSpPr>
         <p:spPr>
           <a:xfrm>
-            <a:off x="777240" y="3171952"/>
-            <a:ext cx="10637215" cy="561340"/>
+            <a:off x="777240" y="3468623"/>
+            <a:ext cx="10637215" cy="693420"/>
           </a:xfrm>
           <a:prstGeom prst="rect">
             <a:avLst/>
@@ -10298,9 +10202,9 @@
               </a:lnSpc>
             </a:pPr>
             <a:r>
-              <a:rPr sz="1700" b="0">
-                <a:solidFill>
-                  <a:srgbClr val="374451"/>
+              <a:rPr sz="2100" b="0">
+                <a:solidFill>
+                  <a:srgbClr val="212C38"/>
                 </a:solidFill>
                 <a:latin typeface="Arial"/>
               </a:rPr>
@@ -10317,8 +10221,8 @@
         </p:nvSpPr>
         <p:spPr>
           <a:xfrm>
-            <a:off x="777240" y="3888740"/>
-            <a:ext cx="10637215" cy="280670"/>
+            <a:off x="777240" y="4317491"/>
+            <a:ext cx="10637215" cy="346710"/>
           </a:xfrm>
           <a:prstGeom prst="rect">
             <a:avLst/>
@@ -10337,27 +10241,27 @@
               </a:lnSpc>
             </a:pPr>
             <a:r>
-              <a:rPr sz="1700" b="0">
-                <a:solidFill>
-                  <a:srgbClr val="374451"/>
+              <a:rPr sz="2100" b="0">
+                <a:solidFill>
+                  <a:srgbClr val="212C38"/>
                 </a:solidFill>
                 <a:latin typeface="Arial"/>
               </a:rPr>
               <a:t>Implementasi lengkapnya ada di repo: </a:t>
             </a:r>
             <a:r>
-              <a:rPr sz="1530" b="0">
-                <a:solidFill>
-                  <a:srgbClr val="374451"/>
-                </a:solidFill>
-                <a:latin typeface="Courier New"/>
+              <a:rPr sz="1890" b="0">
+                <a:solidFill>
+                  <a:srgbClr val="212C38"/>
+                </a:solidFill>
+                <a:latin typeface="JetBrains Mono"/>
               </a:rPr>
               <a:t>03-mini-runner/</a:t>
             </a:r>
             <a:r>
-              <a:rPr sz="1700" b="0">
-                <a:solidFill>
-                  <a:srgbClr val="374451"/>
+              <a:rPr sz="2100" b="0">
+                <a:solidFill>
+                  <a:srgbClr val="212C38"/>
                 </a:solidFill>
                 <a:latin typeface="Arial"/>
               </a:rPr>
@@ -10390,9 +10294,9 @@
           <a:p>
             <a:pPr algn="r"/>
             <a:r>
-              <a:rPr sz="1100">
-                <a:solidFill>
-                  <a:srgbClr val="6B7784"/>
+              <a:rPr sz="1200">
+                <a:solidFill>
+                  <a:srgbClr val="626E7B"/>
                 </a:solidFill>
                 <a:latin typeface="Arial"/>
               </a:rPr>
@@ -10450,9 +10354,9 @@
           <a:lstStyle/>
           <a:p>
             <a:r>
-              <a:rPr sz="2900" b="1">
-                <a:solidFill>
-                  <a:srgbClr val="1B2533"/>
+              <a:rPr sz="3300" b="1">
+                <a:solidFill>
+                  <a:srgbClr val="111A24"/>
                 </a:solidFill>
                 <a:latin typeface="Arial"/>
               </a:rPr>
@@ -10476,7 +10380,7 @@
             <a:avLst/>
           </a:prstGeom>
           <a:solidFill>
-            <a:srgbClr val="00ADD8"/>
+            <a:srgbClr val="008CB0"/>
           </a:solidFill>
           <a:ln>
             <a:noFill/>
@@ -10513,8 +10417,8 @@
         </p:nvSpPr>
         <p:spPr>
           <a:xfrm>
-            <a:off x="777240" y="1700784"/>
-            <a:ext cx="10637215" cy="280670"/>
+            <a:off x="777240" y="1664207"/>
+            <a:ext cx="10637215" cy="346710"/>
           </a:xfrm>
           <a:prstGeom prst="rect">
             <a:avLst/>
@@ -10533,9 +10437,9 @@
               </a:lnSpc>
             </a:pPr>
             <a:r>
-              <a:rPr sz="1700" b="1">
-                <a:solidFill>
-                  <a:srgbClr val="1B2533"/>
+              <a:rPr sz="2100" b="1">
+                <a:solidFill>
+                  <a:srgbClr val="111A24"/>
                 </a:solidFill>
                 <a:latin typeface="Arial"/>
               </a:rPr>
@@ -10552,8 +10456,8 @@
         </p:nvSpPr>
         <p:spPr>
           <a:xfrm>
-            <a:off x="777240" y="2008885"/>
-            <a:ext cx="10637215" cy="280670"/>
+            <a:off x="777240" y="2038349"/>
+            <a:ext cx="10637215" cy="346710"/>
           </a:xfrm>
           <a:prstGeom prst="rect">
             <a:avLst/>
@@ -10572,9 +10476,9 @@
               </a:lnSpc>
             </a:pPr>
             <a:r>
-              <a:rPr sz="1700" b="0">
-                <a:solidFill>
-                  <a:srgbClr val="374451"/>
+              <a:rPr sz="2100" b="0">
+                <a:solidFill>
+                  <a:srgbClr val="212C38"/>
                 </a:solidFill>
                 <a:latin typeface="Arial"/>
               </a:rPr>
@@ -10591,8 +10495,8 @@
         </p:nvSpPr>
         <p:spPr>
           <a:xfrm>
-            <a:off x="777240" y="2573020"/>
-            <a:ext cx="10637215" cy="280670"/>
+            <a:off x="777240" y="2668524"/>
+            <a:ext cx="10637215" cy="346710"/>
           </a:xfrm>
           <a:prstGeom prst="rect">
             <a:avLst/>
@@ -10611,9 +10515,9 @@
               </a:lnSpc>
             </a:pPr>
             <a:r>
-              <a:rPr sz="1700" b="1">
-                <a:solidFill>
-                  <a:srgbClr val="1B2533"/>
+              <a:rPr sz="2100" b="1">
+                <a:solidFill>
+                  <a:srgbClr val="111A24"/>
                 </a:solidFill>
                 <a:latin typeface="Arial"/>
               </a:rPr>
@@ -10630,8 +10534,8 @@
         </p:nvSpPr>
         <p:spPr>
           <a:xfrm>
-            <a:off x="777240" y="2881121"/>
-            <a:ext cx="10637215" cy="280670"/>
+            <a:off x="777240" y="3042666"/>
+            <a:ext cx="10637215" cy="346710"/>
           </a:xfrm>
           <a:prstGeom prst="rect">
             <a:avLst/>
@@ -10650,9 +10554,9 @@
               </a:lnSpc>
             </a:pPr>
             <a:r>
-              <a:rPr sz="1700" b="0">
-                <a:solidFill>
-                  <a:srgbClr val="374451"/>
+              <a:rPr sz="2100" b="0">
+                <a:solidFill>
+                  <a:srgbClr val="212C38"/>
                 </a:solidFill>
                 <a:latin typeface="Arial"/>
               </a:rPr>
@@ -10669,8 +10573,8 @@
         </p:nvSpPr>
         <p:spPr>
           <a:xfrm>
-            <a:off x="777240" y="3445255"/>
-            <a:ext cx="10637215" cy="280670"/>
+            <a:off x="777240" y="3672840"/>
+            <a:ext cx="10637215" cy="346710"/>
           </a:xfrm>
           <a:prstGeom prst="rect">
             <a:avLst/>
@@ -10689,9 +10593,9 @@
               </a:lnSpc>
             </a:pPr>
             <a:r>
-              <a:rPr sz="1700" b="1">
-                <a:solidFill>
-                  <a:srgbClr val="1B2533"/>
+              <a:rPr sz="2100" b="1">
+                <a:solidFill>
+                  <a:srgbClr val="111A24"/>
                 </a:solidFill>
                 <a:latin typeface="Arial"/>
               </a:rPr>
@@ -10708,8 +10612,8 @@
         </p:nvSpPr>
         <p:spPr>
           <a:xfrm>
-            <a:off x="777240" y="3753358"/>
-            <a:ext cx="10637215" cy="280670"/>
+            <a:off x="777240" y="4046982"/>
+            <a:ext cx="10637215" cy="346710"/>
           </a:xfrm>
           <a:prstGeom prst="rect">
             <a:avLst/>
@@ -10728,9 +10632,9 @@
               </a:lnSpc>
             </a:pPr>
             <a:r>
-              <a:rPr sz="1700" b="0">
-                <a:solidFill>
-                  <a:srgbClr val="374451"/>
+              <a:rPr sz="2100" b="0">
+                <a:solidFill>
+                  <a:srgbClr val="212C38"/>
                 </a:solidFill>
                 <a:latin typeface="Arial"/>
               </a:rPr>
@@ -10763,9 +10667,9 @@
           <a:p>
             <a:pPr algn="r"/>
             <a:r>
-              <a:rPr sz="1100">
-                <a:solidFill>
-                  <a:srgbClr val="6B7784"/>
+              <a:rPr sz="1200">
+                <a:solidFill>
+                  <a:srgbClr val="626E7B"/>
                 </a:solidFill>
                 <a:latin typeface="Arial"/>
               </a:rPr>
@@ -10823,9 +10727,9 @@
           <a:lstStyle/>
           <a:p>
             <a:r>
-              <a:rPr sz="2900" b="1">
-                <a:solidFill>
-                  <a:srgbClr val="1B2533"/>
+              <a:rPr sz="3300" b="1">
+                <a:solidFill>
+                  <a:srgbClr val="111A24"/>
                 </a:solidFill>
                 <a:latin typeface="Arial"/>
               </a:rPr>
@@ -10849,7 +10753,7 @@
             <a:avLst/>
           </a:prstGeom>
           <a:solidFill>
-            <a:srgbClr val="00ADD8"/>
+            <a:srgbClr val="008CB0"/>
           </a:solidFill>
           <a:ln>
             <a:noFill/>
@@ -10886,8 +10790,8 @@
         </p:nvSpPr>
         <p:spPr>
           <a:xfrm>
-            <a:off x="777240" y="1572768"/>
-            <a:ext cx="10637215" cy="1770380"/>
+            <a:off x="777240" y="1536192"/>
+            <a:ext cx="10637215" cy="2186940"/>
           </a:xfrm>
           <a:prstGeom prst="rect">
             <a:avLst/>
@@ -10905,22 +10809,22 @@
                 <a:spcPct val="128000"/>
               </a:lnSpc>
               <a:spcAft>
-                <a:spcPts val="578"/>
+                <a:spcPts val="714"/>
               </a:spcAft>
             </a:pPr>
             <a:r>
-              <a:rPr sz="1700" b="1">
-                <a:solidFill>
-                  <a:srgbClr val="00ADD8"/>
+              <a:rPr sz="2100" b="1">
+                <a:solidFill>
+                  <a:srgbClr val="008CB0"/>
                 </a:solidFill>
                 <a:latin typeface="Arial"/>
               </a:rPr>
               <a:t>•   </a:t>
             </a:r>
             <a:r>
-              <a:rPr sz="1700" b="0">
-                <a:solidFill>
-                  <a:srgbClr val="374451"/>
+              <a:rPr sz="2100" b="0">
+                <a:solidFill>
+                  <a:srgbClr val="212C38"/>
                 </a:solidFill>
                 <a:latin typeface="Arial"/>
               </a:rPr>
@@ -10933,33 +10837,33 @@
                 <a:spcPct val="128000"/>
               </a:lnSpc>
               <a:spcAft>
-                <a:spcPts val="578"/>
+                <a:spcPts val="714"/>
               </a:spcAft>
             </a:pPr>
             <a:r>
-              <a:rPr sz="1700" b="1">
-                <a:solidFill>
-                  <a:srgbClr val="00ADD8"/>
+              <a:rPr sz="2100" b="1">
+                <a:solidFill>
+                  <a:srgbClr val="008CB0"/>
                 </a:solidFill>
                 <a:latin typeface="Arial"/>
               </a:rPr>
               <a:t>•   </a:t>
             </a:r>
             <a:r>
-              <a:rPr sz="1700" b="0">
-                <a:solidFill>
-                  <a:srgbClr val="374451"/>
+              <a:rPr sz="2100" b="0">
+                <a:solidFill>
+                  <a:srgbClr val="212C38"/>
                 </a:solidFill>
                 <a:latin typeface="Arial"/>
               </a:rPr>
               <a:t>Kolom baru dibuat nullable atau diberi </a:t>
             </a:r>
             <a:r>
-              <a:rPr sz="1530" b="0">
-                <a:solidFill>
-                  <a:srgbClr val="374451"/>
-                </a:solidFill>
-                <a:latin typeface="Courier New"/>
+              <a:rPr sz="1890" b="0">
+                <a:solidFill>
+                  <a:srgbClr val="212C38"/>
+                </a:solidFill>
+                <a:latin typeface="JetBrains Mono"/>
               </a:rPr>
               <a:t>DEFAULT</a:t>
             </a:r>
@@ -10970,22 +10874,22 @@
                 <a:spcPct val="128000"/>
               </a:lnSpc>
               <a:spcAft>
-                <a:spcPts val="578"/>
+                <a:spcPts val="714"/>
               </a:spcAft>
             </a:pPr>
             <a:r>
-              <a:rPr sz="1700" b="1">
-                <a:solidFill>
-                  <a:srgbClr val="00ADD8"/>
+              <a:rPr sz="2100" b="1">
+                <a:solidFill>
+                  <a:srgbClr val="008CB0"/>
                 </a:solidFill>
                 <a:latin typeface="Arial"/>
               </a:rPr>
               <a:t>•   </a:t>
             </a:r>
             <a:r>
-              <a:rPr sz="1700" b="0">
-                <a:solidFill>
-                  <a:srgbClr val="374451"/>
+              <a:rPr sz="2100" b="0">
+                <a:solidFill>
+                  <a:srgbClr val="212C38"/>
                 </a:solidFill>
                 <a:latin typeface="Arial"/>
               </a:rPr>
@@ -10998,40 +10902,40 @@
                 <a:spcPct val="128000"/>
               </a:lnSpc>
               <a:spcAft>
-                <a:spcPts val="578"/>
+                <a:spcPts val="714"/>
               </a:spcAft>
             </a:pPr>
             <a:r>
-              <a:rPr sz="1700" b="1">
-                <a:solidFill>
-                  <a:srgbClr val="00ADD8"/>
+              <a:rPr sz="2100" b="1">
+                <a:solidFill>
+                  <a:srgbClr val="008CB0"/>
                 </a:solidFill>
                 <a:latin typeface="Arial"/>
               </a:rPr>
               <a:t>•   </a:t>
             </a:r>
             <a:r>
-              <a:rPr sz="1700" b="0">
-                <a:solidFill>
-                  <a:srgbClr val="374451"/>
+              <a:rPr sz="2100" b="0">
+                <a:solidFill>
+                  <a:srgbClr val="212C38"/>
                 </a:solidFill>
                 <a:latin typeface="Arial"/>
               </a:rPr>
               <a:t>Buat index dengan </a:t>
             </a:r>
             <a:r>
-              <a:rPr sz="1530" b="0">
-                <a:solidFill>
-                  <a:srgbClr val="374451"/>
-                </a:solidFill>
-                <a:latin typeface="Courier New"/>
+              <a:rPr sz="1890" b="0">
+                <a:solidFill>
+                  <a:srgbClr val="212C38"/>
+                </a:solidFill>
+                <a:latin typeface="JetBrains Mono"/>
               </a:rPr>
               <a:t>CREATE INDEX CONCURRENTLY</a:t>
             </a:r>
             <a:r>
-              <a:rPr sz="1700" b="0">
-                <a:solidFill>
-                  <a:srgbClr val="374451"/>
+              <a:rPr sz="2100" b="0">
+                <a:solidFill>
+                  <a:srgbClr val="212C38"/>
                 </a:solidFill>
                 <a:latin typeface="Arial"/>
               </a:rPr>
@@ -11044,22 +10948,22 @@
                 <a:spcPct val="128000"/>
               </a:lnSpc>
               <a:spcAft>
-                <a:spcPts val="578"/>
+                <a:spcPts val="714"/>
               </a:spcAft>
             </a:pPr>
             <a:r>
-              <a:rPr sz="1700" b="1">
-                <a:solidFill>
-                  <a:srgbClr val="00ADD8"/>
+              <a:rPr sz="2100" b="1">
+                <a:solidFill>
+                  <a:srgbClr val="008CB0"/>
                 </a:solidFill>
                 <a:latin typeface="Arial"/>
               </a:rPr>
               <a:t>•   </a:t>
             </a:r>
             <a:r>
-              <a:rPr sz="1700" b="0">
-                <a:solidFill>
-                  <a:srgbClr val="374451"/>
+              <a:rPr sz="2100" b="0">
+                <a:solidFill>
+                  <a:srgbClr val="212C38"/>
                 </a:solidFill>
                 <a:latin typeface="Arial"/>
               </a:rPr>
@@ -11092,9 +10996,9 @@
           <a:p>
             <a:pPr algn="r"/>
             <a:r>
-              <a:rPr sz="1100">
-                <a:solidFill>
-                  <a:srgbClr val="6B7784"/>
+              <a:rPr sz="1200">
+                <a:solidFill>
+                  <a:srgbClr val="626E7B"/>
                 </a:solidFill>
                 <a:latin typeface="Arial"/>
               </a:rPr>
@@ -11152,9 +11056,9 @@
           <a:lstStyle/>
           <a:p>
             <a:r>
-              <a:rPr sz="2900" b="1">
-                <a:solidFill>
-                  <a:srgbClr val="1B2533"/>
+              <a:rPr sz="3300" b="1">
+                <a:solidFill>
+                  <a:srgbClr val="111A24"/>
                 </a:solidFill>
                 <a:latin typeface="Arial"/>
               </a:rPr>
@@ -11178,7 +11082,7 @@
             <a:avLst/>
           </a:prstGeom>
           <a:solidFill>
-            <a:srgbClr val="00ADD8"/>
+            <a:srgbClr val="008CB0"/>
           </a:solidFill>
           <a:ln>
             <a:noFill/>
@@ -11215,8 +11119,8 @@
         </p:nvSpPr>
         <p:spPr>
           <a:xfrm>
-            <a:off x="777240" y="1572768"/>
-            <a:ext cx="10637215" cy="280670"/>
+            <a:off x="777240" y="1536192"/>
+            <a:ext cx="10637215" cy="346710"/>
           </a:xfrm>
           <a:prstGeom prst="rect">
             <a:avLst/>
@@ -11235,9 +11139,9 @@
               </a:lnSpc>
             </a:pPr>
             <a:r>
-              <a:rPr sz="1700" b="0">
-                <a:solidFill>
-                  <a:srgbClr val="374451"/>
+              <a:rPr sz="2100" b="0">
+                <a:solidFill>
+                  <a:srgbClr val="212C38"/>
                 </a:solidFill>
                 <a:latin typeface="Arial"/>
               </a:rPr>
@@ -11254,8 +11158,8 @@
         </p:nvSpPr>
         <p:spPr>
           <a:xfrm>
-            <a:off x="777240" y="2008885"/>
-            <a:ext cx="10637215" cy="280670"/>
+            <a:off x="777240" y="2038349"/>
+            <a:ext cx="10637215" cy="346710"/>
           </a:xfrm>
           <a:prstGeom prst="rect">
             <a:avLst/>
@@ -11274,9 +11178,9 @@
               </a:lnSpc>
             </a:pPr>
             <a:r>
-              <a:rPr sz="1700" b="0">
-                <a:solidFill>
-                  <a:srgbClr val="374451"/>
+              <a:rPr sz="2100" b="0">
+                <a:solidFill>
+                  <a:srgbClr val="212C38"/>
                 </a:solidFill>
                 <a:latin typeface="Arial"/>
               </a:rPr>
@@ -11293,8 +11197,8 @@
         </p:nvSpPr>
         <p:spPr>
           <a:xfrm>
-            <a:off x="777240" y="2445003"/>
-            <a:ext cx="10637215" cy="471931"/>
+            <a:off x="777240" y="2540508"/>
+            <a:ext cx="10637215" cy="538988"/>
           </a:xfrm>
           <a:prstGeom prst="roundRect">
             <a:avLst>
@@ -11302,11 +11206,11 @@
             </a:avLst>
           </a:prstGeom>
           <a:solidFill>
-            <a:srgbClr val="F3F6F8"/>
+            <a:srgbClr val="ECF2F6"/>
           </a:solidFill>
           <a:ln w="9525">
             <a:solidFill>
-              <a:srgbClr val="DDE3E8"/>
+              <a:srgbClr val="C9D4DC"/>
             </a:solidFill>
           </a:ln>
           <a:effectLst/>
@@ -11335,11 +11239,11 @@
               </a:lnSpc>
             </a:pPr>
             <a:r>
-              <a:rPr sz="1300">
-                <a:solidFill>
-                  <a:srgbClr val="1B2733"/>
-                </a:solidFill>
-                <a:latin typeface="Courier New"/>
+              <a:rPr sz="1700">
+                <a:solidFill>
+                  <a:srgbClr val="0E1A26"/>
+                </a:solidFill>
+                <a:latin typeface="JetBrains Mono"/>
               </a:rPr>
               <a:t>ERROR: column "phone_number" of relation "users" does not exist</a:t>
             </a:r>
@@ -11354,8 +11258,8 @@
         </p:nvSpPr>
         <p:spPr>
           <a:xfrm>
-            <a:off x="777240" y="3136391"/>
-            <a:ext cx="10637215" cy="561340"/>
+            <a:off x="777240" y="3298952"/>
+            <a:ext cx="10637215" cy="693420"/>
           </a:xfrm>
           <a:prstGeom prst="rect">
             <a:avLst/>
@@ -11374,9 +11278,9 @@
               </a:lnSpc>
             </a:pPr>
             <a:r>
-              <a:rPr sz="1700" b="0">
-                <a:solidFill>
-                  <a:srgbClr val="374451"/>
+              <a:rPr sz="2100" b="0">
+                <a:solidFill>
+                  <a:srgbClr val="212C38"/>
                 </a:solidFill>
                 <a:latin typeface="Arial"/>
               </a:rPr>
@@ -11409,9 +11313,9 @@
           <a:p>
             <a:pPr algn="r"/>
             <a:r>
-              <a:rPr sz="1100">
-                <a:solidFill>
-                  <a:srgbClr val="6B7784"/>
+              <a:rPr sz="1200">
+                <a:solidFill>
+                  <a:srgbClr val="626E7B"/>
                 </a:solidFill>
                 <a:latin typeface="Arial"/>
               </a:rPr>
@@ -11469,9 +11373,9 @@
           <a:lstStyle/>
           <a:p>
             <a:r>
-              <a:rPr sz="2900" b="1">
-                <a:solidFill>
-                  <a:srgbClr val="1B2533"/>
+              <a:rPr sz="3300" b="1">
+                <a:solidFill>
+                  <a:srgbClr val="111A24"/>
                 </a:solidFill>
                 <a:latin typeface="Arial"/>
               </a:rPr>
@@ -11495,7 +11399,7 @@
             <a:avLst/>
           </a:prstGeom>
           <a:solidFill>
-            <a:srgbClr val="00ADD8"/>
+            <a:srgbClr val="008CB0"/>
           </a:solidFill>
           <a:ln>
             <a:noFill/>
@@ -11533,8 +11437,8 @@
           <p:nvPr/>
         </p:nvGraphicFramePr>
         <p:xfrm>
-          <a:off x="777240" y="1682495"/>
-          <a:ext cx="10637215" cy="1822445"/>
+          <a:off x="777240" y="1645919"/>
+          <a:ext cx="10637215" cy="2343145"/>
         </p:xfrm>
         <a:graphic>
           <a:graphicData uri="http://schemas.openxmlformats.org/drawingml/2006/table">
@@ -11546,16 +11450,16 @@
                 <a:gridCol w="5318607"/>
                 <a:gridCol w="5318608"/>
               </a:tblGrid>
-              <a:tr h="364489">
+              <a:tr h="468629">
                 <a:tc>
                   <a:txBody>
                     <a:bodyPr wrap="square"/>
                     <a:lstStyle/>
                     <a:p>
                       <a:r>
-                        <a:rPr sz="1400" b="1">
+                        <a:rPr sz="1800" b="1">
                           <a:solidFill>
-                            <a:srgbClr val="1B2533"/>
+                            <a:srgbClr val="111A24"/>
                           </a:solidFill>
                           <a:latin typeface="Arial"/>
                         </a:rPr>
@@ -11565,7 +11469,7 @@
                   </a:txBody>
                   <a:tcPr marL="118872" marR="118872" marT="36576" marB="36576" anchor="ctr">
                     <a:solidFill>
-                      <a:srgbClr val="E8F6FA"/>
+                      <a:srgbClr val="DDEFF6"/>
                     </a:solidFill>
                   </a:tcPr>
                 </a:tc>
@@ -11575,9 +11479,9 @@
                     <a:lstStyle/>
                     <a:p>
                       <a:r>
-                        <a:rPr sz="1400" b="1">
+                        <a:rPr sz="1800" b="1">
                           <a:solidFill>
-                            <a:srgbClr val="1B2533"/>
+                            <a:srgbClr val="111A24"/>
                           </a:solidFill>
                           <a:latin typeface="Arial"/>
                         </a:rPr>
@@ -11587,21 +11491,21 @@
                   </a:txBody>
                   <a:tcPr marL="118872" marR="118872" marT="36576" marB="36576" anchor="ctr">
                     <a:solidFill>
-                      <a:srgbClr val="E8F6FA"/>
+                      <a:srgbClr val="DDEFF6"/>
                     </a:solidFill>
                   </a:tcPr>
                 </a:tc>
               </a:tr>
-              <a:tr h="364489">
+              <a:tr h="468629">
                 <a:tc>
                   <a:txBody>
                     <a:bodyPr wrap="square"/>
                     <a:lstStyle/>
                     <a:p>
                       <a:r>
-                        <a:rPr sz="1400" b="1">
+                        <a:rPr sz="1800" b="1">
                           <a:solidFill>
-                            <a:srgbClr val="374451"/>
+                            <a:srgbClr val="212C38"/>
                           </a:solidFill>
                           <a:latin typeface="Arial"/>
                         </a:rPr>
@@ -11621,9 +11525,9 @@
                     <a:lstStyle/>
                     <a:p>
                       <a:r>
-                        <a:rPr sz="1400" b="0">
+                        <a:rPr sz="1800" b="0">
                           <a:solidFill>
-                            <a:srgbClr val="374451"/>
+                            <a:srgbClr val="212C38"/>
                           </a:solidFill>
                           <a:latin typeface="Arial"/>
                         </a:rPr>
@@ -11638,16 +11542,16 @@
                   </a:tcPr>
                 </a:tc>
               </a:tr>
-              <a:tr h="364489">
+              <a:tr h="468629">
                 <a:tc>
                   <a:txBody>
                     <a:bodyPr wrap="square"/>
                     <a:lstStyle/>
                     <a:p>
                       <a:r>
-                        <a:rPr sz="1400" b="1">
+                        <a:rPr sz="1800" b="1">
                           <a:solidFill>
-                            <a:srgbClr val="374451"/>
+                            <a:srgbClr val="212C38"/>
                           </a:solidFill>
                           <a:latin typeface="Arial"/>
                         </a:rPr>
@@ -11667,9 +11571,9 @@
                     <a:lstStyle/>
                     <a:p>
                       <a:r>
-                        <a:rPr sz="1400" b="0">
+                        <a:rPr sz="1800" b="0">
                           <a:solidFill>
-                            <a:srgbClr val="374451"/>
+                            <a:srgbClr val="212C38"/>
                           </a:solidFill>
                           <a:latin typeface="Arial"/>
                         </a:rPr>
@@ -11684,16 +11588,16 @@
                   </a:tcPr>
                 </a:tc>
               </a:tr>
-              <a:tr h="364489">
+              <a:tr h="468629">
                 <a:tc>
                   <a:txBody>
                     <a:bodyPr wrap="square"/>
                     <a:lstStyle/>
                     <a:p>
                       <a:r>
-                        <a:rPr sz="1400" b="1">
+                        <a:rPr sz="1800" b="1">
                           <a:solidFill>
-                            <a:srgbClr val="374451"/>
+                            <a:srgbClr val="212C38"/>
                           </a:solidFill>
                           <a:latin typeface="Arial"/>
                         </a:rPr>
@@ -11713,9 +11617,9 @@
                     <a:lstStyle/>
                     <a:p>
                       <a:r>
-                        <a:rPr sz="1400" b="0">
+                        <a:rPr sz="1800" b="0">
                           <a:solidFill>
-                            <a:srgbClr val="374451"/>
+                            <a:srgbClr val="212C38"/>
                           </a:solidFill>
                           <a:latin typeface="Arial"/>
                         </a:rPr>
@@ -11730,16 +11634,16 @@
                   </a:tcPr>
                 </a:tc>
               </a:tr>
-              <a:tr h="364489">
+              <a:tr h="468629">
                 <a:tc>
                   <a:txBody>
                     <a:bodyPr wrap="square"/>
                     <a:lstStyle/>
                     <a:p>
                       <a:r>
-                        <a:rPr sz="1400" b="1">
+                        <a:rPr sz="1800" b="1">
                           <a:solidFill>
-                            <a:srgbClr val="374451"/>
+                            <a:srgbClr val="212C38"/>
                           </a:solidFill>
                           <a:latin typeface="Arial"/>
                         </a:rPr>
@@ -11759,9 +11663,9 @@
                     <a:lstStyle/>
                     <a:p>
                       <a:r>
-                        <a:rPr sz="1400" b="0">
+                        <a:rPr sz="1800" b="0">
                           <a:solidFill>
-                            <a:srgbClr val="374451"/>
+                            <a:srgbClr val="212C38"/>
                           </a:solidFill>
                           <a:latin typeface="Arial"/>
                         </a:rPr>
@@ -11804,9 +11708,9 @@
           <a:p>
             <a:pPr algn="r"/>
             <a:r>
-              <a:rPr sz="1100">
-                <a:solidFill>
-                  <a:srgbClr val="6B7784"/>
+              <a:rPr sz="1200">
+                <a:solidFill>
+                  <a:srgbClr val="626E7B"/>
                 </a:solidFill>
                 <a:latin typeface="Arial"/>
               </a:rPr>
@@ -11856,7 +11760,7 @@
             <a:avLst/>
           </a:prstGeom>
           <a:solidFill>
-            <a:srgbClr val="00ADD8"/>
+            <a:srgbClr val="008CB0"/>
           </a:solidFill>
           <a:ln>
             <a:noFill/>
@@ -11908,9 +11812,9 @@
           <a:lstStyle/>
           <a:p>
             <a:r>
-              <a:rPr sz="4200" b="1">
-                <a:solidFill>
-                  <a:srgbClr val="1B2533"/>
+              <a:rPr sz="4600" b="1">
+                <a:solidFill>
+                  <a:srgbClr val="111A24"/>
                 </a:solidFill>
                 <a:latin typeface="Arial"/>
               </a:rPr>
@@ -11942,11 +11846,11 @@
           <a:lstStyle/>
           <a:p>
             <a:r>
-              <a:rPr sz="1980" b="1">
-                <a:solidFill>
-                  <a:srgbClr val="00ADD8"/>
-                </a:solidFill>
-                <a:latin typeface="Courier New"/>
+              <a:rPr sz="2340" b="1">
+                <a:solidFill>
+                  <a:srgbClr val="008CB0"/>
+                </a:solidFill>
+                <a:latin typeface="JetBrains Mono"/>
               </a:rPr>
               <a:t>github.com/shariski/go-migration</a:t>
             </a:r>
@@ -11962,7 +11866,7 @@
         <p:spPr>
           <a:xfrm>
             <a:off x="777240" y="3310128"/>
-            <a:ext cx="10637215" cy="1461008"/>
+            <a:ext cx="10637215" cy="1762760"/>
           </a:xfrm>
           <a:prstGeom prst="roundRect">
             <a:avLst>
@@ -11970,11 +11874,11 @@
             </a:avLst>
           </a:prstGeom>
           <a:solidFill>
-            <a:srgbClr val="F3F6F8"/>
+            <a:srgbClr val="ECF2F6"/>
           </a:solidFill>
           <a:ln w="9525">
             <a:solidFill>
-              <a:srgbClr val="DDE3E8"/>
+              <a:srgbClr val="C9D4DC"/>
             </a:solidFill>
           </a:ln>
           <a:effectLst/>
@@ -12003,11 +11907,11 @@
               </a:lnSpc>
             </a:pPr>
             <a:r>
-              <a:rPr sz="1200">
-                <a:solidFill>
-                  <a:srgbClr val="1B2733"/>
-                </a:solidFill>
-                <a:latin typeface="Courier New"/>
+              <a:rPr sz="1500">
+                <a:solidFill>
+                  <a:srgbClr val="0E1A26"/>
+                </a:solidFill>
+                <a:latin typeface="JetBrains Mono"/>
               </a:rPr>
               <a:t>make up</a:t>
             </a:r>
@@ -12019,11 +11923,11 @@
               </a:lnSpc>
             </a:pPr>
             <a:r>
-              <a:rPr sz="1200">
-                <a:solidFill>
-                  <a:srgbClr val="1B2733"/>
-                </a:solidFill>
-                <a:latin typeface="Courier New"/>
+              <a:rPr sz="1500">
+                <a:solidFill>
+                  <a:srgbClr val="0E1A26"/>
+                </a:solidFill>
+                <a:latin typeface="JetBrains Mono"/>
               </a:rPr>
               <a:t>make demo-gorm        # AutoMigrate nggak drop kolom</a:t>
             </a:r>
@@ -12035,11 +11939,11 @@
               </a:lnSpc>
             </a:pPr>
             <a:r>
-              <a:rPr sz="1200">
-                <a:solidFill>
-                  <a:srgbClr val="1B2733"/>
-                </a:solidFill>
-                <a:latin typeface="Courier New"/>
+              <a:rPr sz="1500">
+                <a:solidFill>
+                  <a:srgbClr val="0E1A26"/>
+                </a:solidFill>
+                <a:latin typeface="JetBrains Mono"/>
               </a:rPr>
               <a:t>make demo-migrate     # isi tabel schema_migrations</a:t>
             </a:r>
@@ -12051,11 +11955,11 @@
               </a:lnSpc>
             </a:pPr>
             <a:r>
-              <a:rPr sz="1200">
-                <a:solidFill>
-                  <a:srgbClr val="1B2733"/>
-                </a:solidFill>
-                <a:latin typeface="Courier New"/>
+              <a:rPr sz="1500">
+                <a:solidFill>
+                  <a:srgbClr val="0E1A26"/>
+                </a:solidFill>
+                <a:latin typeface="JetBrains Mono"/>
               </a:rPr>
               <a:t>make demo-rollback    # batasan down migration</a:t>
             </a:r>
@@ -12067,11 +11971,11 @@
               </a:lnSpc>
             </a:pPr>
             <a:r>
-              <a:rPr sz="1200">
-                <a:solidFill>
-                  <a:srgbClr val="1B2733"/>
-                </a:solidFill>
-                <a:latin typeface="Courier New"/>
+              <a:rPr sz="1500">
+                <a:solidFill>
+                  <a:srgbClr val="0E1A26"/>
+                </a:solidFill>
+                <a:latin typeface="JetBrains Mono"/>
               </a:rPr>
               <a:t>make demo-dirty       # migration gagal di tengah</a:t>
             </a:r>
@@ -12083,11 +11987,11 @@
               </a:lnSpc>
             </a:pPr>
             <a:r>
-              <a:rPr sz="1200">
-                <a:solidFill>
-                  <a:srgbClr val="1B2733"/>
-                </a:solidFill>
-                <a:latin typeface="Courier New"/>
+              <a:rPr sz="1500">
+                <a:solidFill>
+                  <a:srgbClr val="0E1A26"/>
+                </a:solidFill>
+                <a:latin typeface="JetBrains Mono"/>
               </a:rPr>
               <a:t>make demo-mini        # migration runner sederhana</a:t>
             </a:r>
@@ -12102,7 +12006,7 @@
         </p:nvSpPr>
         <p:spPr>
           <a:xfrm>
-            <a:off x="777240" y="4954016"/>
+            <a:off x="777240" y="5255768"/>
             <a:ext cx="10637215" cy="384048"/>
           </a:xfrm>
           <a:prstGeom prst="rect">
@@ -12117,18 +12021,18 @@
           <a:lstStyle/>
           <a:p>
             <a:r>
-              <a:rPr sz="1700" b="1">
-                <a:solidFill>
-                  <a:srgbClr val="374451"/>
+              <a:rPr sz="2000" b="1">
+                <a:solidFill>
+                  <a:srgbClr val="212C38"/>
                 </a:solidFill>
                 <a:latin typeface="Arial"/>
               </a:rPr>
               <a:t>Falahudin Halim Shariski</a:t>
             </a:r>
             <a:r>
-              <a:rPr sz="1700" b="0">
-                <a:solidFill>
-                  <a:srgbClr val="374451"/>
+              <a:rPr sz="2000" b="0">
+                <a:solidFill>
+                  <a:srgbClr val="212C38"/>
                 </a:solidFill>
                 <a:latin typeface="Arial"/>
               </a:rPr>
@@ -12186,9 +12090,9 @@
           <a:lstStyle/>
           <a:p>
             <a:r>
-              <a:rPr sz="2900" b="1">
-                <a:solidFill>
-                  <a:srgbClr val="1B2533"/>
+              <a:rPr sz="3300" b="1">
+                <a:solidFill>
+                  <a:srgbClr val="111A24"/>
                 </a:solidFill>
                 <a:latin typeface="Arial"/>
               </a:rPr>
@@ -12212,7 +12116,7 @@
             <a:avLst/>
           </a:prstGeom>
           <a:solidFill>
-            <a:srgbClr val="00ADD8"/>
+            <a:srgbClr val="008CB0"/>
           </a:solidFill>
           <a:ln>
             <a:noFill/>
@@ -12249,8 +12153,8 @@
         </p:nvSpPr>
         <p:spPr>
           <a:xfrm>
-            <a:off x="777240" y="1700784"/>
-            <a:ext cx="10637215" cy="280670"/>
+            <a:off x="777240" y="1664207"/>
+            <a:ext cx="10637215" cy="346710"/>
           </a:xfrm>
           <a:prstGeom prst="rect">
             <a:avLst/>
@@ -12269,9 +12173,9 @@
               </a:lnSpc>
             </a:pPr>
             <a:r>
-              <a:rPr sz="1700" b="1">
-                <a:solidFill>
-                  <a:srgbClr val="1B2533"/>
+              <a:rPr sz="2100" b="1">
+                <a:solidFill>
+                  <a:srgbClr val="111A24"/>
                 </a:solidFill>
                 <a:latin typeface="Arial"/>
               </a:rPr>
@@ -12288,8 +12192,8 @@
         </p:nvSpPr>
         <p:spPr>
           <a:xfrm>
-            <a:off x="777240" y="2008885"/>
-            <a:ext cx="10637215" cy="842010"/>
+            <a:off x="777240" y="2038349"/>
+            <a:ext cx="10637215" cy="1386840"/>
           </a:xfrm>
           <a:prstGeom prst="rect">
             <a:avLst/>
@@ -12308,90 +12212,90 @@
               </a:lnSpc>
             </a:pPr>
             <a:r>
-              <a:rPr sz="1530" b="0">
-                <a:solidFill>
-                  <a:srgbClr val="374451"/>
-                </a:solidFill>
-                <a:latin typeface="Courier New"/>
+              <a:rPr sz="1890" b="0">
+                <a:solidFill>
+                  <a:srgbClr val="212C38"/>
+                </a:solidFill>
+                <a:latin typeface="JetBrains Mono"/>
               </a:rPr>
               <a:t>ADD COLUMN</a:t>
             </a:r>
             <a:r>
-              <a:rPr sz="1700" b="0">
-                <a:solidFill>
-                  <a:srgbClr val="374451"/>
+              <a:rPr sz="2100" b="0">
+                <a:solidFill>
+                  <a:srgbClr val="212C38"/>
                 </a:solidFill>
                 <a:latin typeface="Arial"/>
               </a:rPr>
               <a:t> nullable atau dengan </a:t>
             </a:r>
             <a:r>
-              <a:rPr sz="1530" b="0">
-                <a:solidFill>
-                  <a:srgbClr val="374451"/>
-                </a:solidFill>
-                <a:latin typeface="Courier New"/>
+              <a:rPr sz="1890" b="0">
+                <a:solidFill>
+                  <a:srgbClr val="212C38"/>
+                </a:solidFill>
+                <a:latin typeface="JetBrains Mono"/>
               </a:rPr>
               <a:t>DEFAULT</a:t>
             </a:r>
             <a:r>
-              <a:rPr sz="1700" b="0">
-                <a:solidFill>
-                  <a:srgbClr val="374451"/>
+              <a:rPr sz="2100" b="0">
+                <a:solidFill>
+                  <a:srgbClr val="212C38"/>
                 </a:solidFill>
                 <a:latin typeface="Arial"/>
               </a:rPr>
               <a:t> nilai tetap di Postgres 11+ cepat, cuma mengubah metadata. Yang lama: bikin index tanpa </a:t>
             </a:r>
             <a:r>
-              <a:rPr sz="1530" b="0">
-                <a:solidFill>
-                  <a:srgbClr val="374451"/>
-                </a:solidFill>
-                <a:latin typeface="Courier New"/>
+              <a:rPr sz="1890" b="0">
+                <a:solidFill>
+                  <a:srgbClr val="212C38"/>
+                </a:solidFill>
+                <a:latin typeface="JetBrains Mono"/>
               </a:rPr>
               <a:t>CONCURRENTLY</a:t>
             </a:r>
             <a:r>
-              <a:rPr sz="1700" b="0">
-                <a:solidFill>
-                  <a:srgbClr val="374451"/>
+              <a:rPr sz="2100" b="0">
+                <a:solidFill>
+                  <a:srgbClr val="212C38"/>
                 </a:solidFill>
                 <a:latin typeface="Arial"/>
               </a:rPr>
               <a:t> dan ubah tipe kolom, karena tabelnya ditulis ulang. </a:t>
             </a:r>
             <a:r>
-              <a:rPr sz="1530" b="0">
-                <a:solidFill>
-                  <a:srgbClr val="374451"/>
-                </a:solidFill>
-                <a:latin typeface="Courier New"/>
+              <a:rPr sz="1890" b="0">
+                <a:solidFill>
+                  <a:srgbClr val="212C38"/>
+                </a:solidFill>
+                <a:latin typeface="JetBrains Mono"/>
               </a:rPr>
               <a:t>ADD COLUMN NOT NULL</a:t>
             </a:r>
             <a:r>
-              <a:rPr sz="1700" b="0">
-                <a:solidFill>
-                  <a:srgbClr val="374451"/>
+              <a:rPr sz="2100" b="0">
+                <a:solidFill>
+                  <a:srgbClr val="212C38"/>
                 </a:solidFill>
                 <a:latin typeface="Arial"/>
               </a:rPr>
               <a:t> tanpa </a:t>
             </a:r>
             <a:r>
-              <a:rPr sz="1530" b="0">
-                <a:solidFill>
-                  <a:srgbClr val="374451"/>
-                </a:solidFill>
-                <a:latin typeface="Courier New"/>
+              <a:rPr sz="1890" b="0">
+                <a:solidFill>
+                  <a:srgbClr val="212C38"/>
+                </a:solidFill>
+                <a:latin typeface="JetBrains Mono"/>
               </a:rPr>
               <a:t>DEFAULT</a:t>
             </a:r>
             <a:r>
-              <a:rPr sz="1700" b="0">
-                <a:solidFill>
-                  <a:srgbClr val="374451"/>
+              <a:rPr sz="2100" b="0">
+                <a:solidFill>
+                  <a:srgbClr val="212C38"/>
                 </a:solidFill>
                 <a:latin typeface="Arial"/>
               </a:rPr>
@@ -12408,8 +12312,8 @@
         </p:nvSpPr>
         <p:spPr>
           <a:xfrm>
-            <a:off x="777240" y="3134360"/>
-            <a:ext cx="10637215" cy="280670"/>
+            <a:off x="777240" y="3708654"/>
+            <a:ext cx="10637215" cy="346710"/>
           </a:xfrm>
           <a:prstGeom prst="rect">
             <a:avLst/>
@@ -12428,9 +12332,9 @@
               </a:lnSpc>
             </a:pPr>
             <a:r>
-              <a:rPr sz="1700" b="1">
-                <a:solidFill>
-                  <a:srgbClr val="1B2533"/>
+              <a:rPr sz="2100" b="1">
+                <a:solidFill>
+                  <a:srgbClr val="111A24"/>
                 </a:solidFill>
                 <a:latin typeface="Arial"/>
               </a:rPr>
@@ -12447,8 +12351,8 @@
         </p:nvSpPr>
         <p:spPr>
           <a:xfrm>
-            <a:off x="777240" y="3442461"/>
-            <a:ext cx="10637215" cy="561340"/>
+            <a:off x="777240" y="4082796"/>
+            <a:ext cx="10637215" cy="693420"/>
           </a:xfrm>
           <a:prstGeom prst="rect">
             <a:avLst/>
@@ -12467,27 +12371,27 @@
               </a:lnSpc>
             </a:pPr>
             <a:r>
-              <a:rPr sz="1700" b="0">
-                <a:solidFill>
-                  <a:srgbClr val="374451"/>
+              <a:rPr sz="2100" b="0">
+                <a:solidFill>
+                  <a:srgbClr val="212C38"/>
                 </a:solidFill>
                 <a:latin typeface="Arial"/>
               </a:rPr>
               <a:t>Lebih aman sebagai step terpisah sebelum deploy. Kalau dipanggil di </a:t>
             </a:r>
             <a:r>
-              <a:rPr sz="1530" b="0">
-                <a:solidFill>
-                  <a:srgbClr val="374451"/>
-                </a:solidFill>
-                <a:latin typeface="Courier New"/>
+              <a:rPr sz="1890" b="0">
+                <a:solidFill>
+                  <a:srgbClr val="212C38"/>
+                </a:solidFill>
+                <a:latin typeface="JetBrains Mono"/>
               </a:rPr>
               <a:t>main()</a:t>
             </a:r>
             <a:r>
-              <a:rPr sz="1700" b="0">
-                <a:solidFill>
-                  <a:srgbClr val="374451"/>
+              <a:rPr sz="2100" b="0">
+                <a:solidFill>
+                  <a:srgbClr val="212C38"/>
                 </a:solidFill>
                 <a:latin typeface="Arial"/>
               </a:rPr>
@@ -12504,8 +12408,8 @@
         </p:nvSpPr>
         <p:spPr>
           <a:xfrm>
-            <a:off x="777240" y="4287265"/>
-            <a:ext cx="10637215" cy="280670"/>
+            <a:off x="777240" y="5059679"/>
+            <a:ext cx="10637215" cy="346710"/>
           </a:xfrm>
           <a:prstGeom prst="rect">
             <a:avLst/>
@@ -12524,9 +12428,9 @@
               </a:lnSpc>
             </a:pPr>
             <a:r>
-              <a:rPr sz="1700" b="1">
-                <a:solidFill>
-                  <a:srgbClr val="1B2533"/>
+              <a:rPr sz="2100" b="1">
+                <a:solidFill>
+                  <a:srgbClr val="111A24"/>
                 </a:solidFill>
                 <a:latin typeface="Arial"/>
               </a:rPr>
@@ -12543,8 +12447,8 @@
         </p:nvSpPr>
         <p:spPr>
           <a:xfrm>
-            <a:off x="777240" y="4595368"/>
-            <a:ext cx="10637215" cy="280670"/>
+            <a:off x="777240" y="5433821"/>
+            <a:ext cx="10637215" cy="346710"/>
           </a:xfrm>
           <a:prstGeom prst="rect">
             <a:avLst/>
@@ -12563,27 +12467,27 @@
               </a:lnSpc>
             </a:pPr>
             <a:r>
-              <a:rPr sz="1700" b="0">
-                <a:solidFill>
-                  <a:srgbClr val="374451"/>
+              <a:rPr sz="2100" b="0">
+                <a:solidFill>
+                  <a:srgbClr val="212C38"/>
                 </a:solidFill>
                 <a:latin typeface="Arial"/>
               </a:rPr>
               <a:t>Dump schema yang sudah ada jadi </a:t>
             </a:r>
             <a:r>
-              <a:rPr sz="1530" b="0">
-                <a:solidFill>
-                  <a:srgbClr val="374451"/>
-                </a:solidFill>
-                <a:latin typeface="Courier New"/>
+              <a:rPr sz="1890" b="0">
+                <a:solidFill>
+                  <a:srgbClr val="212C38"/>
+                </a:solidFill>
+                <a:latin typeface="JetBrains Mono"/>
               </a:rPr>
               <a:t>000001_init.up.sql</a:t>
             </a:r>
             <a:r>
-              <a:rPr sz="1700" b="0">
-                <a:solidFill>
-                  <a:srgbClr val="374451"/>
+              <a:rPr sz="2100" b="0">
+                <a:solidFill>
+                  <a:srgbClr val="212C38"/>
                 </a:solidFill>
                 <a:latin typeface="Arial"/>
               </a:rPr>
@@ -12616,9 +12520,9 @@
           <a:p>
             <a:pPr algn="r"/>
             <a:r>
-              <a:rPr sz="1100">
-                <a:solidFill>
-                  <a:srgbClr val="6B7784"/>
+              <a:rPr sz="1200">
+                <a:solidFill>
+                  <a:srgbClr val="626E7B"/>
                 </a:solidFill>
                 <a:latin typeface="Arial"/>
               </a:rPr>
@@ -12676,9 +12580,9 @@
           <a:lstStyle/>
           <a:p>
             <a:r>
-              <a:rPr sz="2900" b="1">
-                <a:solidFill>
-                  <a:srgbClr val="1B2533"/>
+              <a:rPr sz="3300" b="1">
+                <a:solidFill>
+                  <a:srgbClr val="111A24"/>
                 </a:solidFill>
                 <a:latin typeface="Arial"/>
               </a:rPr>
@@ -12702,7 +12606,7 @@
             <a:avLst/>
           </a:prstGeom>
           <a:solidFill>
-            <a:srgbClr val="00ADD8"/>
+            <a:srgbClr val="008CB0"/>
           </a:solidFill>
           <a:ln>
             <a:noFill/>
@@ -12739,8 +12643,8 @@
         </p:nvSpPr>
         <p:spPr>
           <a:xfrm>
-            <a:off x="777240" y="1700784"/>
-            <a:ext cx="10637215" cy="280670"/>
+            <a:off x="777240" y="1664207"/>
+            <a:ext cx="10637215" cy="346710"/>
           </a:xfrm>
           <a:prstGeom prst="rect">
             <a:avLst/>
@@ -12759,9 +12663,9 @@
               </a:lnSpc>
             </a:pPr>
             <a:r>
-              <a:rPr sz="1700" b="1">
-                <a:solidFill>
-                  <a:srgbClr val="1B2533"/>
+              <a:rPr sz="2100" b="1">
+                <a:solidFill>
+                  <a:srgbClr val="111A24"/>
                 </a:solidFill>
                 <a:latin typeface="Arial"/>
               </a:rPr>
@@ -12778,8 +12682,8 @@
         </p:nvSpPr>
         <p:spPr>
           <a:xfrm>
-            <a:off x="777240" y="2008885"/>
-            <a:ext cx="10637215" cy="561340"/>
+            <a:off x="777240" y="2038349"/>
+            <a:ext cx="10637215" cy="693420"/>
           </a:xfrm>
           <a:prstGeom prst="rect">
             <a:avLst/>
@@ -12798,9 +12702,9 @@
               </a:lnSpc>
             </a:pPr>
             <a:r>
-              <a:rPr sz="1700" b="0">
-                <a:solidFill>
-                  <a:srgbClr val="374451"/>
+              <a:rPr sz="2100" b="0">
+                <a:solidFill>
+                  <a:srgbClr val="212C38"/>
                 </a:solidFill>
                 <a:latin typeface="Arial"/>
               </a:rPr>
@@ -12817,8 +12721,8 @@
         </p:nvSpPr>
         <p:spPr>
           <a:xfrm>
-            <a:off x="777240" y="2853690"/>
-            <a:ext cx="10637215" cy="280670"/>
+            <a:off x="777240" y="3015234"/>
+            <a:ext cx="10637215" cy="346710"/>
           </a:xfrm>
           <a:prstGeom prst="rect">
             <a:avLst/>
@@ -12837,9 +12741,9 @@
               </a:lnSpc>
             </a:pPr>
             <a:r>
-              <a:rPr sz="1700" b="1">
-                <a:solidFill>
-                  <a:srgbClr val="1B2533"/>
+              <a:rPr sz="2100" b="1">
+                <a:solidFill>
+                  <a:srgbClr val="111A24"/>
                 </a:solidFill>
                 <a:latin typeface="Arial"/>
               </a:rPr>
@@ -12856,8 +12760,8 @@
         </p:nvSpPr>
         <p:spPr>
           <a:xfrm>
-            <a:off x="777240" y="3161791"/>
-            <a:ext cx="10637215" cy="561340"/>
+            <a:off x="777240" y="3389376"/>
+            <a:ext cx="10637215" cy="693420"/>
           </a:xfrm>
           <a:prstGeom prst="rect">
             <a:avLst/>
@@ -12876,9 +12780,9 @@
               </a:lnSpc>
             </a:pPr>
             <a:r>
-              <a:rPr sz="1700" b="0">
-                <a:solidFill>
-                  <a:srgbClr val="374451"/>
+              <a:rPr sz="2100" b="0">
+                <a:solidFill>
+                  <a:srgbClr val="212C38"/>
                 </a:solidFill>
                 <a:latin typeface="Arial"/>
               </a:rPr>
@@ -12911,9 +12815,9 @@
           <a:p>
             <a:pPr algn="r"/>
             <a:r>
-              <a:rPr sz="1100">
-                <a:solidFill>
-                  <a:srgbClr val="6B7784"/>
+              <a:rPr sz="1200">
+                <a:solidFill>
+                  <a:srgbClr val="626E7B"/>
                 </a:solidFill>
                 <a:latin typeface="Arial"/>
               </a:rPr>
@@ -12971,9 +12875,9 @@
           <a:lstStyle/>
           <a:p>
             <a:r>
-              <a:rPr sz="2900" b="1">
-                <a:solidFill>
-                  <a:srgbClr val="1B2533"/>
+              <a:rPr sz="3300" b="1">
+                <a:solidFill>
+                  <a:srgbClr val="111A24"/>
                 </a:solidFill>
                 <a:latin typeface="Arial"/>
               </a:rPr>
@@ -12997,7 +12901,7 @@
             <a:avLst/>
           </a:prstGeom>
           <a:solidFill>
-            <a:srgbClr val="00ADD8"/>
+            <a:srgbClr val="008CB0"/>
           </a:solidFill>
           <a:ln>
             <a:noFill/>
@@ -13034,8 +12938,8 @@
         </p:nvSpPr>
         <p:spPr>
           <a:xfrm>
-            <a:off x="777240" y="1572768"/>
-            <a:ext cx="10637215" cy="280670"/>
+            <a:off x="777240" y="1536192"/>
+            <a:ext cx="10637215" cy="346710"/>
           </a:xfrm>
           <a:prstGeom prst="rect">
             <a:avLst/>
@@ -13054,9 +12958,9 @@
               </a:lnSpc>
             </a:pPr>
             <a:r>
-              <a:rPr sz="1700" b="0">
-                <a:solidFill>
-                  <a:srgbClr val="374451"/>
+              <a:rPr sz="2100" b="0">
+                <a:solidFill>
+                  <a:srgbClr val="212C38"/>
                 </a:solidFill>
                 <a:latin typeface="Arial"/>
               </a:rPr>
@@ -13073,8 +12977,8 @@
         </p:nvSpPr>
         <p:spPr>
           <a:xfrm>
-            <a:off x="777240" y="2008885"/>
-            <a:ext cx="10637215" cy="561340"/>
+            <a:off x="777240" y="2038349"/>
+            <a:ext cx="10637215" cy="693420"/>
           </a:xfrm>
           <a:prstGeom prst="rect">
             <a:avLst/>
@@ -13093,9 +12997,9 @@
               </a:lnSpc>
             </a:pPr>
             <a:r>
-              <a:rPr sz="1700" b="0">
-                <a:solidFill>
-                  <a:srgbClr val="374451"/>
+              <a:rPr sz="2100" b="0">
+                <a:solidFill>
+                  <a:srgbClr val="212C38"/>
                 </a:solidFill>
                 <a:latin typeface="Arial"/>
               </a:rPr>
@@ -13128,9 +13032,9 @@
           <a:p>
             <a:pPr algn="r"/>
             <a:r>
-              <a:rPr sz="1100">
-                <a:solidFill>
-                  <a:srgbClr val="6B7784"/>
+              <a:rPr sz="1200">
+                <a:solidFill>
+                  <a:srgbClr val="626E7B"/>
                 </a:solidFill>
                 <a:latin typeface="Arial"/>
               </a:rPr>
@@ -13188,9 +13092,9 @@
           <a:lstStyle/>
           <a:p>
             <a:r>
-              <a:rPr sz="2900" b="1">
-                <a:solidFill>
-                  <a:srgbClr val="1B2533"/>
+              <a:rPr sz="3300" b="1">
+                <a:solidFill>
+                  <a:srgbClr val="111A24"/>
                 </a:solidFill>
                 <a:latin typeface="Arial"/>
               </a:rPr>
@@ -13214,7 +13118,7 @@
             <a:avLst/>
           </a:prstGeom>
           <a:solidFill>
-            <a:srgbClr val="00ADD8"/>
+            <a:srgbClr val="008CB0"/>
           </a:solidFill>
           <a:ln>
             <a:noFill/>
@@ -13251,8 +13155,8 @@
         </p:nvSpPr>
         <p:spPr>
           <a:xfrm>
-            <a:off x="777240" y="1572768"/>
-            <a:ext cx="10637215" cy="280670"/>
+            <a:off x="777240" y="1536192"/>
+            <a:ext cx="10637215" cy="346710"/>
           </a:xfrm>
           <a:prstGeom prst="rect">
             <a:avLst/>
@@ -13271,18 +13175,18 @@
               </a:lnSpc>
             </a:pPr>
             <a:r>
-              <a:rPr sz="1700" b="1">
-                <a:solidFill>
-                  <a:srgbClr val="374451"/>
+              <a:rPr sz="2100" b="1">
+                <a:solidFill>
+                  <a:srgbClr val="212C38"/>
                 </a:solidFill>
                 <a:latin typeface="Arial"/>
               </a:rPr>
               <a:t>Reproducible</a:t>
             </a:r>
             <a:r>
-              <a:rPr sz="1700" b="0">
-                <a:solidFill>
-                  <a:srgbClr val="374451"/>
+              <a:rPr sz="2100" b="0">
+                <a:solidFill>
+                  <a:srgbClr val="212C38"/>
                 </a:solidFill>
                 <a:latin typeface="Arial"/>
               </a:rPr>
@@ -13299,8 +13203,8 @@
         </p:nvSpPr>
         <p:spPr>
           <a:xfrm>
-            <a:off x="777240" y="2008885"/>
-            <a:ext cx="10637215" cy="280670"/>
+            <a:off x="777240" y="2038349"/>
+            <a:ext cx="10637215" cy="346710"/>
           </a:xfrm>
           <a:prstGeom prst="rect">
             <a:avLst/>
@@ -13319,18 +13223,18 @@
               </a:lnSpc>
             </a:pPr>
             <a:r>
-              <a:rPr sz="1700" b="1">
-                <a:solidFill>
-                  <a:srgbClr val="374451"/>
+              <a:rPr sz="2100" b="1">
+                <a:solidFill>
+                  <a:srgbClr val="212C38"/>
                 </a:solidFill>
                 <a:latin typeface="Arial"/>
               </a:rPr>
               <a:t>Kolaborasi</a:t>
             </a:r>
             <a:r>
-              <a:rPr sz="1700" b="0">
-                <a:solidFill>
-                  <a:srgbClr val="374451"/>
+              <a:rPr sz="2100" b="0">
+                <a:solidFill>
+                  <a:srgbClr val="212C38"/>
                 </a:solidFill>
                 <a:latin typeface="Arial"/>
               </a:rPr>
@@ -13347,8 +13251,8 @@
         </p:nvSpPr>
         <p:spPr>
           <a:xfrm>
-            <a:off x="777240" y="2445003"/>
-            <a:ext cx="10637215" cy="280670"/>
+            <a:off x="777240" y="2540508"/>
+            <a:ext cx="10637215" cy="346710"/>
           </a:xfrm>
           <a:prstGeom prst="rect">
             <a:avLst/>
@@ -13367,18 +13271,18 @@
               </a:lnSpc>
             </a:pPr>
             <a:r>
-              <a:rPr sz="1700" b="1">
-                <a:solidFill>
-                  <a:srgbClr val="374451"/>
+              <a:rPr sz="2100" b="1">
+                <a:solidFill>
+                  <a:srgbClr val="212C38"/>
                 </a:solidFill>
                 <a:latin typeface="Arial"/>
               </a:rPr>
               <a:t>Otomatis</a:t>
             </a:r>
             <a:r>
-              <a:rPr sz="1700" b="0">
-                <a:solidFill>
-                  <a:srgbClr val="374451"/>
+              <a:rPr sz="2100" b="0">
+                <a:solidFill>
+                  <a:srgbClr val="212C38"/>
                 </a:solidFill>
                 <a:latin typeface="Arial"/>
               </a:rPr>
@@ -13395,8 +13299,8 @@
         </p:nvSpPr>
         <p:spPr>
           <a:xfrm>
-            <a:off x="777240" y="2881121"/>
-            <a:ext cx="10637215" cy="280670"/>
+            <a:off x="777240" y="3042665"/>
+            <a:ext cx="10637215" cy="346710"/>
           </a:xfrm>
           <a:prstGeom prst="rect">
             <a:avLst/>
@@ -13415,18 +13319,18 @@
               </a:lnSpc>
             </a:pPr>
             <a:r>
-              <a:rPr sz="1700" b="1">
-                <a:solidFill>
-                  <a:srgbClr val="374451"/>
+              <a:rPr sz="2100" b="1">
+                <a:solidFill>
+                  <a:srgbClr val="212C38"/>
                 </a:solidFill>
                 <a:latin typeface="Arial"/>
               </a:rPr>
               <a:t>Jejak perubahan</a:t>
             </a:r>
             <a:r>
-              <a:rPr sz="1700" b="0">
-                <a:solidFill>
-                  <a:srgbClr val="374451"/>
+              <a:rPr sz="2100" b="0">
+                <a:solidFill>
+                  <a:srgbClr val="212C38"/>
                 </a:solidFill>
                 <a:latin typeface="Arial"/>
               </a:rPr>
@@ -13459,9 +13363,9 @@
           <a:p>
             <a:pPr algn="r"/>
             <a:r>
-              <a:rPr sz="1100">
-                <a:solidFill>
-                  <a:srgbClr val="6B7784"/>
+              <a:rPr sz="1200">
+                <a:solidFill>
+                  <a:srgbClr val="626E7B"/>
                 </a:solidFill>
                 <a:latin typeface="Arial"/>
               </a:rPr>
@@ -13519,9 +13423,9 @@
           <a:lstStyle/>
           <a:p>
             <a:r>
-              <a:rPr sz="2900" b="1">
-                <a:solidFill>
-                  <a:srgbClr val="1B2533"/>
+              <a:rPr sz="3300" b="1">
+                <a:solidFill>
+                  <a:srgbClr val="111A24"/>
                 </a:solidFill>
                 <a:latin typeface="Arial"/>
               </a:rPr>
@@ -13545,7 +13449,7 @@
             <a:avLst/>
           </a:prstGeom>
           <a:solidFill>
-            <a:srgbClr val="00ADD8"/>
+            <a:srgbClr val="008CB0"/>
           </a:solidFill>
           <a:ln>
             <a:noFill/>
@@ -13582,8 +13486,8 @@
         </p:nvSpPr>
         <p:spPr>
           <a:xfrm>
-            <a:off x="777240" y="1572768"/>
-            <a:ext cx="10637215" cy="280670"/>
+            <a:off x="777240" y="1536192"/>
+            <a:ext cx="10637215" cy="346710"/>
           </a:xfrm>
           <a:prstGeom prst="rect">
             <a:avLst/>
@@ -13602,9 +13506,9 @@
               </a:lnSpc>
             </a:pPr>
             <a:r>
-              <a:rPr sz="1700" b="0">
-                <a:solidFill>
-                  <a:srgbClr val="374451"/>
+              <a:rPr sz="2100" b="0">
+                <a:solidFill>
+                  <a:srgbClr val="212C38"/>
                 </a:solidFill>
                 <a:latin typeface="Arial"/>
               </a:rPr>
@@ -13621,8 +13525,8 @@
         </p:nvSpPr>
         <p:spPr>
           <a:xfrm>
-            <a:off x="777240" y="2008885"/>
-            <a:ext cx="10637215" cy="1343660"/>
+            <a:off x="777240" y="2038349"/>
+            <a:ext cx="10637215" cy="1678940"/>
           </a:xfrm>
           <a:prstGeom prst="roundRect">
             <a:avLst>
@@ -13630,11 +13534,11 @@
             </a:avLst>
           </a:prstGeom>
           <a:solidFill>
-            <a:srgbClr val="F3F6F8"/>
+            <a:srgbClr val="ECF2F6"/>
           </a:solidFill>
           <a:ln w="9525">
             <a:solidFill>
-              <a:srgbClr val="DDE3E8"/>
+              <a:srgbClr val="C9D4DC"/>
             </a:solidFill>
           </a:ln>
           <a:effectLst/>
@@ -13663,11 +13567,11 @@
               </a:lnSpc>
             </a:pPr>
             <a:r>
-              <a:rPr sz="1300">
-                <a:solidFill>
-                  <a:srgbClr val="1B2733"/>
-                </a:solidFill>
-                <a:latin typeface="Courier New"/>
+              <a:rPr sz="1700">
+                <a:solidFill>
+                  <a:srgbClr val="0E1A26"/>
+                </a:solidFill>
+                <a:latin typeface="JetBrains Mono"/>
               </a:rPr>
               <a:t>migrations/</a:t>
             </a:r>
@@ -13679,11 +13583,11 @@
               </a:lnSpc>
             </a:pPr>
             <a:r>
-              <a:rPr sz="1300">
-                <a:solidFill>
-                  <a:srgbClr val="1B2733"/>
-                </a:solidFill>
-                <a:latin typeface="Courier New"/>
+              <a:rPr sz="1700">
+                <a:solidFill>
+                  <a:srgbClr val="0E1A26"/>
+                </a:solidFill>
+                <a:latin typeface="JetBrains Mono"/>
               </a:rPr>
               <a:t>  create_users.sql</a:t>
             </a:r>
@@ -13695,11 +13599,11 @@
               </a:lnSpc>
             </a:pPr>
             <a:r>
-              <a:rPr sz="1300">
-                <a:solidFill>
-                  <a:srgbClr val="1B2733"/>
-                </a:solidFill>
-                <a:latin typeface="Courier New"/>
+              <a:rPr sz="1700">
+                <a:solidFill>
+                  <a:srgbClr val="0E1A26"/>
+                </a:solidFill>
+                <a:latin typeface="JetBrains Mono"/>
               </a:rPr>
               <a:t>  add_phone.sql</a:t>
             </a:r>
@@ -13711,11 +13615,11 @@
               </a:lnSpc>
             </a:pPr>
             <a:r>
-              <a:rPr sz="1300">
-                <a:solidFill>
-                  <a:srgbClr val="1B2733"/>
-                </a:solidFill>
-                <a:latin typeface="Courier New"/>
+              <a:rPr sz="1700">
+                <a:solidFill>
+                  <a:srgbClr val="0E1A26"/>
+                </a:solidFill>
+                <a:latin typeface="JetBrains Mono"/>
               </a:rPr>
               <a:t>  fix_email_index.sql</a:t>
             </a:r>
@@ -13727,11 +13631,11 @@
               </a:lnSpc>
             </a:pPr>
             <a:r>
-              <a:rPr sz="1300">
-                <a:solidFill>
-                  <a:srgbClr val="1B2733"/>
-                </a:solidFill>
-                <a:latin typeface="Courier New"/>
+              <a:rPr sz="1700">
+                <a:solidFill>
+                  <a:srgbClr val="0E1A26"/>
+                </a:solidFill>
+                <a:latin typeface="JetBrains Mono"/>
               </a:rPr>
               <a:t>  add_phone_v2.sql</a:t>
             </a:r>
@@ -13746,8 +13650,8 @@
         </p:nvSpPr>
         <p:spPr>
           <a:xfrm>
-            <a:off x="777240" y="3572001"/>
-            <a:ext cx="10637215" cy="280670"/>
+            <a:off x="777240" y="3936746"/>
+            <a:ext cx="10637215" cy="346710"/>
           </a:xfrm>
           <a:prstGeom prst="rect">
             <a:avLst/>
@@ -13766,9 +13670,9 @@
               </a:lnSpc>
             </a:pPr>
             <a:r>
-              <a:rPr sz="1700" b="0">
-                <a:solidFill>
-                  <a:srgbClr val="374451"/>
+              <a:rPr sz="2100" b="0">
+                <a:solidFill>
+                  <a:srgbClr val="212C38"/>
                 </a:solidFill>
                 <a:latin typeface="Arial"/>
               </a:rPr>
@@ -13801,9 +13705,9 @@
           <a:p>
             <a:pPr algn="r"/>
             <a:r>
-              <a:rPr sz="1100">
-                <a:solidFill>
-                  <a:srgbClr val="6B7784"/>
+              <a:rPr sz="1200">
+                <a:solidFill>
+                  <a:srgbClr val="626E7B"/>
                 </a:solidFill>
                 <a:latin typeface="Arial"/>
               </a:rPr>
@@ -13861,9 +13765,9 @@
           <a:lstStyle/>
           <a:p>
             <a:r>
-              <a:rPr sz="2900" b="1">
-                <a:solidFill>
-                  <a:srgbClr val="1B2533"/>
+              <a:rPr sz="3300" b="1">
+                <a:solidFill>
+                  <a:srgbClr val="111A24"/>
                 </a:solidFill>
                 <a:latin typeface="Arial"/>
               </a:rPr>
@@ -13887,7 +13791,7 @@
             <a:avLst/>
           </a:prstGeom>
           <a:solidFill>
-            <a:srgbClr val="00ADD8"/>
+            <a:srgbClr val="008CB0"/>
           </a:solidFill>
           <a:ln>
             <a:noFill/>
@@ -13924,8 +13828,8 @@
         </p:nvSpPr>
         <p:spPr>
           <a:xfrm>
-            <a:off x="777240" y="1572768"/>
-            <a:ext cx="10637215" cy="280670"/>
+            <a:off x="777240" y="1536192"/>
+            <a:ext cx="10637215" cy="346710"/>
           </a:xfrm>
           <a:prstGeom prst="rect">
             <a:avLst/>
@@ -13944,9 +13848,9 @@
               </a:lnSpc>
             </a:pPr>
             <a:r>
-              <a:rPr sz="1700" b="0">
-                <a:solidFill>
-                  <a:srgbClr val="374451"/>
+              <a:rPr sz="2100" b="0">
+                <a:solidFill>
+                  <a:srgbClr val="212C38"/>
                 </a:solidFill>
                 <a:latin typeface="Arial"/>
               </a:rPr>
@@ -13963,8 +13867,8 @@
         </p:nvSpPr>
         <p:spPr>
           <a:xfrm>
-            <a:off x="777240" y="2008885"/>
-            <a:ext cx="10637215" cy="1416304"/>
+            <a:off x="777240" y="2038349"/>
+            <a:ext cx="10637215" cy="1749551"/>
           </a:xfrm>
           <a:prstGeom prst="rect">
             <a:avLst/>
@@ -13982,22 +13886,22 @@
                 <a:spcPct val="128000"/>
               </a:lnSpc>
               <a:spcAft>
-                <a:spcPts val="578"/>
+                <a:spcPts val="714"/>
               </a:spcAft>
             </a:pPr>
             <a:r>
-              <a:rPr sz="1700" b="1">
-                <a:solidFill>
-                  <a:srgbClr val="00ADD8"/>
+              <a:rPr sz="2100" b="1">
+                <a:solidFill>
+                  <a:srgbClr val="008CB0"/>
                 </a:solidFill>
                 <a:latin typeface="Arial"/>
               </a:rPr>
               <a:t>•   </a:t>
             </a:r>
             <a:r>
-              <a:rPr sz="1700" b="0">
-                <a:solidFill>
-                  <a:srgbClr val="374451"/>
+              <a:rPr sz="2100" b="0">
+                <a:solidFill>
+                  <a:srgbClr val="212C38"/>
                 </a:solidFill>
                 <a:latin typeface="Arial"/>
               </a:rPr>
@@ -14010,22 +13914,22 @@
                 <a:spcPct val="128000"/>
               </a:lnSpc>
               <a:spcAft>
-                <a:spcPts val="578"/>
+                <a:spcPts val="714"/>
               </a:spcAft>
             </a:pPr>
             <a:r>
-              <a:rPr sz="1700" b="1">
-                <a:solidFill>
-                  <a:srgbClr val="00ADD8"/>
+              <a:rPr sz="2100" b="1">
+                <a:solidFill>
+                  <a:srgbClr val="008CB0"/>
                 </a:solidFill>
                 <a:latin typeface="Arial"/>
               </a:rPr>
               <a:t>•   </a:t>
             </a:r>
             <a:r>
-              <a:rPr sz="1700" b="0">
-                <a:solidFill>
-                  <a:srgbClr val="374451"/>
+              <a:rPr sz="2100" b="0">
+                <a:solidFill>
+                  <a:srgbClr val="212C38"/>
                 </a:solidFill>
                 <a:latin typeface="Arial"/>
               </a:rPr>
@@ -14038,22 +13942,22 @@
                 <a:spcPct val="128000"/>
               </a:lnSpc>
               <a:spcAft>
-                <a:spcPts val="578"/>
+                <a:spcPts val="714"/>
               </a:spcAft>
             </a:pPr>
             <a:r>
-              <a:rPr sz="1700" b="1">
-                <a:solidFill>
-                  <a:srgbClr val="00ADD8"/>
+              <a:rPr sz="2100" b="1">
+                <a:solidFill>
+                  <a:srgbClr val="008CB0"/>
                 </a:solidFill>
                 <a:latin typeface="Arial"/>
               </a:rPr>
               <a:t>•   </a:t>
             </a:r>
             <a:r>
-              <a:rPr sz="1700" b="0">
-                <a:solidFill>
-                  <a:srgbClr val="374451"/>
+              <a:rPr sz="2100" b="0">
+                <a:solidFill>
+                  <a:srgbClr val="212C38"/>
                 </a:solidFill>
                 <a:latin typeface="Arial"/>
               </a:rPr>
@@ -14066,22 +13970,22 @@
                 <a:spcPct val="128000"/>
               </a:lnSpc>
               <a:spcAft>
-                <a:spcPts val="578"/>
+                <a:spcPts val="714"/>
               </a:spcAft>
             </a:pPr>
             <a:r>
-              <a:rPr sz="1700" b="1">
-                <a:solidFill>
-                  <a:srgbClr val="00ADD8"/>
+              <a:rPr sz="2100" b="1">
+                <a:solidFill>
+                  <a:srgbClr val="008CB0"/>
                 </a:solidFill>
                 <a:latin typeface="Arial"/>
               </a:rPr>
               <a:t>•   </a:t>
             </a:r>
             <a:r>
-              <a:rPr sz="1700" b="0">
-                <a:solidFill>
-                  <a:srgbClr val="374451"/>
+              <a:rPr sz="2100" b="0">
+                <a:solidFill>
+                  <a:srgbClr val="212C38"/>
                 </a:solidFill>
                 <a:latin typeface="Arial"/>
               </a:rPr>
@@ -14098,8 +14002,8 @@
         </p:nvSpPr>
         <p:spPr>
           <a:xfrm>
-            <a:off x="777240" y="3608070"/>
-            <a:ext cx="10637215" cy="280670"/>
+            <a:off x="777240" y="3970782"/>
+            <a:ext cx="10637215" cy="346710"/>
           </a:xfrm>
           <a:prstGeom prst="rect">
             <a:avLst/>
@@ -14118,9 +14022,9 @@
               </a:lnSpc>
             </a:pPr>
             <a:r>
-              <a:rPr sz="1700" b="0">
-                <a:solidFill>
-                  <a:srgbClr val="374451"/>
+              <a:rPr sz="2100" b="0">
+                <a:solidFill>
+                  <a:srgbClr val="212C38"/>
                 </a:solidFill>
                 <a:latin typeface="Arial"/>
               </a:rPr>
@@ -14153,9 +14057,9 @@
           <a:p>
             <a:pPr algn="r"/>
             <a:r>
-              <a:rPr sz="1100">
-                <a:solidFill>
-                  <a:srgbClr val="6B7784"/>
+              <a:rPr sz="1200">
+                <a:solidFill>
+                  <a:srgbClr val="626E7B"/>
                 </a:solidFill>
                 <a:latin typeface="Arial"/>
               </a:rPr>
@@ -14213,9 +14117,9 @@
           <a:lstStyle/>
           <a:p>
             <a:r>
-              <a:rPr sz="2900" b="1">
-                <a:solidFill>
-                  <a:srgbClr val="1B2533"/>
+              <a:rPr sz="3300" b="1">
+                <a:solidFill>
+                  <a:srgbClr val="111A24"/>
                 </a:solidFill>
                 <a:latin typeface="Arial"/>
               </a:rPr>
@@ -14239,7 +14143,7 @@
             <a:avLst/>
           </a:prstGeom>
           <a:solidFill>
-            <a:srgbClr val="00ADD8"/>
+            <a:srgbClr val="008CB0"/>
           </a:solidFill>
           <a:ln>
             <a:noFill/>
@@ -14276,8 +14180,8 @@
         </p:nvSpPr>
         <p:spPr>
           <a:xfrm>
-            <a:off x="777240" y="1572768"/>
-            <a:ext cx="10637215" cy="280670"/>
+            <a:off x="777240" y="1536192"/>
+            <a:ext cx="10637215" cy="346710"/>
           </a:xfrm>
           <a:prstGeom prst="rect">
             <a:avLst/>
@@ -14296,9 +14200,9 @@
               </a:lnSpc>
             </a:pPr>
             <a:r>
-              <a:rPr sz="1700" b="0">
-                <a:solidFill>
-                  <a:srgbClr val="374451"/>
+              <a:rPr sz="2100" b="0">
+                <a:solidFill>
+                  <a:srgbClr val="212C38"/>
                 </a:solidFill>
                 <a:latin typeface="Arial"/>
               </a:rPr>
@@ -14315,8 +14219,8 @@
         </p:nvSpPr>
         <p:spPr>
           <a:xfrm>
-            <a:off x="777240" y="2008885"/>
-            <a:ext cx="10637215" cy="471931"/>
+            <a:off x="777240" y="2038349"/>
+            <a:ext cx="10637215" cy="538988"/>
           </a:xfrm>
           <a:prstGeom prst="roundRect">
             <a:avLst>
@@ -14324,11 +14228,11 @@
             </a:avLst>
           </a:prstGeom>
           <a:solidFill>
-            <a:srgbClr val="F3F6F8"/>
+            <a:srgbClr val="ECF2F6"/>
           </a:solidFill>
           <a:ln w="9525">
             <a:solidFill>
-              <a:srgbClr val="DDE3E8"/>
+              <a:srgbClr val="C9D4DC"/>
             </a:solidFill>
           </a:ln>
           <a:effectLst/>
@@ -14357,11 +14261,11 @@
               </a:lnSpc>
             </a:pPr>
             <a:r>
-              <a:rPr sz="1300">
-                <a:solidFill>
-                  <a:srgbClr val="1B2733"/>
-                </a:solidFill>
-                <a:latin typeface="Courier New"/>
+              <a:rPr sz="1700">
+                <a:solidFill>
+                  <a:srgbClr val="0E1A26"/>
+                </a:solidFill>
+                <a:latin typeface="JetBrains Mono"/>
               </a:rPr>
               <a:t>db.AutoMigrate(&amp;User{})</a:t>
             </a:r>
@@ -14376,8 +14280,8 @@
         </p:nvSpPr>
         <p:spPr>
           <a:xfrm>
-            <a:off x="777240" y="2700274"/>
-            <a:ext cx="10637215" cy="280670"/>
+            <a:off x="777240" y="2796794"/>
+            <a:ext cx="10637215" cy="346710"/>
           </a:xfrm>
           <a:prstGeom prst="rect">
             <a:avLst/>
@@ -14396,9 +14300,9 @@
               </a:lnSpc>
             </a:pPr>
             <a:r>
-              <a:rPr sz="1700" b="0">
-                <a:solidFill>
-                  <a:srgbClr val="374451"/>
+              <a:rPr sz="2100" b="0">
+                <a:solidFill>
+                  <a:srgbClr val="212C38"/>
                 </a:solidFill>
                 <a:latin typeface="Arial"/>
               </a:rPr>
@@ -14431,9 +14335,9 @@
           <a:p>
             <a:pPr algn="r"/>
             <a:r>
-              <a:rPr sz="1100">
-                <a:solidFill>
-                  <a:srgbClr val="6B7784"/>
+              <a:rPr sz="1200">
+                <a:solidFill>
+                  <a:srgbClr val="626E7B"/>
                 </a:solidFill>
                 <a:latin typeface="Arial"/>
               </a:rPr>
@@ -14491,9 +14395,9 @@
           <a:lstStyle/>
           <a:p>
             <a:r>
-              <a:rPr sz="2900" b="1">
-                <a:solidFill>
-                  <a:srgbClr val="1B2533"/>
+              <a:rPr sz="3300" b="1">
+                <a:solidFill>
+                  <a:srgbClr val="111A24"/>
                 </a:solidFill>
                 <a:latin typeface="Arial"/>
               </a:rPr>
@@ -14517,7 +14421,7 @@
             <a:avLst/>
           </a:prstGeom>
           <a:solidFill>
-            <a:srgbClr val="00ADD8"/>
+            <a:srgbClr val="008CB0"/>
           </a:solidFill>
           <a:ln>
             <a:noFill/>
@@ -14554,8 +14458,8 @@
         </p:nvSpPr>
         <p:spPr>
           <a:xfrm>
-            <a:off x="777240" y="1572768"/>
-            <a:ext cx="10637215" cy="1416304"/>
+            <a:off x="777240" y="1536192"/>
+            <a:ext cx="10637215" cy="1749551"/>
           </a:xfrm>
           <a:prstGeom prst="rect">
             <a:avLst/>
@@ -14573,22 +14477,22 @@
                 <a:spcPct val="128000"/>
               </a:lnSpc>
               <a:spcAft>
-                <a:spcPts val="578"/>
+                <a:spcPts val="714"/>
               </a:spcAft>
             </a:pPr>
             <a:r>
-              <a:rPr sz="1700" b="1">
-                <a:solidFill>
-                  <a:srgbClr val="00ADD8"/>
+              <a:rPr sz="2100" b="1">
+                <a:solidFill>
+                  <a:srgbClr val="008CB0"/>
                 </a:solidFill>
                 <a:latin typeface="Arial"/>
               </a:rPr>
               <a:t>1.  </a:t>
             </a:r>
             <a:r>
-              <a:rPr sz="1700" b="0">
-                <a:solidFill>
-                  <a:srgbClr val="374451"/>
+              <a:rPr sz="2100" b="0">
+                <a:solidFill>
+                  <a:srgbClr val="212C38"/>
                 </a:solidFill>
                 <a:latin typeface="Arial"/>
               </a:rPr>
@@ -14601,40 +14505,40 @@
                 <a:spcPct val="128000"/>
               </a:lnSpc>
               <a:spcAft>
-                <a:spcPts val="578"/>
+                <a:spcPts val="714"/>
               </a:spcAft>
             </a:pPr>
             <a:r>
-              <a:rPr sz="1700" b="1">
-                <a:solidFill>
-                  <a:srgbClr val="00ADD8"/>
+              <a:rPr sz="2100" b="1">
+                <a:solidFill>
+                  <a:srgbClr val="008CB0"/>
                 </a:solidFill>
                 <a:latin typeface="Arial"/>
               </a:rPr>
               <a:t>2.  </a:t>
             </a:r>
             <a:r>
-              <a:rPr sz="1700" b="0">
-                <a:solidFill>
-                  <a:srgbClr val="374451"/>
+              <a:rPr sz="2100" b="0">
+                <a:solidFill>
+                  <a:srgbClr val="212C38"/>
                 </a:solidFill>
                 <a:latin typeface="Arial"/>
               </a:rPr>
               <a:t>Query ke </a:t>
             </a:r>
             <a:r>
-              <a:rPr sz="1530" b="0">
-                <a:solidFill>
-                  <a:srgbClr val="374451"/>
-                </a:solidFill>
-                <a:latin typeface="Courier New"/>
+              <a:rPr sz="1890" b="0">
+                <a:solidFill>
+                  <a:srgbClr val="212C38"/>
+                </a:solidFill>
+                <a:latin typeface="JetBrains Mono"/>
               </a:rPr>
               <a:t>information_schema</a:t>
             </a:r>
             <a:r>
-              <a:rPr sz="1700" b="0">
-                <a:solidFill>
-                  <a:srgbClr val="374451"/>
+              <a:rPr sz="2100" b="0">
+                <a:solidFill>
+                  <a:srgbClr val="212C38"/>
                 </a:solidFill>
                 <a:latin typeface="Arial"/>
               </a:rPr>
@@ -14647,22 +14551,22 @@
                 <a:spcPct val="128000"/>
               </a:lnSpc>
               <a:spcAft>
-                <a:spcPts val="578"/>
+                <a:spcPts val="714"/>
               </a:spcAft>
             </a:pPr>
             <a:r>
-              <a:rPr sz="1700" b="1">
-                <a:solidFill>
-                  <a:srgbClr val="00ADD8"/>
+              <a:rPr sz="2100" b="1">
+                <a:solidFill>
+                  <a:srgbClr val="008CB0"/>
                 </a:solidFill>
                 <a:latin typeface="Arial"/>
               </a:rPr>
               <a:t>3.  </a:t>
             </a:r>
             <a:r>
-              <a:rPr sz="1700" b="0">
-                <a:solidFill>
-                  <a:srgbClr val="374451"/>
+              <a:rPr sz="2100" b="0">
+                <a:solidFill>
+                  <a:srgbClr val="212C38"/>
                 </a:solidFill>
                 <a:latin typeface="Arial"/>
               </a:rPr>
@@ -14675,40 +14579,40 @@
                 <a:spcPct val="128000"/>
               </a:lnSpc>
               <a:spcAft>
-                <a:spcPts val="578"/>
+                <a:spcPts val="714"/>
               </a:spcAft>
             </a:pPr>
             <a:r>
-              <a:rPr sz="1700" b="1">
-                <a:solidFill>
-                  <a:srgbClr val="00ADD8"/>
+              <a:rPr sz="2100" b="1">
+                <a:solidFill>
+                  <a:srgbClr val="008CB0"/>
                 </a:solidFill>
                 <a:latin typeface="Arial"/>
               </a:rPr>
               <a:t>4.  </a:t>
             </a:r>
             <a:r>
-              <a:rPr sz="1700" b="0">
-                <a:solidFill>
-                  <a:srgbClr val="374451"/>
+              <a:rPr sz="2100" b="0">
+                <a:solidFill>
+                  <a:srgbClr val="212C38"/>
                 </a:solidFill>
                 <a:latin typeface="Arial"/>
               </a:rPr>
               <a:t>Generate </a:t>
             </a:r>
             <a:r>
-              <a:rPr sz="1530" b="0">
-                <a:solidFill>
-                  <a:srgbClr val="374451"/>
-                </a:solidFill>
-                <a:latin typeface="Courier New"/>
+              <a:rPr sz="1890" b="0">
+                <a:solidFill>
+                  <a:srgbClr val="212C38"/>
+                </a:solidFill>
+                <a:latin typeface="JetBrains Mono"/>
               </a:rPr>
               <a:t>ALTER TABLE</a:t>
             </a:r>
             <a:r>
-              <a:rPr sz="1700" b="0">
-                <a:solidFill>
-                  <a:srgbClr val="374451"/>
+              <a:rPr sz="2100" b="0">
+                <a:solidFill>
+                  <a:srgbClr val="212C38"/>
                 </a:solidFill>
                 <a:latin typeface="Arial"/>
               </a:rPr>
@@ -14725,8 +14629,8 @@
         </p:nvSpPr>
         <p:spPr>
           <a:xfrm>
-            <a:off x="777240" y="3171952"/>
-            <a:ext cx="10637215" cy="280670"/>
+            <a:off x="777240" y="3468623"/>
+            <a:ext cx="10637215" cy="346710"/>
           </a:xfrm>
           <a:prstGeom prst="rect">
             <a:avLst/>
@@ -14745,9 +14649,9 @@
               </a:lnSpc>
             </a:pPr>
             <a:r>
-              <a:rPr sz="1700" b="0">
-                <a:solidFill>
-                  <a:srgbClr val="374451"/>
+              <a:rPr sz="2100" b="0">
+                <a:solidFill>
+                  <a:srgbClr val="212C38"/>
                 </a:solidFill>
                 <a:latin typeface="Arial"/>
               </a:rPr>
@@ -14764,14 +14668,14 @@
         </p:nvSpPr>
         <p:spPr>
           <a:xfrm>
-            <a:off x="777240" y="3608070"/>
-            <a:ext cx="41148" cy="280670"/>
+            <a:off x="777240" y="3970781"/>
+            <a:ext cx="41148" cy="346710"/>
           </a:xfrm>
           <a:prstGeom prst="rect">
             <a:avLst/>
           </a:prstGeom>
           <a:solidFill>
-            <a:srgbClr val="00ADD8"/>
+            <a:srgbClr val="008CB0"/>
           </a:solidFill>
           <a:ln>
             <a:noFill/>
@@ -14808,8 +14712,8 @@
         </p:nvSpPr>
         <p:spPr>
           <a:xfrm>
-            <a:off x="978408" y="3608070"/>
-            <a:ext cx="10436047" cy="280670"/>
+            <a:off x="978408" y="3970781"/>
+            <a:ext cx="10436047" cy="346710"/>
           </a:xfrm>
           <a:prstGeom prst="rect">
             <a:avLst/>
@@ -14828,9 +14732,9 @@
               </a:lnSpc>
             </a:pPr>
             <a:r>
-              <a:rPr sz="1700" b="0" i="1">
-                <a:solidFill>
-                  <a:srgbClr val="1B2533"/>
+              <a:rPr sz="2100" b="0" i="1">
+                <a:solidFill>
+                  <a:srgbClr val="111A24"/>
                 </a:solidFill>
                 <a:latin typeface="Arial"/>
               </a:rPr>
@@ -14847,8 +14751,8 @@
         </p:nvSpPr>
         <p:spPr>
           <a:xfrm>
-            <a:off x="777240" y="4044188"/>
-            <a:ext cx="10637215" cy="280670"/>
+            <a:off x="777240" y="4472939"/>
+            <a:ext cx="10637215" cy="346710"/>
           </a:xfrm>
           <a:prstGeom prst="rect">
             <a:avLst/>
@@ -14867,9 +14771,9 @@
               </a:lnSpc>
             </a:pPr>
             <a:r>
-              <a:rPr sz="1700" b="0">
-                <a:solidFill>
-                  <a:srgbClr val="374451"/>
+              <a:rPr sz="2100" b="0">
+                <a:solidFill>
+                  <a:srgbClr val="212C38"/>
                 </a:solidFill>
                 <a:latin typeface="Arial"/>
               </a:rPr>
@@ -14902,9 +14806,9 @@
           <a:p>
             <a:pPr algn="r"/>
             <a:r>
-              <a:rPr sz="1100">
-                <a:solidFill>
-                  <a:srgbClr val="6B7784"/>
+              <a:rPr sz="1200">
+                <a:solidFill>
+                  <a:srgbClr val="626E7B"/>
                 </a:solidFill>
                 <a:latin typeface="Arial"/>
               </a:rPr>
